--- a/WWWim_Propositie.pptx
+++ b/WWWim_Propositie.pptx
@@ -20,9 +20,9 @@
     <p:sldId id="325" r:id="rId11"/>
     <p:sldId id="328" r:id="rId12"/>
     <p:sldId id="329" r:id="rId13"/>
-    <p:sldId id="338" r:id="rId14"/>
+    <p:sldId id="341" r:id="rId14"/>
     <p:sldId id="331" r:id="rId15"/>
-    <p:sldId id="332" r:id="rId16"/>
+    <p:sldId id="347" r:id="rId16"/>
     <p:sldId id="319" r:id="rId17"/>
     <p:sldId id="296" r:id="rId18"/>
     <p:sldId id="298" r:id="rId19"/>
@@ -1363,15 +1363,17 @@
           </a:bodyPr>
           <a:lstStyle/>
           <a:p>
-            <a:pPr algn="l"/>
-            <a:r>
-              <a:rPr lang="nl-BE" sz="2800" b="1">
+            <a:pPr algn="l">
+              <a:buNone/>
+            </a:pPr>
+            <a:r>
+              <a:rPr lang="nl-BE" sz="2800" b="1" dirty="0">
                 <a:solidFill>
                   <a:srgbClr val="1A1A1A"/>
                 </a:solidFill>
                 <a:latin typeface="Trebuchet MS"/>
               </a:rPr>
-              <a:t>Tips voor dagelijks gebruik</a:t>
+              <a:t>Extra tips bij het gebruik van Claude</a:t>
             </a:r>
           </a:p>
         </p:txBody>
@@ -1713,7 +1715,7 @@
                 </a:solidFill>
                 <a:latin typeface="Calibri"/>
               </a:rPr>
-              <a:t>Klantdata of vertrouwelijke documenten horen niet in een publieke AI-chat. Check welk plan je bedrijf gebruikt.</a:t>
+              <a:t>Klantdata of vertrouwelijke documenten? Check of je bedrijf een Team- of Enterprise-plan heeft — die bieden extra bescherming.</a:t>
             </a:r>
           </a:p>
         </p:txBody>
@@ -1756,7 +1758,7 @@
                 </a:solidFill>
                 <a:latin typeface="Trebuchet MS"/>
               </a:rPr>
-              <a:t>Sla goede prompts op</a:t>
+              <a:t>Itereer én bewaar wat werkt</a:t>
             </a:r>
           </a:p>
           <a:p>
@@ -1773,7 +1775,7 @@
                 </a:solidFill>
                 <a:latin typeface="Calibri"/>
               </a:rPr>
-              <a:t>Een prompt die werkt voor offertes of samenvattingen? Bewaar die als template. Dát is echte tijdswinst.</a:t>
+              <a:t>Niet tevreden? Zeg wat er beter kan — Claude leert binnen het gesprek. Werkt een prompt goed? Bewaar die als template.</a:t>
             </a:r>
           </a:p>
         </p:txBody>
@@ -1781,7 +1783,7 @@
     </p:spTree>
     <p:extLst>
       <p:ext uri="{BB962C8B-B14F-4D97-AF65-F5344CB8AC3E}">
-        <p14:creationId xmlns:p14="http://schemas.microsoft.com/office/powerpoint/2010/main" val="326797186"/>
+        <p14:creationId xmlns:p14="http://schemas.microsoft.com/office/powerpoint/2010/main" val="3181506291"/>
       </p:ext>
     </p:extLst>
   </p:cSld>
@@ -1810,10 +1812,10 @@
       </p:grpSpPr>
       <p:pic>
         <p:nvPicPr>
-          <p:cNvPr id="2" name="Afbeelding 1">
+          <p:cNvPr id="3" name="Afbeelding 2">
             <a:extLst>
               <a:ext uri="{FF2B5EF4-FFF2-40B4-BE49-F238E27FC236}">
-                <a16:creationId xmlns:a16="http://schemas.microsoft.com/office/drawing/2014/main" id="{7F0FC79A-FA71-B93E-176E-749E6044CB37}"/>
+                <a16:creationId xmlns:a16="http://schemas.microsoft.com/office/drawing/2014/main" id="{A58DCAFC-DCFF-AD14-C19B-081FBBD05459}"/>
               </a:ext>
             </a:extLst>
           </p:cNvPr>
@@ -1830,8 +1832,8 @@
         </p:blipFill>
         <p:spPr>
           <a:xfrm>
-            <a:off x="978144" y="0"/>
-            <a:ext cx="7187712" cy="5143500"/>
+            <a:off x="1749347" y="0"/>
+            <a:ext cx="5645305" cy="5143500"/>
           </a:xfrm>
           <a:prstGeom prst="rect">
             <a:avLst/>
@@ -1870,10 +1872,280 @@
       </p:grpSpPr>
       <p:sp>
         <p:nvSpPr>
-          <p:cNvPr id="3" name="Tekstvak 2">
+          <p:cNvPr id="2" name="Rechthoek 1">
             <a:extLst>
               <a:ext uri="{FF2B5EF4-FFF2-40B4-BE49-F238E27FC236}">
-                <a16:creationId xmlns:a16="http://schemas.microsoft.com/office/drawing/2014/main" id="{203DB762-69CA-1C40-07FE-B73939AFAA5E}"/>
+                <a16:creationId xmlns:a16="http://schemas.microsoft.com/office/drawing/2014/main" id="{1CBB5038-497D-8A4B-975E-8EF5F1C666AB}"/>
+              </a:ext>
+            </a:extLst>
+          </p:cNvPr>
+          <p:cNvSpPr/>
+          <p:nvPr/>
+        </p:nvSpPr>
+        <p:spPr>
+          <a:xfrm>
+            <a:off x="0" y="0"/>
+            <a:ext cx="9144000" cy="114300"/>
+          </a:xfrm>
+          <a:prstGeom prst="rect">
+            <a:avLst/>
+          </a:prstGeom>
+          <a:solidFill>
+            <a:srgbClr val="5B8DB8"/>
+          </a:solidFill>
+          <a:ln w="12700" cap="flat" cmpd="sng" algn="ctr">
+            <a:noFill/>
+            <a:prstDash val="solid"/>
+            <a:miter lim="800000"/>
+          </a:ln>
+        </p:spPr>
+        <p:style>
+          <a:lnRef idx="2">
+            <a:schemeClr val="accent1">
+              <a:shade val="15000"/>
+            </a:schemeClr>
+          </a:lnRef>
+          <a:fillRef idx="1">
+            <a:schemeClr val="accent1"/>
+          </a:fillRef>
+          <a:effectRef idx="0">
+            <a:schemeClr val="accent1"/>
+          </a:effectRef>
+          <a:fontRef idx="minor">
+            <a:schemeClr val="lt1"/>
+          </a:fontRef>
+        </p:style>
+        <p:txBody>
+          <a:bodyPr vertOverflow="clip" horzOverflow="clip" rtlCol="0" anchor="t"/>
+          <a:lstStyle/>
+          <a:p>
+            <a:pPr algn="l"/>
+            <a:endParaRPr lang="nl-BE"/>
+          </a:p>
+        </p:txBody>
+      </p:sp>
+      <p:sp>
+        <p:nvSpPr>
+          <p:cNvPr id="8" name="Afgeronde rechthoek 7">
+            <a:extLst>
+              <a:ext uri="{FF2B5EF4-FFF2-40B4-BE49-F238E27FC236}">
+                <a16:creationId xmlns:a16="http://schemas.microsoft.com/office/drawing/2014/main" id="{AE7904E5-586D-4049-9B7F-D81F58E6B606}"/>
+              </a:ext>
+            </a:extLst>
+          </p:cNvPr>
+          <p:cNvSpPr/>
+          <p:nvPr/>
+        </p:nvSpPr>
+        <p:spPr>
+          <a:xfrm>
+            <a:off x="4762500" y="2984500"/>
+            <a:ext cx="3746500" cy="1905000"/>
+          </a:xfrm>
+          <a:prstGeom prst="roundRect">
+            <a:avLst/>
+          </a:prstGeom>
+          <a:solidFill>
+            <a:srgbClr val="F0F5FA"/>
+          </a:solidFill>
+          <a:ln w="12700" cap="flat" cmpd="sng" algn="ctr">
+            <a:noFill/>
+            <a:prstDash val="solid"/>
+            <a:miter lim="800000"/>
+          </a:ln>
+        </p:spPr>
+        <p:style>
+          <a:lnRef idx="2">
+            <a:schemeClr val="accent1">
+              <a:shade val="15000"/>
+            </a:schemeClr>
+          </a:lnRef>
+          <a:fillRef idx="1">
+            <a:schemeClr val="accent1"/>
+          </a:fillRef>
+          <a:effectRef idx="0">
+            <a:schemeClr val="accent1"/>
+          </a:effectRef>
+          <a:fontRef idx="minor">
+            <a:schemeClr val="lt1"/>
+          </a:fontRef>
+        </p:style>
+        <p:txBody>
+          <a:bodyPr vertOverflow="clip" horzOverflow="clip" rtlCol="0" anchor="t"/>
+          <a:lstStyle/>
+          <a:p>
+            <a:pPr algn="l"/>
+            <a:endParaRPr lang="nl-BE"/>
+          </a:p>
+        </p:txBody>
+      </p:sp>
+      <p:sp>
+        <p:nvSpPr>
+          <p:cNvPr id="7" name="Afgeronde rechthoek 6">
+            <a:extLst>
+              <a:ext uri="{FF2B5EF4-FFF2-40B4-BE49-F238E27FC236}">
+                <a16:creationId xmlns:a16="http://schemas.microsoft.com/office/drawing/2014/main" id="{9C39047B-47D3-6548-A0E3-2C97388E6EC5}"/>
+              </a:ext>
+            </a:extLst>
+          </p:cNvPr>
+          <p:cNvSpPr/>
+          <p:nvPr/>
+        </p:nvSpPr>
+        <p:spPr>
+          <a:xfrm>
+            <a:off x="635000" y="2984500"/>
+            <a:ext cx="3746500" cy="1905000"/>
+          </a:xfrm>
+          <a:prstGeom prst="roundRect">
+            <a:avLst/>
+          </a:prstGeom>
+          <a:solidFill>
+            <a:srgbClr val="F0F5FA"/>
+          </a:solidFill>
+          <a:ln w="12700" cap="flat" cmpd="sng" algn="ctr">
+            <a:noFill/>
+            <a:prstDash val="solid"/>
+            <a:miter lim="800000"/>
+          </a:ln>
+        </p:spPr>
+        <p:style>
+          <a:lnRef idx="2">
+            <a:schemeClr val="accent1">
+              <a:shade val="15000"/>
+            </a:schemeClr>
+          </a:lnRef>
+          <a:fillRef idx="1">
+            <a:schemeClr val="accent1"/>
+          </a:fillRef>
+          <a:effectRef idx="0">
+            <a:schemeClr val="accent1"/>
+          </a:effectRef>
+          <a:fontRef idx="minor">
+            <a:schemeClr val="lt1"/>
+          </a:fontRef>
+        </p:style>
+        <p:txBody>
+          <a:bodyPr vertOverflow="clip" horzOverflow="clip" rtlCol="0" anchor="t"/>
+          <a:lstStyle/>
+          <a:p>
+            <a:pPr algn="l"/>
+            <a:endParaRPr lang="nl-BE"/>
+          </a:p>
+        </p:txBody>
+      </p:sp>
+      <p:sp>
+        <p:nvSpPr>
+          <p:cNvPr id="6" name="Afgeronde rechthoek 5">
+            <a:extLst>
+              <a:ext uri="{FF2B5EF4-FFF2-40B4-BE49-F238E27FC236}">
+                <a16:creationId xmlns:a16="http://schemas.microsoft.com/office/drawing/2014/main" id="{293FEC2A-9C80-8845-8874-5566DA5B2456}"/>
+              </a:ext>
+            </a:extLst>
+          </p:cNvPr>
+          <p:cNvSpPr/>
+          <p:nvPr/>
+        </p:nvSpPr>
+        <p:spPr>
+          <a:xfrm>
+            <a:off x="4762500" y="952500"/>
+            <a:ext cx="3746500" cy="1905000"/>
+          </a:xfrm>
+          <a:prstGeom prst="roundRect">
+            <a:avLst/>
+          </a:prstGeom>
+          <a:solidFill>
+            <a:srgbClr val="F0F5FA"/>
+          </a:solidFill>
+          <a:ln w="12700" cap="flat" cmpd="sng" algn="ctr">
+            <a:noFill/>
+            <a:prstDash val="solid"/>
+            <a:miter lim="800000"/>
+          </a:ln>
+        </p:spPr>
+        <p:style>
+          <a:lnRef idx="2">
+            <a:schemeClr val="accent1">
+              <a:shade val="15000"/>
+            </a:schemeClr>
+          </a:lnRef>
+          <a:fillRef idx="1">
+            <a:schemeClr val="accent1"/>
+          </a:fillRef>
+          <a:effectRef idx="0">
+            <a:schemeClr val="accent1"/>
+          </a:effectRef>
+          <a:fontRef idx="minor">
+            <a:schemeClr val="lt1"/>
+          </a:fontRef>
+        </p:style>
+        <p:txBody>
+          <a:bodyPr vertOverflow="clip" horzOverflow="clip" rtlCol="0" anchor="t"/>
+          <a:lstStyle/>
+          <a:p>
+            <a:pPr algn="l"/>
+            <a:endParaRPr lang="nl-BE"/>
+          </a:p>
+        </p:txBody>
+      </p:sp>
+      <p:sp>
+        <p:nvSpPr>
+          <p:cNvPr id="5" name="Afgeronde rechthoek 4">
+            <a:extLst>
+              <a:ext uri="{FF2B5EF4-FFF2-40B4-BE49-F238E27FC236}">
+                <a16:creationId xmlns:a16="http://schemas.microsoft.com/office/drawing/2014/main" id="{79BA421C-0F5D-F544-9621-A0CF4FA7AA77}"/>
+              </a:ext>
+            </a:extLst>
+          </p:cNvPr>
+          <p:cNvSpPr/>
+          <p:nvPr/>
+        </p:nvSpPr>
+        <p:spPr>
+          <a:xfrm>
+            <a:off x="635000" y="952500"/>
+            <a:ext cx="3746500" cy="1905000"/>
+          </a:xfrm>
+          <a:prstGeom prst="roundRect">
+            <a:avLst/>
+          </a:prstGeom>
+          <a:solidFill>
+            <a:srgbClr val="F0F5FA"/>
+          </a:solidFill>
+          <a:ln w="12700" cap="flat" cmpd="sng" algn="ctr">
+            <a:noFill/>
+            <a:prstDash val="solid"/>
+            <a:miter lim="800000"/>
+          </a:ln>
+        </p:spPr>
+        <p:style>
+          <a:lnRef idx="2">
+            <a:schemeClr val="accent1">
+              <a:shade val="15000"/>
+            </a:schemeClr>
+          </a:lnRef>
+          <a:fillRef idx="1">
+            <a:schemeClr val="accent1"/>
+          </a:fillRef>
+          <a:effectRef idx="0">
+            <a:schemeClr val="accent1"/>
+          </a:effectRef>
+          <a:fontRef idx="minor">
+            <a:schemeClr val="lt1"/>
+          </a:fontRef>
+        </p:style>
+        <p:txBody>
+          <a:bodyPr vertOverflow="clip" horzOverflow="clip" rtlCol="0" anchor="t"/>
+          <a:lstStyle/>
+          <a:p>
+            <a:pPr algn="l"/>
+            <a:endParaRPr lang="nl-BE"/>
+          </a:p>
+        </p:txBody>
+      </p:sp>
+      <p:sp>
+        <p:nvSpPr>
+          <p:cNvPr id="4" name="Tekstvak 3">
+            <a:extLst>
+              <a:ext uri="{FF2B5EF4-FFF2-40B4-BE49-F238E27FC236}">
+                <a16:creationId xmlns:a16="http://schemas.microsoft.com/office/drawing/2014/main" id="{A1A83F18-2FD0-3146-ACAA-6355CDDFB3F7}"/>
               </a:ext>
             </a:extLst>
           </p:cNvPr>
@@ -1882,86 +2154,439 @@
         </p:nvSpPr>
         <p:spPr>
           <a:xfrm>
-            <a:off x="2286000" y="-1520706"/>
-            <a:ext cx="4572000" cy="7848302"/>
-          </a:xfrm>
-          <a:prstGeom prst="rect">
-            <a:avLst/>
-          </a:prstGeom>
-          <a:noFill/>
-        </p:spPr>
-        <p:txBody>
-          <a:bodyPr wrap="square">
-            <a:spAutoFit/>
+            <a:off x="635000" y="279400"/>
+            <a:ext cx="7772400" cy="508000"/>
+          </a:xfrm>
+          <a:prstGeom prst="rect">
+            <a:avLst/>
+          </a:prstGeom>
+          <a:noFill/>
+        </p:spPr>
+        <p:txBody>
+          <a:bodyPr vertOverflow="overflow" vert="horz" wrap="square" rtlCol="0" anchor="t">
+            <a:noAutofit/>
           </a:bodyPr>
           <a:lstStyle/>
           <a:p>
-            <a:pPr>
+            <a:pPr algn="l"/>
+            <a:r>
+              <a:rPr lang="nl-BE" sz="2800" b="1">
+                <a:solidFill>
+                  <a:srgbClr val="1A1A1A"/>
+                </a:solidFill>
+                <a:latin typeface="Trebuchet MS"/>
+              </a:rPr>
+              <a:t>Hoe zet je projecten slim in?</a:t>
+            </a:r>
+          </a:p>
+        </p:txBody>
+      </p:sp>
+      <p:sp>
+        <p:nvSpPr>
+          <p:cNvPr id="9" name="Tekstvak 8">
+            <a:extLst>
+              <a:ext uri="{FF2B5EF4-FFF2-40B4-BE49-F238E27FC236}">
+                <a16:creationId xmlns:a16="http://schemas.microsoft.com/office/drawing/2014/main" id="{76F61A6E-163D-8844-AE6D-5202556270A2}"/>
+              </a:ext>
+            </a:extLst>
+          </p:cNvPr>
+          <p:cNvSpPr txBox="1"/>
+          <p:nvPr/>
+        </p:nvSpPr>
+        <p:spPr>
+          <a:xfrm>
+            <a:off x="787400" y="1587500"/>
+            <a:ext cx="3441700" cy="1168400"/>
+          </a:xfrm>
+          <a:prstGeom prst="rect">
+            <a:avLst/>
+          </a:prstGeom>
+          <a:noFill/>
+        </p:spPr>
+        <p:txBody>
+          <a:bodyPr vertOverflow="overflow" vert="horz" wrap="square" rtlCol="0" anchor="t">
+            <a:noAutofit/>
+          </a:bodyPr>
+          <a:lstStyle/>
+          <a:p>
+            <a:pPr algn="l">
               <a:buNone/>
             </a:pPr>
             <a:r>
-              <a:rPr lang="nl-BE" b="1" dirty="0"/>
-              <a:t>Persoonlijke chat</a:t>
-            </a:r>
-            <a:r>
-              <a:rPr lang="nl-BE" dirty="0"/>
-              <a:t> is wat je al kent — losse gesprekken, alleen voor jou. Ideaal voor snelle vragen of gevoelige zaken die niet met het team gedeeld hoeven worden.</a:t>
-            </a:r>
-          </a:p>
-          <a:p>
-            <a:pPr>
+              <a:rPr lang="nl-BE" sz="1500" b="1" dirty="0">
+                <a:solidFill>
+                  <a:srgbClr val="5B8DB8"/>
+                </a:solidFill>
+                <a:latin typeface="Trebuchet MS"/>
+              </a:rPr>
+              <a:t>Vaste instructies zijn de sleutel</a:t>
+            </a:r>
+          </a:p>
+          <a:p>
+            <a:pPr algn="l">
+              <a:spcBef>
+                <a:spcPts val="200"/>
+              </a:spcBef>
               <a:buNone/>
             </a:pPr>
             <a:r>
-              <a:rPr lang="nl-BE" b="1" dirty="0"/>
-              <a:t>Projecten</a:t>
-            </a:r>
-            <a:r>
-              <a:rPr lang="nl-BE" dirty="0"/>
-              <a:t> zijn de echte organisatielaag. Je maakt een project aan per team, klant of thema. Binnen een project deel je drie dingen: de chatgeschiedenis (iedereen ziet elkaars gesprekken), geüploade documenten die altijd als context beschikbaar zijn, en vaste instructies die bepalen hoe Claude zich gedraagt in dat project.</a:t>
-            </a:r>
-          </a:p>
-          <a:p>
-            <a:pPr>
+              <a:rPr lang="nl-BE" sz="1200" dirty="0">
+                <a:solidFill>
+                  <a:srgbClr val="4A4A4A"/>
+                </a:solidFill>
+                <a:latin typeface="Calibri"/>
+              </a:rPr>
+              <a:t>Schrijf per project hoe Claude zich moet gedragen. Elke collega werkt dan automatisch in dezelfde stijl — zonder telkens opnieuw uit te leggen.</a:t>
+            </a:r>
+          </a:p>
+        </p:txBody>
+      </p:sp>
+      <p:sp>
+        <p:nvSpPr>
+          <p:cNvPr id="10" name="Tekstvak 9">
+            <a:extLst>
+              <a:ext uri="{FF2B5EF4-FFF2-40B4-BE49-F238E27FC236}">
+                <a16:creationId xmlns:a16="http://schemas.microsoft.com/office/drawing/2014/main" id="{FBB81392-7419-D146-A1BD-187791139D9A}"/>
+              </a:ext>
+            </a:extLst>
+          </p:cNvPr>
+          <p:cNvSpPr txBox="1"/>
+          <p:nvPr/>
+        </p:nvSpPr>
+        <p:spPr>
+          <a:xfrm>
+            <a:off x="4914900" y="1587500"/>
+            <a:ext cx="3441700" cy="1168400"/>
+          </a:xfrm>
+          <a:prstGeom prst="rect">
+            <a:avLst/>
+          </a:prstGeom>
+          <a:noFill/>
+        </p:spPr>
+        <p:txBody>
+          <a:bodyPr vertOverflow="overflow" vert="horz" wrap="square" rtlCol="0" anchor="t">
+            <a:noAutofit/>
+          </a:bodyPr>
+          <a:lstStyle/>
+          <a:p>
+            <a:pPr algn="l">
               <a:buNone/>
             </a:pPr>
             <a:r>
-              <a:rPr lang="nl-BE" b="1" dirty="0"/>
-              <a:t>Vaste instructies</a:t>
-            </a:r>
-            <a:r>
-              <a:rPr lang="nl-BE" dirty="0"/>
-              <a:t> zijn de sleutel. Stel je voor: je maakt een project "Offertes" en schrijft erin: "Schrijf altijd in zakelijk Nederlands, gebruik onze prijsstructuur uit het bijgevoegde document, en eindig elke offerte met onze garantieclausule." Vanaf dan doet elke collega in dat project automatisch AI-werk in die stijl — zonder telkens opnieuw uit te leggen.</a:t>
-            </a:r>
-          </a:p>
-          <a:p>
-            <a:pPr>
+              <a:rPr lang="nl-BE" sz="1500" b="1" dirty="0">
+                <a:solidFill>
+                  <a:srgbClr val="5B8DB8"/>
+                </a:solidFill>
+                <a:latin typeface="Trebuchet MS"/>
+              </a:rPr>
+              <a:t>Deel kennis via documenten</a:t>
+            </a:r>
+          </a:p>
+          <a:p>
+            <a:pPr algn="l">
+              <a:spcBef>
+                <a:spcPts val="200"/>
+              </a:spcBef>
               <a:buNone/>
             </a:pPr>
             <a:r>
-              <a:rPr lang="nl-BE" b="1" dirty="0"/>
-              <a:t>Artifacts</a:t>
-            </a:r>
-            <a:r>
-              <a:rPr lang="nl-BE" dirty="0"/>
-              <a:t> die je aanmaakt binnen een project blijven bewaard en zijn herbruikbaar door het hele team.</a:t>
-            </a:r>
-          </a:p>
-          <a:p>
-            <a:pPr>
+              <a:rPr lang="nl-BE" sz="1200" dirty="0">
+                <a:solidFill>
+                  <a:srgbClr val="4A4A4A"/>
+                </a:solidFill>
+                <a:latin typeface="Calibri"/>
+              </a:rPr>
+              <a:t>Upload documenten als context in een project. Claude gebruikt ze automatisch — zonder dat je ze telkens opnieuw moet meesturen.</a:t>
+            </a:r>
+          </a:p>
+        </p:txBody>
+      </p:sp>
+      <p:sp>
+        <p:nvSpPr>
+          <p:cNvPr id="11" name="Tekstvak 10">
+            <a:extLst>
+              <a:ext uri="{FF2B5EF4-FFF2-40B4-BE49-F238E27FC236}">
+                <a16:creationId xmlns:a16="http://schemas.microsoft.com/office/drawing/2014/main" id="{4027F194-E763-0947-AD7B-13A2F5F45E56}"/>
+              </a:ext>
+            </a:extLst>
+          </p:cNvPr>
+          <p:cNvSpPr txBox="1"/>
+          <p:nvPr/>
+        </p:nvSpPr>
+        <p:spPr>
+          <a:xfrm>
+            <a:off x="787400" y="3619500"/>
+            <a:ext cx="3441700" cy="1168400"/>
+          </a:xfrm>
+          <a:prstGeom prst="rect">
+            <a:avLst/>
+          </a:prstGeom>
+          <a:noFill/>
+        </p:spPr>
+        <p:txBody>
+          <a:bodyPr vertOverflow="overflow" vert="horz" wrap="square" rtlCol="0" anchor="t">
+            <a:noAutofit/>
+          </a:bodyPr>
+          <a:lstStyle/>
+          <a:p>
+            <a:pPr algn="l">
               <a:buNone/>
             </a:pPr>
             <a:r>
-              <a:rPr lang="nl-BE" dirty="0"/>
-              <a:t>Praktische tip: begin met 3-5 projecten maximum. Te veel projecten werkt verwarrend. Denk in termen van "welke context wil ik niet telkens opnieuw uitleggen?" — dat is een project.</a:t>
-            </a:r>
-          </a:p>
-        </p:txBody>
-      </p:sp>
+              <a:rPr lang="nl-BE" sz="1500" b="1" dirty="0">
+                <a:solidFill>
+                  <a:srgbClr val="5B8DB8"/>
+                </a:solidFill>
+                <a:latin typeface="Trebuchet MS"/>
+              </a:rPr>
+              <a:t>Artifacts blijven bewaard</a:t>
+            </a:r>
+          </a:p>
+          <a:p>
+            <a:pPr algn="l">
+              <a:spcBef>
+                <a:spcPts val="200"/>
+              </a:spcBef>
+              <a:buNone/>
+            </a:pPr>
+            <a:r>
+              <a:rPr lang="nl-BE" sz="1200" dirty="0">
+                <a:solidFill>
+                  <a:srgbClr val="4A4A4A"/>
+                </a:solidFill>
+                <a:latin typeface="Calibri"/>
+              </a:rPr>
+              <a:t>Wat je aanmaakt in een project is herbruikbaar door het hele team. Denk aan templates, samenvattingen of standaardteksten.</a:t>
+            </a:r>
+          </a:p>
+        </p:txBody>
+      </p:sp>
+      <p:sp>
+        <p:nvSpPr>
+          <p:cNvPr id="12" name="Tekstvak 11">
+            <a:extLst>
+              <a:ext uri="{FF2B5EF4-FFF2-40B4-BE49-F238E27FC236}">
+                <a16:creationId xmlns:a16="http://schemas.microsoft.com/office/drawing/2014/main" id="{FC40E8E5-0BE6-4D48-80F3-29826C788F8E}"/>
+              </a:ext>
+            </a:extLst>
+          </p:cNvPr>
+          <p:cNvSpPr txBox="1"/>
+          <p:nvPr/>
+        </p:nvSpPr>
+        <p:spPr>
+          <a:xfrm>
+            <a:off x="4914900" y="3619500"/>
+            <a:ext cx="3441700" cy="1168400"/>
+          </a:xfrm>
+          <a:prstGeom prst="rect">
+            <a:avLst/>
+          </a:prstGeom>
+          <a:noFill/>
+        </p:spPr>
+        <p:txBody>
+          <a:bodyPr vertOverflow="overflow" vert="horz" wrap="square" rtlCol="0" anchor="t">
+            <a:noAutofit/>
+          </a:bodyPr>
+          <a:lstStyle/>
+          <a:p>
+            <a:pPr algn="l">
+              <a:buNone/>
+            </a:pPr>
+            <a:r>
+              <a:rPr lang="nl-BE" sz="1500" b="1" dirty="0">
+                <a:solidFill>
+                  <a:srgbClr val="5B8DB8"/>
+                </a:solidFill>
+                <a:latin typeface="Trebuchet MS"/>
+              </a:rPr>
+              <a:t>Start met 3–5 projecten</a:t>
+            </a:r>
+          </a:p>
+          <a:p>
+            <a:pPr algn="l">
+              <a:spcBef>
+                <a:spcPts val="200"/>
+              </a:spcBef>
+              <a:buNone/>
+            </a:pPr>
+            <a:r>
+              <a:rPr lang="nl-BE" sz="1200" dirty="0">
+                <a:solidFill>
+                  <a:srgbClr val="4A4A4A"/>
+                </a:solidFill>
+                <a:latin typeface="Calibri"/>
+              </a:rPr>
+              <a:t>Denk in termen van “welke context wil ik niet telkens opnieuw uitleggen?” Dat is een project. Te veel projecten werkt verwarrend.</a:t>
+            </a:r>
+          </a:p>
+        </p:txBody>
+      </p:sp>
+      <p:sp>
+        <p:nvSpPr>
+          <p:cNvPr id="13" name="Tekstvak 12">
+            <a:extLst>
+              <a:ext uri="{FF2B5EF4-FFF2-40B4-BE49-F238E27FC236}">
+                <a16:creationId xmlns:a16="http://schemas.microsoft.com/office/drawing/2014/main" id="{2C2A1C8C-9BC6-8F46-9450-55F1EA403DF7}"/>
+              </a:ext>
+            </a:extLst>
+          </p:cNvPr>
+          <p:cNvSpPr txBox="1"/>
+          <p:nvPr/>
+        </p:nvSpPr>
+        <p:spPr>
+          <a:xfrm>
+            <a:off x="8407400" y="4864100"/>
+            <a:ext cx="457200" cy="279400"/>
+          </a:xfrm>
+          <a:prstGeom prst="rect">
+            <a:avLst/>
+          </a:prstGeom>
+          <a:noFill/>
+        </p:spPr>
+        <p:txBody>
+          <a:bodyPr vertOverflow="overflow" vert="horz" wrap="square" rtlCol="0" anchor="t">
+            <a:noAutofit/>
+          </a:bodyPr>
+          <a:lstStyle/>
+          <a:p>
+            <a:pPr algn="l"/>
+            <a:r>
+              <a:rPr lang="nl-BE" sz="1400">
+                <a:solidFill>
+                  <a:srgbClr val="AAAAAA"/>
+                </a:solidFill>
+                <a:latin typeface="Calibri"/>
+                <a:cs typeface="Calibri"/>
+              </a:rPr>
+              <a:t>9</a:t>
+            </a:r>
+          </a:p>
+        </p:txBody>
+      </p:sp>
+      <p:pic>
+        <p:nvPicPr>
+          <p:cNvPr id="14" name="Graphic 14" descr="Instructions icon"/>
+          <p:cNvPicPr>
+            <a:picLocks noChangeAspect="1"/>
+          </p:cNvPicPr>
+          <p:nvPr/>
+        </p:nvPicPr>
+        <p:blipFill>
+          <a:blip>
+            <a:extLst>
+              <a:ext uri="{96DAC541-7B7A-43D3-8B79-37D633B846F1}">
+                <asvg:svgBlip xmlns:asvg="http://schemas.microsoft.com/office/drawing/2016/SVG/main" r:embed="rId2"/>
+              </a:ext>
+            </a:extLst>
+          </a:blip>
+          <a:stretch>
+            <a:fillRect/>
+          </a:stretch>
+        </p:blipFill>
+        <p:spPr>
+          <a:xfrm>
+            <a:off x="787400" y="1054100"/>
+            <a:ext cx="457200" cy="457200"/>
+          </a:xfrm>
+          <a:prstGeom prst="rect">
+            <a:avLst/>
+          </a:prstGeom>
+        </p:spPr>
+      </p:pic>
+      <p:pic>
+        <p:nvPicPr>
+          <p:cNvPr id="15" name="Graphic 15" descr="Document knowledge icon"/>
+          <p:cNvPicPr>
+            <a:picLocks noChangeAspect="1"/>
+          </p:cNvPicPr>
+          <p:nvPr/>
+        </p:nvPicPr>
+        <p:blipFill>
+          <a:blip>
+            <a:extLst>
+              <a:ext uri="{96DAC541-7B7A-43D3-8B79-37D633B846F1}">
+                <asvg:svgBlip xmlns:asvg="http://schemas.microsoft.com/office/drawing/2016/SVG/main" r:embed="rId3"/>
+              </a:ext>
+            </a:extLst>
+          </a:blip>
+          <a:stretch>
+            <a:fillRect/>
+          </a:stretch>
+        </p:blipFill>
+        <p:spPr>
+          <a:xfrm>
+            <a:off x="4914900" y="1054100"/>
+            <a:ext cx="457200" cy="457200"/>
+          </a:xfrm>
+          <a:prstGeom prst="rect">
+            <a:avLst/>
+          </a:prstGeom>
+        </p:spPr>
+      </p:pic>
+      <p:pic>
+        <p:nvPicPr>
+          <p:cNvPr id="16" name="Graphic 16" descr="Artifacts icon"/>
+          <p:cNvPicPr>
+            <a:picLocks noChangeAspect="1"/>
+          </p:cNvPicPr>
+          <p:nvPr/>
+        </p:nvPicPr>
+        <p:blipFill>
+          <a:blip>
+            <a:extLst>
+              <a:ext uri="{96DAC541-7B7A-43D3-8B79-37D633B846F1}">
+                <asvg:svgBlip xmlns:asvg="http://schemas.microsoft.com/office/drawing/2016/SVG/main" r:embed="rId4"/>
+              </a:ext>
+            </a:extLst>
+          </a:blip>
+          <a:stretch>
+            <a:fillRect/>
+          </a:stretch>
+        </p:blipFill>
+        <p:spPr>
+          <a:xfrm>
+            <a:off x="787400" y="3086100"/>
+            <a:ext cx="457200" cy="457200"/>
+          </a:xfrm>
+          <a:prstGeom prst="rect">
+            <a:avLst/>
+          </a:prstGeom>
+        </p:spPr>
+      </p:pic>
+      <p:pic>
+        <p:nvPicPr>
+          <p:cNvPr id="17" name="Graphic 17" descr="Projects icon"/>
+          <p:cNvPicPr>
+            <a:picLocks noChangeAspect="1"/>
+          </p:cNvPicPr>
+          <p:nvPr/>
+        </p:nvPicPr>
+        <p:blipFill>
+          <a:blip>
+            <a:extLst>
+              <a:ext uri="{96DAC541-7B7A-43D3-8B79-37D633B846F1}">
+                <asvg:svgBlip xmlns:asvg="http://schemas.microsoft.com/office/drawing/2016/SVG/main" r:embed="rId5"/>
+              </a:ext>
+            </a:extLst>
+          </a:blip>
+          <a:stretch>
+            <a:fillRect/>
+          </a:stretch>
+        </p:blipFill>
+        <p:spPr>
+          <a:xfrm>
+            <a:off x="4914900" y="3086100"/>
+            <a:ext cx="457200" cy="457200"/>
+          </a:xfrm>
+          <a:prstGeom prst="rect">
+            <a:avLst/>
+          </a:prstGeom>
+        </p:spPr>
+      </p:pic>
     </p:spTree>
     <p:extLst>
       <p:ext uri="{BB962C8B-B14F-4D97-AF65-F5344CB8AC3E}">
-        <p14:creationId xmlns:p14="http://schemas.microsoft.com/office/powerpoint/2010/main" val="1208305388"/>
+        <p14:creationId xmlns:p14="http://schemas.microsoft.com/office/powerpoint/2010/main" val="548992597"/>
       </p:ext>
     </p:extLst>
   </p:cSld>

--- a/WWWim_Propositie.pptx
+++ b/WWWim_Propositie.pptx
@@ -5,31 +5,33 @@
     <p:sldMasterId id="2147483648" r:id="rId1"/>
   </p:sldMasterIdLst>
   <p:notesMasterIdLst>
-    <p:notesMasterId r:id="rId24"/>
+    <p:notesMasterId r:id="rId26"/>
   </p:notesMasterIdLst>
   <p:sldIdLst>
     <p:sldId id="305" r:id="rId2"/>
     <p:sldId id="324" r:id="rId3"/>
     <p:sldId id="308" r:id="rId4"/>
     <p:sldId id="312" r:id="rId5"/>
-    <p:sldId id="286" r:id="rId6"/>
-    <p:sldId id="310" r:id="rId7"/>
-    <p:sldId id="290" r:id="rId8"/>
-    <p:sldId id="326" r:id="rId9"/>
-    <p:sldId id="321" r:id="rId10"/>
-    <p:sldId id="325" r:id="rId11"/>
-    <p:sldId id="328" r:id="rId12"/>
-    <p:sldId id="329" r:id="rId13"/>
-    <p:sldId id="341" r:id="rId14"/>
-    <p:sldId id="331" r:id="rId15"/>
-    <p:sldId id="347" r:id="rId16"/>
-    <p:sldId id="319" r:id="rId17"/>
-    <p:sldId id="296" r:id="rId18"/>
-    <p:sldId id="298" r:id="rId19"/>
-    <p:sldId id="300" r:id="rId20"/>
-    <p:sldId id="302" r:id="rId21"/>
-    <p:sldId id="303" r:id="rId22"/>
-    <p:sldId id="327" r:id="rId23"/>
+    <p:sldId id="348" r:id="rId6"/>
+    <p:sldId id="286" r:id="rId7"/>
+    <p:sldId id="310" r:id="rId8"/>
+    <p:sldId id="290" r:id="rId9"/>
+    <p:sldId id="326" r:id="rId10"/>
+    <p:sldId id="349" r:id="rId11"/>
+    <p:sldId id="321" r:id="rId12"/>
+    <p:sldId id="325" r:id="rId13"/>
+    <p:sldId id="328" r:id="rId14"/>
+    <p:sldId id="329" r:id="rId15"/>
+    <p:sldId id="341" r:id="rId16"/>
+    <p:sldId id="331" r:id="rId17"/>
+    <p:sldId id="347" r:id="rId18"/>
+    <p:sldId id="350" r:id="rId19"/>
+    <p:sldId id="296" r:id="rId20"/>
+    <p:sldId id="298" r:id="rId21"/>
+    <p:sldId id="300" r:id="rId22"/>
+    <p:sldId id="302" r:id="rId23"/>
+    <p:sldId id="303" r:id="rId24"/>
+    <p:sldId id="327" r:id="rId25"/>
   </p:sldIdLst>
   <p:sldSz cx="9144000" cy="5143500" type="screen16x9"/>
   <p:notesSz cx="5143500" cy="9144000"/>
@@ -861,6 +863,948 @@
 </file>
 
 <file path=ppt/slides/slide10.xml><?xml version="1.0" encoding="utf-8"?>
+<p:sld xmlns:a="http://schemas.openxmlformats.org/drawingml/2006/main" xmlns:r="http://schemas.openxmlformats.org/officeDocument/2006/relationships" xmlns:p="http://schemas.openxmlformats.org/presentationml/2006/main">
+  <p:cSld>
+    <p:spTree>
+      <p:nvGrpSpPr>
+        <p:cNvPr id="1" name="">
+          <a:extLst>
+            <a:ext uri="{FF2B5EF4-FFF2-40B4-BE49-F238E27FC236}">
+              <a16:creationId xmlns:a16="http://schemas.microsoft.com/office/drawing/2014/main" id="{8D50EC0A-F7B9-98E7-5368-A4B5067823C1}"/>
+            </a:ext>
+          </a:extLst>
+        </p:cNvPr>
+        <p:cNvGrpSpPr/>
+        <p:nvPr/>
+      </p:nvGrpSpPr>
+      <p:grpSpPr>
+        <a:xfrm>
+          <a:off x="0" y="0"/>
+          <a:ext cx="0" cy="0"/>
+          <a:chOff x="0" y="0"/>
+          <a:chExt cx="0" cy="0"/>
+        </a:xfrm>
+      </p:grpSpPr>
+      <p:sp>
+        <p:nvSpPr>
+          <p:cNvPr id="2" name="Rechthoek 1">
+            <a:extLst>
+              <a:ext uri="{FF2B5EF4-FFF2-40B4-BE49-F238E27FC236}">
+                <a16:creationId xmlns:a16="http://schemas.microsoft.com/office/drawing/2014/main" id="{95AD3011-F4C5-3F4C-4852-B95357D5653D}"/>
+              </a:ext>
+            </a:extLst>
+          </p:cNvPr>
+          <p:cNvSpPr/>
+          <p:nvPr/>
+        </p:nvSpPr>
+        <p:spPr>
+          <a:xfrm>
+            <a:off x="0" y="0"/>
+            <a:ext cx="9144000" cy="114300"/>
+          </a:xfrm>
+          <a:prstGeom prst="rect">
+            <a:avLst/>
+          </a:prstGeom>
+          <a:solidFill>
+            <a:srgbClr val="5B8DB8"/>
+          </a:solidFill>
+          <a:ln w="12700" cap="flat" cmpd="sng" algn="ctr">
+            <a:noFill/>
+            <a:prstDash val="solid"/>
+            <a:miter lim="800000"/>
+          </a:ln>
+        </p:spPr>
+        <p:style>
+          <a:lnRef idx="2">
+            <a:schemeClr val="accent1">
+              <a:shade val="15000"/>
+            </a:schemeClr>
+          </a:lnRef>
+          <a:fillRef idx="1">
+            <a:schemeClr val="accent1"/>
+          </a:fillRef>
+          <a:effectRef idx="0">
+            <a:schemeClr val="accent1"/>
+          </a:effectRef>
+          <a:fontRef idx="minor">
+            <a:schemeClr val="lt1"/>
+          </a:fontRef>
+        </p:style>
+        <p:txBody>
+          <a:bodyPr vertOverflow="clip" horzOverflow="clip" rtlCol="0" anchor="t"/>
+          <a:lstStyle/>
+          <a:p>
+            <a:pPr algn="l"/>
+            <a:endParaRPr lang="nl-BE"/>
+          </a:p>
+        </p:txBody>
+      </p:sp>
+      <p:sp>
+        <p:nvSpPr>
+          <p:cNvPr id="3" name="Tekstvak 2">
+            <a:extLst>
+              <a:ext uri="{FF2B5EF4-FFF2-40B4-BE49-F238E27FC236}">
+                <a16:creationId xmlns:a16="http://schemas.microsoft.com/office/drawing/2014/main" id="{4DB21216-F948-A7D1-65F4-E180C81D9B9A}"/>
+              </a:ext>
+            </a:extLst>
+          </p:cNvPr>
+          <p:cNvSpPr txBox="1"/>
+          <p:nvPr/>
+        </p:nvSpPr>
+        <p:spPr>
+          <a:xfrm>
+            <a:off x="635000" y="279400"/>
+            <a:ext cx="7772400" cy="523220"/>
+          </a:xfrm>
+          <a:prstGeom prst="rect">
+            <a:avLst/>
+          </a:prstGeom>
+          <a:noFill/>
+        </p:spPr>
+        <p:txBody>
+          <a:bodyPr vertOverflow="overflow" vert="horz" wrap="square" rtlCol="0" anchor="t">
+            <a:spAutoFit/>
+          </a:bodyPr>
+          <a:lstStyle/>
+          <a:p>
+            <a:pPr algn="l"/>
+            <a:r>
+              <a:rPr lang="nl-BE" sz="2800" b="1" dirty="0">
+                <a:solidFill>
+                  <a:srgbClr val="1A1A1A"/>
+                </a:solidFill>
+                <a:latin typeface="Trebuchet MS"/>
+              </a:rPr>
+              <a:t>Voorbeelden, ideeën..</a:t>
+            </a:r>
+          </a:p>
+        </p:txBody>
+      </p:sp>
+      <p:sp>
+        <p:nvSpPr>
+          <p:cNvPr id="6" name="Tekstvak 5">
+            <a:extLst>
+              <a:ext uri="{FF2B5EF4-FFF2-40B4-BE49-F238E27FC236}">
+                <a16:creationId xmlns:a16="http://schemas.microsoft.com/office/drawing/2014/main" id="{D6530194-C24D-9643-3C12-7C7FCFC9A852}"/>
+              </a:ext>
+            </a:extLst>
+          </p:cNvPr>
+          <p:cNvSpPr txBox="1"/>
+          <p:nvPr/>
+        </p:nvSpPr>
+        <p:spPr>
+          <a:xfrm>
+            <a:off x="601749" y="1209156"/>
+            <a:ext cx="7874000" cy="3539430"/>
+          </a:xfrm>
+          <a:prstGeom prst="rect">
+            <a:avLst/>
+          </a:prstGeom>
+          <a:noFill/>
+        </p:spPr>
+        <p:txBody>
+          <a:bodyPr vertOverflow="overflow" vert="horz" wrap="square" rtlCol="0" anchor="t">
+            <a:spAutoFit/>
+          </a:bodyPr>
+          <a:lstStyle/>
+          <a:p>
+            <a:pPr algn="l"/>
+            <a:r>
+              <a:rPr lang="nl-BE" sz="1600" dirty="0">
+                <a:solidFill>
+                  <a:srgbClr val="4A4A4A"/>
+                </a:solidFill>
+                <a:latin typeface="Calibri"/>
+                <a:cs typeface="Calibri"/>
+              </a:rPr>
+              <a:t>Specifieke optimalisaties</a:t>
+            </a:r>
+          </a:p>
+          <a:p>
+            <a:pPr marL="285750" indent="-285750" algn="l">
+              <a:buFont typeface="Arial" panose="020B0604020202020204" pitchFamily="34" charset="0"/>
+              <a:buChar char="•"/>
+            </a:pPr>
+            <a:r>
+              <a:rPr lang="nl-BE" sz="1600" dirty="0">
+                <a:solidFill>
+                  <a:srgbClr val="4A4A4A"/>
+                </a:solidFill>
+                <a:latin typeface="Calibri"/>
+                <a:cs typeface="Calibri"/>
+              </a:rPr>
+              <a:t>Excel-analyses automatiseren — bv. maandrapport in 10 min i.p.v. 2 uur</a:t>
+            </a:r>
+          </a:p>
+          <a:p>
+            <a:pPr marL="285750" indent="-285750" algn="l">
+              <a:buFont typeface="Arial" panose="020B0604020202020204" pitchFamily="34" charset="0"/>
+              <a:buChar char="•"/>
+            </a:pPr>
+            <a:r>
+              <a:rPr lang="nl-BE" sz="1600" dirty="0">
+                <a:solidFill>
+                  <a:srgbClr val="4A4A4A"/>
+                </a:solidFill>
+                <a:latin typeface="Calibri"/>
+                <a:cs typeface="Calibri"/>
+              </a:rPr>
+              <a:t>Presentaties genereren — van ruwe input naar slide deck in een uur</a:t>
+            </a:r>
+          </a:p>
+          <a:p>
+            <a:pPr marL="285750" indent="-285750" algn="l">
+              <a:buFont typeface="Arial" panose="020B0604020202020204" pitchFamily="34" charset="0"/>
+              <a:buChar char="•"/>
+            </a:pPr>
+            <a:r>
+              <a:rPr lang="nl-BE" sz="1600" dirty="0">
+                <a:solidFill>
+                  <a:srgbClr val="4A4A4A"/>
+                </a:solidFill>
+                <a:latin typeface="Calibri"/>
+                <a:cs typeface="Calibri"/>
+              </a:rPr>
+              <a:t>E-mails screenen en beantwoorden — bv. sollicitaties automatisch verwerken</a:t>
+            </a:r>
+          </a:p>
+          <a:p>
+            <a:pPr marL="285750" indent="-285750">
+              <a:buFont typeface="Arial" panose="020B0604020202020204" pitchFamily="34" charset="0"/>
+              <a:buChar char="•"/>
+            </a:pPr>
+            <a:r>
+              <a:rPr lang="nl-BE" sz="1600" dirty="0">
+                <a:solidFill>
+                  <a:srgbClr val="4A4A4A"/>
+                </a:solidFill>
+                <a:cs typeface="Calibri"/>
+              </a:rPr>
+              <a:t>Meetings transcriberen &amp; samenvatten — inclusief actiepunten en opvolging</a:t>
+            </a:r>
+          </a:p>
+          <a:p>
+            <a:pPr marL="285750" indent="-285750">
+              <a:buFont typeface="Arial" panose="020B0604020202020204" pitchFamily="34" charset="0"/>
+              <a:buChar char="•"/>
+            </a:pPr>
+            <a:r>
+              <a:rPr lang="nl-BE" sz="1600" dirty="0">
+                <a:solidFill>
+                  <a:srgbClr val="4A4A4A"/>
+                </a:solidFill>
+                <a:latin typeface="Calibri"/>
+                <a:cs typeface="Calibri"/>
+              </a:rPr>
+              <a:t>…</a:t>
+            </a:r>
+          </a:p>
+          <a:p>
+            <a:pPr algn="l"/>
+            <a:endParaRPr lang="nl-BE" sz="1600" dirty="0">
+              <a:solidFill>
+                <a:srgbClr val="4A4A4A"/>
+              </a:solidFill>
+              <a:latin typeface="Calibri"/>
+              <a:cs typeface="Calibri"/>
+            </a:endParaRPr>
+          </a:p>
+          <a:p>
+            <a:pPr algn="l"/>
+            <a:r>
+              <a:rPr lang="nl-BE" sz="1600" dirty="0">
+                <a:solidFill>
+                  <a:srgbClr val="4A4A4A"/>
+                </a:solidFill>
+                <a:latin typeface="Calibri"/>
+                <a:cs typeface="Calibri"/>
+              </a:rPr>
+              <a:t>Zelforganisatie</a:t>
+            </a:r>
+          </a:p>
+          <a:p>
+            <a:pPr marL="285750" indent="-285750" algn="l">
+              <a:buFont typeface="Arial" panose="020B0604020202020204" pitchFamily="34" charset="0"/>
+              <a:buChar char="•"/>
+            </a:pPr>
+            <a:r>
+              <a:rPr lang="nl-BE" sz="1600" dirty="0">
+                <a:solidFill>
+                  <a:srgbClr val="4A4A4A"/>
+                </a:solidFill>
+                <a:latin typeface="Calibri"/>
+                <a:cs typeface="Calibri"/>
+              </a:rPr>
+              <a:t>Actieplan opstellen — prioriteiten op basis van impact en haalbaarheid</a:t>
+            </a:r>
+          </a:p>
+          <a:p>
+            <a:pPr marL="285750" indent="-285750" algn="l">
+              <a:buFont typeface="Arial" panose="020B0604020202020204" pitchFamily="34" charset="0"/>
+              <a:buChar char="•"/>
+            </a:pPr>
+            <a:r>
+              <a:rPr lang="nl-BE" sz="1600" dirty="0">
+                <a:solidFill>
+                  <a:srgbClr val="4A4A4A"/>
+                </a:solidFill>
+                <a:latin typeface="Calibri"/>
+                <a:cs typeface="Calibri"/>
+              </a:rPr>
+              <a:t>Agenda bewaken — dubbele boekingen detecteren, herinneringen instellen</a:t>
+            </a:r>
+          </a:p>
+          <a:p>
+            <a:pPr marL="285750" indent="-285750" algn="l">
+              <a:buFont typeface="Arial" panose="020B0604020202020204" pitchFamily="34" charset="0"/>
+              <a:buChar char="•"/>
+            </a:pPr>
+            <a:r>
+              <a:rPr lang="nl-BE" sz="1600" dirty="0">
+                <a:solidFill>
+                  <a:srgbClr val="4A4A4A"/>
+                </a:solidFill>
+                <a:latin typeface="Calibri"/>
+                <a:cs typeface="Calibri"/>
+              </a:rPr>
+              <a:t>Persoonlijke AI-assistent — afgestemd op jouw werkstijl en tools</a:t>
+            </a:r>
+          </a:p>
+          <a:p>
+            <a:pPr marL="285750" indent="-285750" algn="l">
+              <a:buFont typeface="Arial" panose="020B0604020202020204" pitchFamily="34" charset="0"/>
+              <a:buChar char="•"/>
+            </a:pPr>
+            <a:r>
+              <a:rPr lang="nl-BE" sz="1600" dirty="0">
+                <a:solidFill>
+                  <a:srgbClr val="4A4A4A"/>
+                </a:solidFill>
+                <a:latin typeface="Calibri"/>
+                <a:cs typeface="Calibri"/>
+              </a:rPr>
+              <a:t>…</a:t>
+            </a:r>
+          </a:p>
+          <a:p>
+            <a:pPr marL="285750" indent="-285750" algn="l">
+              <a:buFont typeface="Arial" panose="020B0604020202020204" pitchFamily="34" charset="0"/>
+              <a:buChar char="•"/>
+            </a:pPr>
+            <a:endParaRPr lang="nl-BE" sz="1600" dirty="0">
+              <a:solidFill>
+                <a:srgbClr val="4A4A4A"/>
+              </a:solidFill>
+              <a:latin typeface="Calibri"/>
+              <a:cs typeface="Calibri"/>
+            </a:endParaRPr>
+          </a:p>
+          <a:p>
+            <a:pPr algn="l"/>
+            <a:r>
+              <a:rPr lang="nl-BE" sz="1600" dirty="0">
+                <a:solidFill>
+                  <a:srgbClr val="4A4A4A"/>
+                </a:solidFill>
+                <a:latin typeface="Calibri"/>
+                <a:cs typeface="Calibri"/>
+              </a:rPr>
+              <a:t>Tot zelf volledig op maat gemaakte tools – toegespitst op jouw specifieke noden</a:t>
+            </a:r>
+          </a:p>
+        </p:txBody>
+      </p:sp>
+      <p:sp>
+        <p:nvSpPr>
+          <p:cNvPr id="7" name="Tekstvak 6">
+            <a:extLst>
+              <a:ext uri="{FF2B5EF4-FFF2-40B4-BE49-F238E27FC236}">
+                <a16:creationId xmlns:a16="http://schemas.microsoft.com/office/drawing/2014/main" id="{0EEFE08C-54FF-0C7D-4C35-04C1B8D6AA39}"/>
+              </a:ext>
+            </a:extLst>
+          </p:cNvPr>
+          <p:cNvSpPr txBox="1"/>
+          <p:nvPr/>
+        </p:nvSpPr>
+        <p:spPr>
+          <a:xfrm>
+            <a:off x="8407400" y="4749800"/>
+            <a:ext cx="457200" cy="279400"/>
+          </a:xfrm>
+          <a:prstGeom prst="rect">
+            <a:avLst/>
+          </a:prstGeom>
+          <a:noFill/>
+        </p:spPr>
+        <p:txBody>
+          <a:bodyPr vertOverflow="overflow" vert="horz" wrap="square" rtlCol="0" anchor="t">
+            <a:spAutoFit/>
+          </a:bodyPr>
+          <a:lstStyle/>
+          <a:p>
+            <a:pPr algn="l"/>
+            <a:r>
+              <a:rPr lang="nl-BE" sz="1400">
+                <a:solidFill>
+                  <a:srgbClr val="AAAAAA"/>
+                </a:solidFill>
+                <a:latin typeface="Calibri"/>
+                <a:cs typeface="Calibri"/>
+              </a:rPr>
+              <a:t>2</a:t>
+            </a:r>
+          </a:p>
+        </p:txBody>
+      </p:sp>
+      <p:sp>
+        <p:nvSpPr>
+          <p:cNvPr id="8" name="Tekstvak 7">
+            <a:extLst>
+              <a:ext uri="{FF2B5EF4-FFF2-40B4-BE49-F238E27FC236}">
+                <a16:creationId xmlns:a16="http://schemas.microsoft.com/office/drawing/2014/main" id="{77C15C83-6FA1-2F7F-3346-37A45BDA64AC}"/>
+              </a:ext>
+            </a:extLst>
+          </p:cNvPr>
+          <p:cNvSpPr txBox="1"/>
+          <p:nvPr/>
+        </p:nvSpPr>
+        <p:spPr>
+          <a:xfrm>
+            <a:off x="4402091" y="282951"/>
+            <a:ext cx="3687855" cy="523220"/>
+          </a:xfrm>
+          <a:prstGeom prst="rect">
+            <a:avLst/>
+          </a:prstGeom>
+          <a:noFill/>
+        </p:spPr>
+        <p:txBody>
+          <a:bodyPr vertOverflow="overflow" vert="horz" wrap="square" rtlCol="0" anchor="t">
+            <a:spAutoFit/>
+          </a:bodyPr>
+          <a:lstStyle/>
+          <a:p>
+            <a:pPr algn="l"/>
+            <a:r>
+              <a:rPr lang="nl-BE" sz="2800" b="1" dirty="0">
+                <a:solidFill>
+                  <a:srgbClr val="1A1A1A"/>
+                </a:solidFill>
+                <a:latin typeface="Trebuchet MS"/>
+              </a:rPr>
+              <a:t>..the sky is the limit</a:t>
+            </a:r>
+          </a:p>
+        </p:txBody>
+      </p:sp>
+    </p:spTree>
+    <p:extLst>
+      <p:ext uri="{BB962C8B-B14F-4D97-AF65-F5344CB8AC3E}">
+        <p14:creationId xmlns:p14="http://schemas.microsoft.com/office/powerpoint/2010/main" val="1395668422"/>
+      </p:ext>
+    </p:extLst>
+  </p:cSld>
+  <p:clrMapOvr>
+    <a:masterClrMapping/>
+  </p:clrMapOvr>
+</p:sld>
+</file>
+
+<file path=ppt/slides/slide11.xml><?xml version="1.0" encoding="utf-8"?>
+<p:sld xmlns:a="http://schemas.openxmlformats.org/drawingml/2006/main" xmlns:r="http://schemas.openxmlformats.org/officeDocument/2006/relationships" xmlns:p="http://schemas.openxmlformats.org/presentationml/2006/main">
+  <p:cSld>
+    <p:bg>
+      <p:bgPr>
+        <a:solidFill>
+          <a:srgbClr val="FFFFFF">
+            <a:alpha val="100000"/>
+          </a:srgbClr>
+        </a:solidFill>
+        <a:effectLst/>
+      </p:bgPr>
+    </p:bg>
+    <p:spTree>
+      <p:nvGrpSpPr>
+        <p:cNvPr id="1" name=""/>
+        <p:cNvGrpSpPr/>
+        <p:nvPr/>
+      </p:nvGrpSpPr>
+      <p:grpSpPr>
+        <a:xfrm>
+          <a:off x="0" y="0"/>
+          <a:ext cx="0" cy="0"/>
+          <a:chOff x="0" y="0"/>
+          <a:chExt cx="0" cy="0"/>
+        </a:xfrm>
+      </p:grpSpPr>
+      <p:sp>
+        <p:nvSpPr>
+          <p:cNvPr id="40" name="R40"/>
+          <p:cNvSpPr/>
+          <p:nvPr/>
+        </p:nvSpPr>
+        <p:spPr>
+          <a:xfrm>
+            <a:off x="0" y="0"/>
+            <a:ext cx="9144000" cy="114300"/>
+          </a:xfrm>
+          <a:prstGeom prst="rect">
+            <a:avLst/>
+          </a:prstGeom>
+          <a:solidFill>
+            <a:srgbClr val="5B8DB8"/>
+          </a:solidFill>
+          <a:ln>
+            <a:noFill/>
+          </a:ln>
+        </p:spPr>
+        <p:txBody>
+          <a:bodyPr/>
+          <a:lstStyle/>
+          <a:p>
+            <a:endParaRPr lang="nl-NL"/>
+          </a:p>
+        </p:txBody>
+      </p:sp>
+      <p:sp>
+        <p:nvSpPr>
+          <p:cNvPr id="41" name="T41"/>
+          <p:cNvSpPr/>
+          <p:nvPr/>
+        </p:nvSpPr>
+        <p:spPr>
+          <a:xfrm>
+            <a:off x="635000" y="228600"/>
+            <a:ext cx="7772400" cy="508000"/>
+          </a:xfrm>
+          <a:prstGeom prst="rect">
+            <a:avLst/>
+          </a:prstGeom>
+          <a:noFill/>
+          <a:ln>
+            <a:noFill/>
+          </a:ln>
+        </p:spPr>
+        <p:txBody>
+          <a:bodyPr wrap="square" lIns="54000" tIns="36000" rIns="54000" bIns="36000" anchor="ctr"/>
+          <a:lstStyle/>
+          <a:p>
+            <a:pPr algn="l"/>
+            <a:r>
+              <a:rPr lang="nl-NL" sz="2800" b="1" dirty="0">
+                <a:solidFill>
+                  <a:srgbClr val="1A1A1A"/>
+                </a:solidFill>
+                <a:latin typeface="Trebuchet MS"/>
+              </a:rPr>
+              <a:t>Proces: ondersteuning → zelfstandigheid</a:t>
+            </a:r>
+          </a:p>
+        </p:txBody>
+      </p:sp>
+      <p:sp>
+        <p:nvSpPr>
+          <p:cNvPr id="42" name="R42"/>
+          <p:cNvSpPr/>
+          <p:nvPr/>
+        </p:nvSpPr>
+        <p:spPr>
+          <a:xfrm>
+            <a:off x="734060" y="3368040"/>
+            <a:ext cx="2413000" cy="1079500"/>
+          </a:xfrm>
+          <a:prstGeom prst="roundRect">
+            <a:avLst>
+              <a:gd name="adj" fmla="val 6000"/>
+            </a:avLst>
+          </a:prstGeom>
+          <a:solidFill>
+            <a:srgbClr val="2C5F7C"/>
+          </a:solidFill>
+          <a:ln>
+            <a:noFill/>
+          </a:ln>
+        </p:spPr>
+        <p:txBody>
+          <a:bodyPr/>
+          <a:lstStyle/>
+          <a:p>
+            <a:endParaRPr lang="nl-NL"/>
+          </a:p>
+        </p:txBody>
+      </p:sp>
+      <p:sp>
+        <p:nvSpPr>
+          <p:cNvPr id="43" name="T43"/>
+          <p:cNvSpPr/>
+          <p:nvPr/>
+        </p:nvSpPr>
+        <p:spPr>
+          <a:xfrm>
+            <a:off x="734060" y="3368040"/>
+            <a:ext cx="2413000" cy="1079500"/>
+          </a:xfrm>
+          <a:prstGeom prst="rect">
+            <a:avLst/>
+          </a:prstGeom>
+          <a:noFill/>
+          <a:ln>
+            <a:noFill/>
+          </a:ln>
+        </p:spPr>
+        <p:txBody>
+          <a:bodyPr wrap="square" lIns="54000" tIns="36000" rIns="54000" bIns="36000" anchor="ctr"/>
+          <a:lstStyle/>
+          <a:p>
+            <a:pPr algn="ctr"/>
+            <a:r>
+              <a:rPr lang="nl-NL" sz="2000" b="1" dirty="0">
+                <a:solidFill>
+                  <a:srgbClr val="FFFFFF"/>
+                </a:solidFill>
+                <a:latin typeface="Trebuchet MS"/>
+              </a:rPr>
+              <a:t>Wim stuurt</a:t>
+            </a:r>
+          </a:p>
+          <a:p>
+            <a:pPr algn="ctr">
+              <a:spcBef>
+                <a:spcPts val="150"/>
+              </a:spcBef>
+            </a:pPr>
+            <a:r>
+              <a:rPr lang="nl-NL" sz="1300" dirty="0">
+                <a:solidFill>
+                  <a:srgbClr val="D6E6F2"/>
+                </a:solidFill>
+                <a:latin typeface="Calibri"/>
+              </a:rPr>
+              <a:t>Analyseren, opzetten, bouwen</a:t>
+            </a:r>
+          </a:p>
+        </p:txBody>
+      </p:sp>
+      <p:sp>
+        <p:nvSpPr>
+          <p:cNvPr id="44" name="A44"/>
+          <p:cNvSpPr/>
+          <p:nvPr/>
+        </p:nvSpPr>
+        <p:spPr>
+          <a:xfrm rot="-2700000">
+            <a:off x="2663190" y="2862581"/>
+            <a:ext cx="635000" cy="381000"/>
+          </a:xfrm>
+          <a:prstGeom prst="rightArrow">
+            <a:avLst>
+              <a:gd name="adj1" fmla="val 50000"/>
+              <a:gd name="adj2" fmla="val 50000"/>
+            </a:avLst>
+          </a:prstGeom>
+          <a:solidFill>
+            <a:srgbClr val="5B8DB8">
+              <a:alpha val="50000"/>
+            </a:srgbClr>
+          </a:solidFill>
+          <a:ln>
+            <a:noFill/>
+          </a:ln>
+        </p:spPr>
+        <p:txBody>
+          <a:bodyPr/>
+          <a:lstStyle/>
+          <a:p>
+            <a:endParaRPr lang="nl-NL"/>
+          </a:p>
+        </p:txBody>
+      </p:sp>
+      <p:sp>
+        <p:nvSpPr>
+          <p:cNvPr id="45" name="R45"/>
+          <p:cNvSpPr/>
+          <p:nvPr/>
+        </p:nvSpPr>
+        <p:spPr>
+          <a:xfrm>
+            <a:off x="3274060" y="2288540"/>
+            <a:ext cx="2413000" cy="1079500"/>
+          </a:xfrm>
+          <a:prstGeom prst="roundRect">
+            <a:avLst>
+              <a:gd name="adj" fmla="val 6000"/>
+            </a:avLst>
+          </a:prstGeom>
+          <a:solidFill>
+            <a:srgbClr val="5B8DB8"/>
+          </a:solidFill>
+          <a:ln>
+            <a:noFill/>
+          </a:ln>
+        </p:spPr>
+        <p:txBody>
+          <a:bodyPr/>
+          <a:lstStyle/>
+          <a:p>
+            <a:endParaRPr lang="nl-NL"/>
+          </a:p>
+        </p:txBody>
+      </p:sp>
+      <p:sp>
+        <p:nvSpPr>
+          <p:cNvPr id="46" name="T46"/>
+          <p:cNvSpPr/>
+          <p:nvPr/>
+        </p:nvSpPr>
+        <p:spPr>
+          <a:xfrm>
+            <a:off x="3274060" y="2288540"/>
+            <a:ext cx="2413000" cy="1079500"/>
+          </a:xfrm>
+          <a:prstGeom prst="rect">
+            <a:avLst/>
+          </a:prstGeom>
+          <a:noFill/>
+          <a:ln>
+            <a:noFill/>
+          </a:ln>
+        </p:spPr>
+        <p:txBody>
+          <a:bodyPr wrap="square" lIns="54000" tIns="36000" rIns="54000" bIns="36000" anchor="ctr"/>
+          <a:lstStyle/>
+          <a:p>
+            <a:pPr algn="ctr"/>
+            <a:r>
+              <a:rPr lang="nl-NL" sz="2000" b="1" dirty="0">
+                <a:solidFill>
+                  <a:srgbClr val="FFFFFF"/>
+                </a:solidFill>
+                <a:latin typeface="Trebuchet MS"/>
+              </a:rPr>
+              <a:t>Wim begeleidt</a:t>
+            </a:r>
+          </a:p>
+          <a:p>
+            <a:pPr algn="ctr">
+              <a:spcBef>
+                <a:spcPts val="150"/>
+              </a:spcBef>
+            </a:pPr>
+            <a:r>
+              <a:rPr lang="nl-NL" sz="1300" dirty="0">
+                <a:solidFill>
+                  <a:srgbClr val="D6E6F2"/>
+                </a:solidFill>
+                <a:latin typeface="Calibri"/>
+              </a:rPr>
+              <a:t>Overdragen, uitleggen, coachen</a:t>
+            </a:r>
+          </a:p>
+        </p:txBody>
+      </p:sp>
+      <p:sp>
+        <p:nvSpPr>
+          <p:cNvPr id="47" name="A47"/>
+          <p:cNvSpPr/>
+          <p:nvPr/>
+        </p:nvSpPr>
+        <p:spPr>
+          <a:xfrm rot="-2700000">
+            <a:off x="5237480" y="1748790"/>
+            <a:ext cx="635000" cy="381000"/>
+          </a:xfrm>
+          <a:prstGeom prst="rightArrow">
+            <a:avLst>
+              <a:gd name="adj1" fmla="val 50000"/>
+              <a:gd name="adj2" fmla="val 50000"/>
+            </a:avLst>
+          </a:prstGeom>
+          <a:solidFill>
+            <a:srgbClr val="5B8DB8">
+              <a:alpha val="50000"/>
+            </a:srgbClr>
+          </a:solidFill>
+          <a:ln>
+            <a:noFill/>
+          </a:ln>
+        </p:spPr>
+        <p:txBody>
+          <a:bodyPr/>
+          <a:lstStyle/>
+          <a:p>
+            <a:endParaRPr lang="nl-NL"/>
+          </a:p>
+        </p:txBody>
+      </p:sp>
+      <p:sp>
+        <p:nvSpPr>
+          <p:cNvPr id="48" name="R48"/>
+          <p:cNvSpPr/>
+          <p:nvPr/>
+        </p:nvSpPr>
+        <p:spPr>
+          <a:xfrm>
+            <a:off x="5814060" y="1234440"/>
+            <a:ext cx="2413000" cy="1079500"/>
+          </a:xfrm>
+          <a:prstGeom prst="roundRect">
+            <a:avLst>
+              <a:gd name="adj" fmla="val 6000"/>
+            </a:avLst>
+          </a:prstGeom>
+          <a:solidFill>
+            <a:srgbClr val="D6E6F2"/>
+          </a:solidFill>
+          <a:ln>
+            <a:noFill/>
+          </a:ln>
+        </p:spPr>
+        <p:txBody>
+          <a:bodyPr/>
+          <a:lstStyle/>
+          <a:p>
+            <a:endParaRPr lang="nl-NL"/>
+          </a:p>
+        </p:txBody>
+      </p:sp>
+      <p:sp>
+        <p:nvSpPr>
+          <p:cNvPr id="49" name="T49"/>
+          <p:cNvSpPr/>
+          <p:nvPr/>
+        </p:nvSpPr>
+        <p:spPr>
+          <a:xfrm>
+            <a:off x="5814060" y="1234440"/>
+            <a:ext cx="2413000" cy="1079500"/>
+          </a:xfrm>
+          <a:prstGeom prst="rect">
+            <a:avLst/>
+          </a:prstGeom>
+          <a:noFill/>
+          <a:ln>
+            <a:noFill/>
+          </a:ln>
+        </p:spPr>
+        <p:txBody>
+          <a:bodyPr wrap="square" lIns="54000" tIns="36000" rIns="54000" bIns="36000" anchor="ctr"/>
+          <a:lstStyle/>
+          <a:p>
+            <a:pPr algn="ctr"/>
+            <a:r>
+              <a:rPr lang="nl-NL" sz="2000" b="1" dirty="0">
+                <a:solidFill>
+                  <a:srgbClr val="2C5F7C"/>
+                </a:solidFill>
+                <a:latin typeface="Trebuchet MS"/>
+              </a:rPr>
+              <a:t>Jij kan verder</a:t>
+            </a:r>
+          </a:p>
+          <a:p>
+            <a:pPr algn="ctr">
+              <a:spcBef>
+                <a:spcPts val="150"/>
+              </a:spcBef>
+            </a:pPr>
+            <a:r>
+              <a:rPr lang="nl-NL" sz="1300" dirty="0">
+                <a:solidFill>
+                  <a:srgbClr val="5B8DB8"/>
+                </a:solidFill>
+                <a:latin typeface="Calibri"/>
+              </a:rPr>
+              <a:t>Wim verdwijnt naar de achtergrond</a:t>
+            </a:r>
+          </a:p>
+        </p:txBody>
+      </p:sp>
+      <p:sp>
+        <p:nvSpPr>
+          <p:cNvPr id="50" name="T50"/>
+          <p:cNvSpPr/>
+          <p:nvPr/>
+        </p:nvSpPr>
+        <p:spPr>
+          <a:xfrm>
+            <a:off x="4686300" y="4713515"/>
+            <a:ext cx="3897811" cy="330200"/>
+          </a:xfrm>
+          <a:prstGeom prst="rect">
+            <a:avLst/>
+          </a:prstGeom>
+          <a:noFill/>
+          <a:ln>
+            <a:noFill/>
+          </a:ln>
+        </p:spPr>
+        <p:txBody>
+          <a:bodyPr wrap="square" lIns="54000" tIns="36000" rIns="54000" bIns="36000" anchor="ctr"/>
+          <a:lstStyle/>
+          <a:p>
+            <a:pPr algn="r"/>
+            <a:r>
+              <a:rPr lang="nl-NL" sz="1200" i="1" dirty="0">
+                <a:solidFill>
+                  <a:srgbClr val="5B8DB8"/>
+                </a:solidFill>
+                <a:latin typeface="Calibri"/>
+              </a:rPr>
+              <a:t>Mijn rol vervaagt naarmate jij sterker wordt.</a:t>
+            </a:r>
+          </a:p>
+        </p:txBody>
+      </p:sp>
+      <p:sp>
+        <p:nvSpPr>
+          <p:cNvPr id="51" name="T51"/>
+          <p:cNvSpPr/>
+          <p:nvPr/>
+        </p:nvSpPr>
+        <p:spPr>
+          <a:xfrm>
+            <a:off x="8407400" y="4749800"/>
+            <a:ext cx="457200" cy="279400"/>
+          </a:xfrm>
+          <a:prstGeom prst="rect">
+            <a:avLst/>
+          </a:prstGeom>
+          <a:noFill/>
+          <a:ln>
+            <a:noFill/>
+          </a:ln>
+        </p:spPr>
+        <p:txBody>
+          <a:bodyPr wrap="square" lIns="54000" tIns="36000" rIns="54000" bIns="36000" anchor="ctr"/>
+          <a:lstStyle/>
+          <a:p>
+            <a:pPr algn="r"/>
+            <a:r>
+              <a:rPr lang="nl-NL" sz="1400" dirty="0">
+                <a:solidFill>
+                  <a:srgbClr val="AAAAAA"/>
+                </a:solidFill>
+                <a:latin typeface="Calibri"/>
+              </a:rPr>
+              <a:t>7</a:t>
+            </a:r>
+          </a:p>
+        </p:txBody>
+      </p:sp>
+    </p:spTree>
+    <p:extLst>
+      <p:ext uri="{BB962C8B-B14F-4D97-AF65-F5344CB8AC3E}">
+        <p14:creationId xmlns:p14="http://schemas.microsoft.com/office/powerpoint/2010/main" val="3404714821"/>
+      </p:ext>
+    </p:extLst>
+  </p:cSld>
+  <p:clrMapOvr>
+    <a:masterClrMapping/>
+  </p:clrMapOvr>
+</p:sld>
+</file>
+
+<file path=ppt/slides/slide12.xml><?xml version="1.0" encoding="utf-8"?>
 <p:sld xmlns:a="http://schemas.openxmlformats.org/drawingml/2006/main" xmlns:r="http://schemas.openxmlformats.org/officeDocument/2006/relationships" xmlns:p="http://schemas.openxmlformats.org/presentationml/2006/main" show="0">
   <p:cSld>
     <p:bg>
@@ -928,7 +1872,7 @@
 </p:sld>
 </file>
 
-<file path=ppt/slides/slide11.xml><?xml version="1.0" encoding="utf-8"?>
+<file path=ppt/slides/slide13.xml><?xml version="1.0" encoding="utf-8"?>
 <p:sld xmlns:a="http://schemas.openxmlformats.org/drawingml/2006/main" xmlns:r="http://schemas.openxmlformats.org/officeDocument/2006/relationships" xmlns:p="http://schemas.openxmlformats.org/presentationml/2006/main" show="0">
   <p:cSld>
     <p:spTree>
@@ -988,7 +1932,7 @@
 </p:sld>
 </file>
 
-<file path=ppt/slides/slide12.xml><?xml version="1.0" encoding="utf-8"?>
+<file path=ppt/slides/slide14.xml><?xml version="1.0" encoding="utf-8"?>
 <p:sld xmlns:a="http://schemas.openxmlformats.org/drawingml/2006/main" xmlns:r="http://schemas.openxmlformats.org/officeDocument/2006/relationships" xmlns:p="http://schemas.openxmlformats.org/presentationml/2006/main" show="0">
   <p:cSld>
     <p:spTree>
@@ -1048,7 +1992,7 @@
 </p:sld>
 </file>
 
-<file path=ppt/slides/slide13.xml><?xml version="1.0" encoding="utf-8"?>
+<file path=ppt/slides/slide15.xml><?xml version="1.0" encoding="utf-8"?>
 <p:sld xmlns:a="http://schemas.openxmlformats.org/drawingml/2006/main" xmlns:r="http://schemas.openxmlformats.org/officeDocument/2006/relationships" xmlns:p="http://schemas.openxmlformats.org/presentationml/2006/main" show="0">
   <p:cSld>
     <p:spTree>
@@ -1793,7 +2737,7 @@
 </p:sld>
 </file>
 
-<file path=ppt/slides/slide14.xml><?xml version="1.0" encoding="utf-8"?>
+<file path=ppt/slides/slide16.xml><?xml version="1.0" encoding="utf-8"?>
 <p:sld xmlns:a="http://schemas.openxmlformats.org/drawingml/2006/main" xmlns:r="http://schemas.openxmlformats.org/officeDocument/2006/relationships" xmlns:p="http://schemas.openxmlformats.org/presentationml/2006/main" show="0">
   <p:cSld>
     <p:spTree>
@@ -1853,7 +2797,7 @@
 </p:sld>
 </file>
 
-<file path=ppt/slides/slide15.xml><?xml version="1.0" encoding="utf-8"?>
+<file path=ppt/slides/slide17.xml><?xml version="1.0" encoding="utf-8"?>
 <p:sld xmlns:a="http://schemas.openxmlformats.org/drawingml/2006/main" xmlns:r="http://schemas.openxmlformats.org/officeDocument/2006/relationships" xmlns:p="http://schemas.openxmlformats.org/presentationml/2006/main" show="0">
   <p:cSld>
     <p:spTree>
@@ -2596,7 +3540,7 @@
 </p:sld>
 </file>
 
-<file path=ppt/slides/slide16.xml><?xml version="1.0" encoding="utf-8"?>
+<file path=ppt/slides/slide18.xml><?xml version="1.0" encoding="utf-8"?>
 <p:sld xmlns:a="http://schemas.openxmlformats.org/drawingml/2006/main" xmlns:r="http://schemas.openxmlformats.org/officeDocument/2006/relationships" xmlns:p="http://schemas.openxmlformats.org/presentationml/2006/main">
   <p:cSld>
     <p:spTree>
@@ -2710,7 +3654,7 @@
         </p:nvSpPr>
         <p:spPr>
           <a:xfrm>
-            <a:off x="635000" y="1720626"/>
+            <a:off x="625856" y="1930938"/>
             <a:ext cx="3746500" cy="1855694"/>
           </a:xfrm>
           <a:prstGeom prst="roundRect">
@@ -2722,7 +3666,9 @@
             <a:srgbClr val="F0F5FA"/>
           </a:solidFill>
           <a:ln>
-            <a:noFill/>
+            <a:solidFill>
+              <a:schemeClr val="accent1"/>
+            </a:solidFill>
           </a:ln>
         </p:spPr>
         <p:txBody>
@@ -2747,7 +3693,7 @@
         </p:nvSpPr>
         <p:spPr>
           <a:xfrm>
-            <a:off x="698500" y="1760220"/>
+            <a:off x="689356" y="1970532"/>
             <a:ext cx="3619500" cy="1752600"/>
           </a:xfrm>
           <a:prstGeom prst="rect">
@@ -2783,7 +3729,7 @@
             </a:endParaRPr>
           </a:p>
           <a:p>
-            <a:pPr algn="l">
+            <a:pPr algn="ctr">
               <a:spcBef>
                 <a:spcPts val="200"/>
               </a:spcBef>
@@ -2799,7 +3745,7 @@
             </a:r>
           </a:p>
           <a:p>
-            <a:pPr algn="l">
+            <a:pPr algn="ctr">
               <a:spcBef>
                 <a:spcPts val="100"/>
               </a:spcBef>
@@ -2811,7 +3757,7 @@
                 </a:solidFill>
                 <a:latin typeface="Calibri"/>
               </a:rPr>
-              <a:t>Ideaal voor verkenning en </a:t>
+              <a:t>Ideaal voor gerichte </a:t>
             </a:r>
             <a:r>
               <a:rPr lang="nl-NL" sz="1400" dirty="0" err="1">
@@ -2848,7 +3794,7 @@
             </a:endParaRPr>
           </a:p>
           <a:p>
-            <a:pPr>
+            <a:pPr algn="ctr">
               <a:spcBef>
                 <a:spcPts val="100"/>
               </a:spcBef>
@@ -2859,7 +3805,7 @@
                   <a:srgbClr val="4A4A4A"/>
                 </a:solidFill>
               </a:rPr>
-              <a:t>Einde sessie = minstens 1 concrete oplossing</a:t>
+              <a:t>Garantie op &gt;= 1 concreet resultaat</a:t>
             </a:r>
           </a:p>
         </p:txBody>
@@ -2878,7 +3824,7 @@
         </p:nvSpPr>
         <p:spPr>
           <a:xfrm>
-            <a:off x="4762500" y="1720626"/>
+            <a:off x="4753356" y="1930938"/>
             <a:ext cx="3746500" cy="1855694"/>
           </a:xfrm>
           <a:prstGeom prst="roundRect">
@@ -2890,7 +3836,9 @@
             <a:srgbClr val="F0F5FA"/>
           </a:solidFill>
           <a:ln>
-            <a:noFill/>
+            <a:solidFill>
+              <a:schemeClr val="accent1"/>
+            </a:solidFill>
           </a:ln>
         </p:spPr>
         <p:txBody>
@@ -2915,7 +3863,7 @@
         </p:nvSpPr>
         <p:spPr>
           <a:xfrm>
-            <a:off x="4826000" y="1760220"/>
+            <a:off x="4816856" y="1970532"/>
             <a:ext cx="3619500" cy="1752600"/>
           </a:xfrm>
           <a:prstGeom prst="rect">
@@ -2951,7 +3899,7 @@
             </a:endParaRPr>
           </a:p>
           <a:p>
-            <a:pPr algn="l">
+            <a:pPr algn="ctr">
               <a:spcBef>
                 <a:spcPts val="200"/>
               </a:spcBef>
@@ -2967,7 +3915,7 @@
             </a:r>
           </a:p>
           <a:p>
-            <a:pPr algn="l">
+            <a:pPr algn="ctr">
               <a:spcBef>
                 <a:spcPts val="100"/>
               </a:spcBef>
@@ -2983,7 +3931,7 @@
             </a:r>
           </a:p>
           <a:p>
-            <a:pPr algn="l">
+            <a:pPr algn="ctr">
               <a:spcBef>
                 <a:spcPts val="100"/>
               </a:spcBef>
@@ -3042,1177 +3990,178 @@
           </a:p>
         </p:txBody>
       </p:sp>
+      <p:sp>
+        <p:nvSpPr>
+          <p:cNvPr id="2" name="R57">
+            <a:extLst>
+              <a:ext uri="{FF2B5EF4-FFF2-40B4-BE49-F238E27FC236}">
+                <a16:creationId xmlns:a16="http://schemas.microsoft.com/office/drawing/2014/main" id="{F425F52B-DA33-9918-3A55-73741AA8FD2E}"/>
+              </a:ext>
+            </a:extLst>
+          </p:cNvPr>
+          <p:cNvSpPr/>
+          <p:nvPr/>
+        </p:nvSpPr>
+        <p:spPr>
+          <a:xfrm>
+            <a:off x="650240" y="4058442"/>
+            <a:ext cx="3720592" cy="723870"/>
+          </a:xfrm>
+          <a:prstGeom prst="roundRect">
+            <a:avLst>
+              <a:gd name="adj" fmla="val 5000"/>
+            </a:avLst>
+          </a:prstGeom>
+          <a:solidFill>
+            <a:srgbClr val="F0F5FA">
+              <a:alpha val="50000"/>
+            </a:srgbClr>
+          </a:solidFill>
+          <a:ln>
+            <a:noFill/>
+          </a:ln>
+        </p:spPr>
+        <p:txBody>
+          <a:bodyPr/>
+          <a:lstStyle/>
+          <a:p>
+            <a:pPr algn="ctr"/>
+            <a:r>
+              <a:rPr lang="nl-NL" sz="1400" b="1" dirty="0">
+                <a:solidFill>
+                  <a:srgbClr val="5B8DB8"/>
+                </a:solidFill>
+                <a:latin typeface="Trebuchet MS"/>
+              </a:rPr>
+              <a:t>Quick scan</a:t>
+            </a:r>
+          </a:p>
+          <a:p>
+            <a:pPr algn="ctr">
+              <a:spcBef>
+                <a:spcPts val="200"/>
+              </a:spcBef>
+            </a:pPr>
+            <a:r>
+              <a:rPr lang="nl-NL" sz="1100" dirty="0">
+                <a:solidFill>
+                  <a:srgbClr val="4A4A4A"/>
+                </a:solidFill>
+              </a:rPr>
+              <a:t>Een extra duwtje nodig?</a:t>
+            </a:r>
+          </a:p>
+          <a:p>
+            <a:pPr algn="ctr">
+              <a:spcBef>
+                <a:spcPts val="200"/>
+              </a:spcBef>
+            </a:pPr>
+            <a:r>
+              <a:rPr lang="nl-NL" sz="1100" dirty="0">
+                <a:solidFill>
+                  <a:srgbClr val="4A4A4A"/>
+                </a:solidFill>
+              </a:rPr>
+              <a:t>Op 1-1,5u een concreet beeld.</a:t>
+            </a:r>
+          </a:p>
+        </p:txBody>
+      </p:sp>
+      <p:sp>
+        <p:nvSpPr>
+          <p:cNvPr id="3" name="R57">
+            <a:extLst>
+              <a:ext uri="{FF2B5EF4-FFF2-40B4-BE49-F238E27FC236}">
+                <a16:creationId xmlns:a16="http://schemas.microsoft.com/office/drawing/2014/main" id="{F8A1B840-8915-8B78-0E71-9AECE515EF80}"/>
+              </a:ext>
+            </a:extLst>
+          </p:cNvPr>
+          <p:cNvSpPr/>
+          <p:nvPr/>
+        </p:nvSpPr>
+        <p:spPr>
+          <a:xfrm>
+            <a:off x="4771136" y="4046250"/>
+            <a:ext cx="3720592" cy="726918"/>
+          </a:xfrm>
+          <a:prstGeom prst="roundRect">
+            <a:avLst>
+              <a:gd name="adj" fmla="val 5000"/>
+            </a:avLst>
+          </a:prstGeom>
+          <a:solidFill>
+            <a:srgbClr val="F0F5FA">
+              <a:alpha val="50000"/>
+            </a:srgbClr>
+          </a:solidFill>
+          <a:ln>
+            <a:noFill/>
+          </a:ln>
+        </p:spPr>
+        <p:txBody>
+          <a:bodyPr/>
+          <a:lstStyle/>
+          <a:p>
+            <a:pPr algn="ctr"/>
+            <a:r>
+              <a:rPr lang="nl-NL" sz="1400" b="1" dirty="0">
+                <a:solidFill>
+                  <a:srgbClr val="5B8DB8"/>
+                </a:solidFill>
+                <a:latin typeface="Trebuchet MS"/>
+              </a:rPr>
+              <a:t>Check-in</a:t>
+            </a:r>
+          </a:p>
+          <a:p>
+            <a:pPr algn="ctr">
+              <a:spcBef>
+                <a:spcPts val="200"/>
+              </a:spcBef>
+            </a:pPr>
+            <a:r>
+              <a:rPr lang="nl-NL" sz="1100" dirty="0">
+                <a:solidFill>
+                  <a:srgbClr val="4A4A4A"/>
+                </a:solidFill>
+              </a:rPr>
+              <a:t>Toch graag opvolging?</a:t>
+            </a:r>
+          </a:p>
+          <a:p>
+            <a:pPr algn="ctr">
+              <a:spcBef>
+                <a:spcPts val="200"/>
+              </a:spcBef>
+            </a:pPr>
+            <a:r>
+              <a:rPr lang="nl-NL" sz="1100" dirty="0">
+                <a:solidFill>
+                  <a:srgbClr val="4A4A4A"/>
+                </a:solidFill>
+              </a:rPr>
+              <a:t>(bv 30 min, 2-wekelijks)</a:t>
+            </a:r>
+          </a:p>
+          <a:p>
+            <a:pPr algn="ctr">
+              <a:spcBef>
+                <a:spcPts val="200"/>
+              </a:spcBef>
+            </a:pPr>
+            <a:endParaRPr lang="nl-NL" sz="1100" dirty="0">
+              <a:solidFill>
+                <a:srgbClr val="4A4A4A"/>
+              </a:solidFill>
+            </a:endParaRPr>
+          </a:p>
+        </p:txBody>
+      </p:sp>
     </p:spTree>
     <p:extLst>
       <p:ext uri="{BB962C8B-B14F-4D97-AF65-F5344CB8AC3E}">
-        <p14:creationId xmlns:p14="http://schemas.microsoft.com/office/powerpoint/2010/main" val="4046231283"/>
-      </p:ext>
-    </p:extLst>
-  </p:cSld>
-  <p:clrMapOvr>
-    <a:masterClrMapping/>
-  </p:clrMapOvr>
-</p:sld>
-</file>
-
-<file path=ppt/slides/slide17.xml><?xml version="1.0" encoding="utf-8"?>
-<p:sld xmlns:a="http://schemas.openxmlformats.org/drawingml/2006/main" xmlns:r="http://schemas.openxmlformats.org/officeDocument/2006/relationships" xmlns:p="http://schemas.openxmlformats.org/presentationml/2006/main">
-  <p:cSld>
-    <p:bg>
-      <p:bgPr>
-        <a:solidFill>
-          <a:srgbClr val="FFFFFF">
-            <a:alpha val="100000"/>
-          </a:srgbClr>
-        </a:solidFill>
-        <a:effectLst/>
-      </p:bgPr>
-    </p:bg>
-    <p:spTree>
-      <p:nvGrpSpPr>
-        <p:cNvPr id="1" name=""/>
-        <p:cNvGrpSpPr/>
-        <p:nvPr/>
-      </p:nvGrpSpPr>
-      <p:grpSpPr>
-        <a:xfrm>
-          <a:off x="0" y="0"/>
-          <a:ext cx="0" cy="0"/>
-          <a:chOff x="0" y="0"/>
-          <a:chExt cx="0" cy="0"/>
-        </a:xfrm>
-      </p:grpSpPr>
-      <p:sp>
-        <p:nvSpPr>
-          <p:cNvPr id="2" name="Rechthoek 1">
-            <a:extLst>
-              <a:ext uri="{FF2B5EF4-FFF2-40B4-BE49-F238E27FC236}">
-                <a16:creationId xmlns:a16="http://schemas.microsoft.com/office/drawing/2014/main" id="{8004404B-92E0-E241-A2DB-DBAA3E9A652D}"/>
-              </a:ext>
-            </a:extLst>
-          </p:cNvPr>
-          <p:cNvSpPr/>
-          <p:nvPr/>
-        </p:nvSpPr>
-        <p:spPr>
-          <a:xfrm>
-            <a:off x="0" y="0"/>
-            <a:ext cx="9144000" cy="114300"/>
-          </a:xfrm>
-          <a:prstGeom prst="rect">
-            <a:avLst/>
-          </a:prstGeom>
-          <a:solidFill>
-            <a:srgbClr val="5B8DB8"/>
-          </a:solidFill>
-          <a:ln w="12700" cap="flat" cmpd="sng" algn="ctr">
-            <a:noFill/>
-            <a:prstDash val="solid"/>
-            <a:miter lim="800000"/>
-          </a:ln>
-        </p:spPr>
-        <p:style>
-          <a:lnRef idx="2">
-            <a:schemeClr val="accent1">
-              <a:shade val="15000"/>
-            </a:schemeClr>
-          </a:lnRef>
-          <a:fillRef idx="1">
-            <a:schemeClr val="accent1"/>
-          </a:fillRef>
-          <a:effectRef idx="0">
-            <a:schemeClr val="accent1"/>
-          </a:effectRef>
-          <a:fontRef idx="minor">
-            <a:schemeClr val="lt1"/>
-          </a:fontRef>
-        </p:style>
-        <p:txBody>
-          <a:bodyPr vertOverflow="clip" horzOverflow="clip" rtlCol="0" anchor="t"/>
-          <a:lstStyle/>
-          <a:p>
-            <a:pPr algn="l"/>
-            <a:endParaRPr lang="nl-BE"/>
-          </a:p>
-        </p:txBody>
-      </p:sp>
-      <p:sp>
-        <p:nvSpPr>
-          <p:cNvPr id="3" name="Tekstvak 2">
-            <a:extLst>
-              <a:ext uri="{FF2B5EF4-FFF2-40B4-BE49-F238E27FC236}">
-                <a16:creationId xmlns:a16="http://schemas.microsoft.com/office/drawing/2014/main" id="{FC4E99D5-61F2-9140-B3B4-CFCFF9F3FA25}"/>
-              </a:ext>
-            </a:extLst>
-          </p:cNvPr>
-          <p:cNvSpPr txBox="1"/>
-          <p:nvPr/>
-        </p:nvSpPr>
-        <p:spPr>
-          <a:xfrm>
-            <a:off x="635000" y="279400"/>
-            <a:ext cx="7772400" cy="523220"/>
-          </a:xfrm>
-          <a:prstGeom prst="rect">
-            <a:avLst/>
-          </a:prstGeom>
-          <a:noFill/>
-        </p:spPr>
-        <p:txBody>
-          <a:bodyPr vertOverflow="overflow" vert="horz" wrap="square" rtlCol="0" anchor="t">
-            <a:spAutoFit/>
-          </a:bodyPr>
-          <a:lstStyle/>
-          <a:p>
-            <a:pPr algn="l"/>
-            <a:r>
-              <a:rPr lang="nl-BE" sz="2800" b="1" dirty="0">
-                <a:solidFill>
-                  <a:srgbClr val="1A1A1A"/>
-                </a:solidFill>
-                <a:latin typeface="Trebuchet MS"/>
-              </a:rPr>
-              <a:t>Model 1 — in regie</a:t>
-            </a:r>
-          </a:p>
-        </p:txBody>
-      </p:sp>
-      <p:sp>
-        <p:nvSpPr>
-          <p:cNvPr id="50" name="R50"/>
-          <p:cNvSpPr/>
-          <p:nvPr/>
-        </p:nvSpPr>
-        <p:spPr>
-          <a:xfrm>
-            <a:off x="651510" y="990600"/>
-            <a:ext cx="7857490" cy="3821430"/>
-          </a:xfrm>
-          <a:prstGeom prst="roundRect">
-            <a:avLst>
-              <a:gd name="adj" fmla="val 6000"/>
-            </a:avLst>
-          </a:prstGeom>
-          <a:solidFill>
-            <a:srgbClr val="D6E6F2"/>
-          </a:solidFill>
-          <a:ln>
-            <a:noFill/>
-          </a:ln>
-        </p:spPr>
-        <p:txBody>
-          <a:bodyPr/>
-          <a:lstStyle/>
-          <a:p>
-            <a:endParaRPr lang="nl-NL"/>
-          </a:p>
-        </p:txBody>
-      </p:sp>
-      <p:sp>
-        <p:nvSpPr>
-          <p:cNvPr id="51" name="T51"/>
-          <p:cNvSpPr/>
-          <p:nvPr/>
-        </p:nvSpPr>
-        <p:spPr>
-          <a:xfrm>
-            <a:off x="889000" y="1206500"/>
-            <a:ext cx="7366000" cy="330200"/>
-          </a:xfrm>
-          <a:prstGeom prst="rect">
-            <a:avLst/>
-          </a:prstGeom>
-          <a:noFill/>
-          <a:ln>
-            <a:noFill/>
-          </a:ln>
-        </p:spPr>
-        <p:txBody>
-          <a:bodyPr wrap="square" lIns="36000" tIns="0" rIns="36000" bIns="0" anchor="ctr"/>
-          <a:lstStyle/>
-          <a:p>
-            <a:pPr algn="l"/>
-            <a:r>
-              <a:rPr lang="nl-NL" sz="1700" b="1" dirty="0">
-                <a:solidFill>
-                  <a:srgbClr val="1A1A1A"/>
-                </a:solidFill>
-                <a:latin typeface="Trebuchet MS"/>
-              </a:rPr>
-              <a:t>⏱️  Voorzie +- 3 à 4 uur per sessie</a:t>
-            </a:r>
-          </a:p>
-        </p:txBody>
-      </p:sp>
-      <p:sp>
-        <p:nvSpPr>
-          <p:cNvPr id="52" name="T52"/>
-          <p:cNvSpPr/>
-          <p:nvPr/>
-        </p:nvSpPr>
-        <p:spPr>
-          <a:xfrm>
-            <a:off x="1333500" y="1587500"/>
-            <a:ext cx="6921500" cy="330200"/>
-          </a:xfrm>
-          <a:prstGeom prst="rect">
-            <a:avLst/>
-          </a:prstGeom>
-          <a:noFill/>
-          <a:ln>
-            <a:noFill/>
-          </a:ln>
-        </p:spPr>
-        <p:txBody>
-          <a:bodyPr wrap="square" lIns="36000" tIns="0" rIns="36000" bIns="0" anchor="ctr"/>
-          <a:lstStyle/>
-          <a:p>
-            <a:pPr algn="l"/>
-            <a:r>
-              <a:rPr lang="nl-NL" sz="1500" dirty="0">
-                <a:solidFill>
-                  <a:srgbClr val="4A4A4A"/>
-                </a:solidFill>
-                <a:latin typeface="Calibri"/>
-              </a:rPr>
-              <a:t>Niet té lang, toch genoeg tijd om echt iets concreets te realiseren.</a:t>
-            </a:r>
-          </a:p>
-        </p:txBody>
-      </p:sp>
-      <p:sp>
-        <p:nvSpPr>
-          <p:cNvPr id="53" name="T53"/>
-          <p:cNvSpPr/>
-          <p:nvPr/>
-        </p:nvSpPr>
-        <p:spPr>
-          <a:xfrm>
-            <a:off x="889000" y="2159000"/>
-            <a:ext cx="7366000" cy="330200"/>
-          </a:xfrm>
-          <a:prstGeom prst="rect">
-            <a:avLst/>
-          </a:prstGeom>
-          <a:noFill/>
-          <a:ln>
-            <a:noFill/>
-          </a:ln>
-        </p:spPr>
-        <p:txBody>
-          <a:bodyPr wrap="square" lIns="36000" tIns="0" rIns="36000" bIns="0" anchor="ctr"/>
-          <a:lstStyle/>
-          <a:p>
-            <a:pPr algn="l"/>
-            <a:r>
-              <a:rPr lang="nl-NL" sz="1700" b="1" dirty="0">
-                <a:solidFill>
-                  <a:srgbClr val="1A1A1A"/>
-                </a:solidFill>
-                <a:latin typeface="Trebuchet MS"/>
-              </a:rPr>
-              <a:t>✅  Einde sessie = resultaat</a:t>
-            </a:r>
-          </a:p>
-        </p:txBody>
-      </p:sp>
-      <p:sp>
-        <p:nvSpPr>
-          <p:cNvPr id="54" name="T54"/>
-          <p:cNvSpPr/>
-          <p:nvPr/>
-        </p:nvSpPr>
-        <p:spPr>
-          <a:xfrm>
-            <a:off x="1333500" y="2540000"/>
-            <a:ext cx="6921500" cy="330200"/>
-          </a:xfrm>
-          <a:prstGeom prst="rect">
-            <a:avLst/>
-          </a:prstGeom>
-          <a:noFill/>
-          <a:ln>
-            <a:noFill/>
-          </a:ln>
-        </p:spPr>
-        <p:txBody>
-          <a:bodyPr wrap="square" lIns="36000" tIns="0" rIns="36000" bIns="0" anchor="ctr"/>
-          <a:lstStyle/>
-          <a:p>
-            <a:pPr algn="l"/>
-            <a:r>
-              <a:rPr lang="nl-NL" sz="1500" dirty="0">
-                <a:solidFill>
-                  <a:srgbClr val="4A4A4A"/>
-                </a:solidFill>
-                <a:latin typeface="Calibri"/>
-              </a:rPr>
-              <a:t>Je vertrekt altijd met minstens 1 concrete oplossing of deliverable.</a:t>
-            </a:r>
-          </a:p>
-        </p:txBody>
-      </p:sp>
-      <p:sp>
-        <p:nvSpPr>
-          <p:cNvPr id="55" name="T55"/>
-          <p:cNvSpPr/>
-          <p:nvPr/>
-        </p:nvSpPr>
-        <p:spPr>
-          <a:xfrm>
-            <a:off x="889000" y="3111500"/>
-            <a:ext cx="7366000" cy="330200"/>
-          </a:xfrm>
-          <a:prstGeom prst="rect">
-            <a:avLst/>
-          </a:prstGeom>
-          <a:noFill/>
-          <a:ln>
-            <a:noFill/>
-          </a:ln>
-        </p:spPr>
-        <p:txBody>
-          <a:bodyPr wrap="square" lIns="36000" tIns="0" rIns="36000" bIns="0" anchor="ctr"/>
-          <a:lstStyle/>
-          <a:p>
-            <a:pPr algn="l"/>
-            <a:r>
-              <a:rPr lang="nl-NL" sz="1700" b="1" dirty="0">
-                <a:solidFill>
-                  <a:srgbClr val="1A1A1A"/>
-                </a:solidFill>
-                <a:latin typeface="Trebuchet MS"/>
-              </a:rPr>
-              <a:t>🔄  Flexibel en op jouw tempo</a:t>
-            </a:r>
-          </a:p>
-        </p:txBody>
-      </p:sp>
-      <p:sp>
-        <p:nvSpPr>
-          <p:cNvPr id="56" name="T56"/>
-          <p:cNvSpPr/>
-          <p:nvPr/>
-        </p:nvSpPr>
-        <p:spPr>
-          <a:xfrm>
-            <a:off x="1333500" y="3492500"/>
-            <a:ext cx="6921500" cy="330200"/>
-          </a:xfrm>
-          <a:prstGeom prst="rect">
-            <a:avLst/>
-          </a:prstGeom>
-          <a:noFill/>
-          <a:ln>
-            <a:noFill/>
-          </a:ln>
-        </p:spPr>
-        <p:txBody>
-          <a:bodyPr wrap="square" lIns="36000" tIns="0" rIns="36000" bIns="0" anchor="ctr"/>
-          <a:lstStyle/>
-          <a:p>
-            <a:pPr algn="l"/>
-            <a:r>
-              <a:rPr lang="nl-NL" sz="1500" dirty="0">
-                <a:solidFill>
-                  <a:srgbClr val="4A4A4A"/>
-                </a:solidFill>
-                <a:latin typeface="Calibri"/>
-              </a:rPr>
-              <a:t>We bepalen samen wanneer en hoe vaak, met zelfstandigheid als einddoel. </a:t>
-            </a:r>
-          </a:p>
-        </p:txBody>
-      </p:sp>
-      <p:sp>
-        <p:nvSpPr>
-          <p:cNvPr id="57" name="T57"/>
-          <p:cNvSpPr/>
-          <p:nvPr/>
-        </p:nvSpPr>
-        <p:spPr>
-          <a:xfrm>
-            <a:off x="8407400" y="4749800"/>
-            <a:ext cx="457200" cy="279400"/>
-          </a:xfrm>
-          <a:prstGeom prst="rect">
-            <a:avLst/>
-          </a:prstGeom>
-          <a:noFill/>
-          <a:ln>
-            <a:noFill/>
-          </a:ln>
-        </p:spPr>
-        <p:txBody>
-          <a:bodyPr wrap="square" lIns="36000" tIns="0" rIns="36000" bIns="0" anchor="ctr"/>
-          <a:lstStyle/>
-          <a:p>
-            <a:pPr algn="r"/>
-            <a:r>
-              <a:rPr lang="nl-NL" sz="1400" dirty="0">
-                <a:solidFill>
-                  <a:srgbClr val="AAAAAA"/>
-                </a:solidFill>
-                <a:latin typeface="Calibri"/>
-              </a:rPr>
-              <a:t>8</a:t>
-            </a:r>
-          </a:p>
-        </p:txBody>
-      </p:sp>
-      <p:sp>
-        <p:nvSpPr>
-          <p:cNvPr id="4" name="T55">
-            <a:extLst>
-              <a:ext uri="{FF2B5EF4-FFF2-40B4-BE49-F238E27FC236}">
-                <a16:creationId xmlns:a16="http://schemas.microsoft.com/office/drawing/2014/main" id="{6EE9DCF1-E07C-2AC3-6F47-C385CB225F28}"/>
-              </a:ext>
-            </a:extLst>
-          </p:cNvPr>
-          <p:cNvSpPr/>
-          <p:nvPr/>
-        </p:nvSpPr>
-        <p:spPr>
-          <a:xfrm>
-            <a:off x="915670" y="4018280"/>
-            <a:ext cx="7366000" cy="330200"/>
-          </a:xfrm>
-          <a:prstGeom prst="rect">
-            <a:avLst/>
-          </a:prstGeom>
-          <a:noFill/>
-          <a:ln>
-            <a:noFill/>
-          </a:ln>
-        </p:spPr>
-        <p:txBody>
-          <a:bodyPr wrap="square" lIns="36000" tIns="0" rIns="36000" bIns="0" anchor="ctr"/>
-          <a:lstStyle/>
-          <a:p>
-            <a:r>
-              <a:rPr lang="en-US" dirty="0">
-                <a:solidFill>
-                  <a:srgbClr val="000000"/>
-                </a:solidFill>
-              </a:rPr>
-              <a:t>🎯</a:t>
-            </a:r>
-            <a:r>
-              <a:rPr lang="nl-NL" sz="1700" b="1" dirty="0">
-                <a:solidFill>
-                  <a:srgbClr val="1A1A1A"/>
-                </a:solidFill>
-                <a:latin typeface="Trebuchet MS"/>
-              </a:rPr>
-              <a:t>  Focus op kleinere, afgelijnde aanpassingen </a:t>
-            </a:r>
-          </a:p>
-        </p:txBody>
-      </p:sp>
-      <p:sp>
-        <p:nvSpPr>
-          <p:cNvPr id="5" name="T56">
-            <a:extLst>
-              <a:ext uri="{FF2B5EF4-FFF2-40B4-BE49-F238E27FC236}">
-                <a16:creationId xmlns:a16="http://schemas.microsoft.com/office/drawing/2014/main" id="{A3DB02F3-DC56-E7E8-F9DC-4B264E7AD826}"/>
-              </a:ext>
-            </a:extLst>
-          </p:cNvPr>
-          <p:cNvSpPr/>
-          <p:nvPr/>
-        </p:nvSpPr>
-        <p:spPr>
-          <a:xfrm>
-            <a:off x="1360170" y="4399280"/>
-            <a:ext cx="6921500" cy="330200"/>
-          </a:xfrm>
-          <a:prstGeom prst="rect">
-            <a:avLst/>
-          </a:prstGeom>
-          <a:noFill/>
-          <a:ln>
-            <a:noFill/>
-          </a:ln>
-        </p:spPr>
-        <p:txBody>
-          <a:bodyPr wrap="square" lIns="36000" tIns="0" rIns="36000" bIns="0" anchor="ctr"/>
-          <a:lstStyle/>
-          <a:p>
-            <a:pPr algn="l"/>
-            <a:r>
-              <a:rPr lang="nl-NL" sz="1500" dirty="0">
-                <a:solidFill>
-                  <a:srgbClr val="4A4A4A"/>
-                </a:solidFill>
-                <a:latin typeface="Calibri"/>
-              </a:rPr>
-              <a:t>We identificeren specifieke taken en sturen bij – ‘low </a:t>
-            </a:r>
-            <a:r>
-              <a:rPr lang="nl-NL" sz="1500" dirty="0" err="1">
-                <a:solidFill>
-                  <a:srgbClr val="4A4A4A"/>
-                </a:solidFill>
-                <a:latin typeface="Calibri"/>
-              </a:rPr>
-              <a:t>hanging</a:t>
-            </a:r>
-            <a:r>
-              <a:rPr lang="nl-NL" sz="1500" dirty="0">
-                <a:solidFill>
-                  <a:srgbClr val="4A4A4A"/>
-                </a:solidFill>
-                <a:latin typeface="Calibri"/>
-              </a:rPr>
-              <a:t> fruit’</a:t>
-            </a:r>
-          </a:p>
-        </p:txBody>
-      </p:sp>
-    </p:spTree>
-    <p:extLst>
-      <p:ext uri="{BB962C8B-B14F-4D97-AF65-F5344CB8AC3E}">
-        <p14:creationId xmlns:p14="http://schemas.microsoft.com/office/powerpoint/2010/main" val="3656677097"/>
-      </p:ext>
-    </p:extLst>
-  </p:cSld>
-  <p:clrMapOvr>
-    <a:masterClrMapping/>
-  </p:clrMapOvr>
-</p:sld>
-</file>
-
-<file path=ppt/slides/slide18.xml><?xml version="1.0" encoding="utf-8"?>
-<p:sld xmlns:a="http://schemas.openxmlformats.org/drawingml/2006/main" xmlns:r="http://schemas.openxmlformats.org/officeDocument/2006/relationships" xmlns:p="http://schemas.openxmlformats.org/presentationml/2006/main">
-  <p:cSld>
-    <p:bg>
-      <p:bgPr>
-        <a:solidFill>
-          <a:srgbClr val="FFFFFF">
-            <a:alpha val="100000"/>
-          </a:srgbClr>
-        </a:solidFill>
-        <a:effectLst/>
-      </p:bgPr>
-    </p:bg>
-    <p:spTree>
-      <p:nvGrpSpPr>
-        <p:cNvPr id="1" name=""/>
-        <p:cNvGrpSpPr/>
-        <p:nvPr/>
-      </p:nvGrpSpPr>
-      <p:grpSpPr>
-        <a:xfrm>
-          <a:off x="0" y="0"/>
-          <a:ext cx="0" cy="0"/>
-          <a:chOff x="0" y="0"/>
-          <a:chExt cx="0" cy="0"/>
-        </a:xfrm>
-      </p:grpSpPr>
-      <p:sp>
-        <p:nvSpPr>
-          <p:cNvPr id="5" name="Afgeronde rechthoek 4">
-            <a:extLst>
-              <a:ext uri="{FF2B5EF4-FFF2-40B4-BE49-F238E27FC236}">
-                <a16:creationId xmlns:a16="http://schemas.microsoft.com/office/drawing/2014/main" id="{B3D003A9-413F-054D-A637-D34FE69981DA}"/>
-              </a:ext>
-            </a:extLst>
-          </p:cNvPr>
-          <p:cNvSpPr/>
-          <p:nvPr/>
-        </p:nvSpPr>
-        <p:spPr>
-          <a:xfrm>
-            <a:off x="647700" y="990600"/>
-            <a:ext cx="7861300" cy="3784600"/>
-          </a:xfrm>
-          <a:prstGeom prst="roundRect">
-            <a:avLst/>
-          </a:prstGeom>
-          <a:solidFill>
-            <a:srgbClr val="D6E6F2"/>
-          </a:solidFill>
-          <a:ln w="12700" cap="flat" cmpd="sng" algn="ctr">
-            <a:noFill/>
-            <a:prstDash val="solid"/>
-            <a:miter lim="800000"/>
-          </a:ln>
-        </p:spPr>
-        <p:style>
-          <a:lnRef idx="2">
-            <a:schemeClr val="accent1">
-              <a:shade val="15000"/>
-            </a:schemeClr>
-          </a:lnRef>
-          <a:fillRef idx="1">
-            <a:schemeClr val="accent1"/>
-          </a:fillRef>
-          <a:effectRef idx="0">
-            <a:schemeClr val="accent1"/>
-          </a:effectRef>
-          <a:fontRef idx="minor">
-            <a:schemeClr val="lt1"/>
-          </a:fontRef>
-        </p:style>
-        <p:txBody>
-          <a:bodyPr vertOverflow="clip" horzOverflow="clip" rtlCol="0" anchor="t"/>
-          <a:lstStyle/>
-          <a:p>
-            <a:pPr algn="l"/>
-            <a:endParaRPr lang="nl-BE"/>
-          </a:p>
-        </p:txBody>
-      </p:sp>
-      <p:sp>
-        <p:nvSpPr>
-          <p:cNvPr id="3" name="Tekstvak 2">
-            <a:extLst>
-              <a:ext uri="{FF2B5EF4-FFF2-40B4-BE49-F238E27FC236}">
-                <a16:creationId xmlns:a16="http://schemas.microsoft.com/office/drawing/2014/main" id="{ABE0F9DD-E437-6045-AF5C-B5C13AAB19CB}"/>
-              </a:ext>
-            </a:extLst>
-          </p:cNvPr>
-          <p:cNvSpPr txBox="1"/>
-          <p:nvPr/>
-        </p:nvSpPr>
-        <p:spPr>
-          <a:xfrm>
-            <a:off x="635000" y="279400"/>
-            <a:ext cx="7772400" cy="523220"/>
-          </a:xfrm>
-          <a:prstGeom prst="rect">
-            <a:avLst/>
-          </a:prstGeom>
-          <a:noFill/>
-        </p:spPr>
-        <p:txBody>
-          <a:bodyPr vertOverflow="overflow" vert="horz" wrap="square" rtlCol="0" anchor="t">
-            <a:spAutoFit/>
-          </a:bodyPr>
-          <a:lstStyle/>
-          <a:p>
-            <a:pPr algn="l"/>
-            <a:r>
-              <a:rPr lang="nl-BE" sz="2800" b="1" dirty="0">
-                <a:solidFill>
-                  <a:srgbClr val="1A1A1A"/>
-                </a:solidFill>
-                <a:latin typeface="Trebuchet MS"/>
-              </a:rPr>
-              <a:t>Model 2 — vaste scope</a:t>
-            </a:r>
-          </a:p>
-        </p:txBody>
-      </p:sp>
-      <p:sp>
-        <p:nvSpPr>
-          <p:cNvPr id="66" name="T66"/>
-          <p:cNvSpPr/>
-          <p:nvPr/>
-        </p:nvSpPr>
-        <p:spPr>
-          <a:xfrm>
-            <a:off x="8407400" y="4749800"/>
-            <a:ext cx="457200" cy="279400"/>
-          </a:xfrm>
-          <a:prstGeom prst="rect">
-            <a:avLst/>
-          </a:prstGeom>
-          <a:noFill/>
-          <a:ln>
-            <a:noFill/>
-          </a:ln>
-        </p:spPr>
-        <p:txBody>
-          <a:bodyPr wrap="square" lIns="36000" tIns="0" rIns="36000" bIns="0" anchor="ctr"/>
-          <a:lstStyle/>
-          <a:p>
-            <a:pPr algn="r"/>
-            <a:r>
-              <a:rPr lang="nl-NL" sz="1400" dirty="0">
-                <a:solidFill>
-                  <a:srgbClr val="AAAAAA"/>
-                </a:solidFill>
-                <a:latin typeface="Calibri"/>
-              </a:rPr>
-              <a:t>9</a:t>
-            </a:r>
-          </a:p>
-        </p:txBody>
-      </p:sp>
-      <p:sp>
-        <p:nvSpPr>
-          <p:cNvPr id="6" name="Tekstvak 5">
-            <a:extLst>
-              <a:ext uri="{FF2B5EF4-FFF2-40B4-BE49-F238E27FC236}">
-                <a16:creationId xmlns:a16="http://schemas.microsoft.com/office/drawing/2014/main" id="{BE2179B2-9ABF-234A-853D-A95ECC263053}"/>
-              </a:ext>
-            </a:extLst>
-          </p:cNvPr>
-          <p:cNvSpPr txBox="1"/>
-          <p:nvPr/>
-        </p:nvSpPr>
-        <p:spPr>
-          <a:xfrm>
-            <a:off x="889000" y="1181100"/>
-            <a:ext cx="7366000" cy="330200"/>
-          </a:xfrm>
-          <a:prstGeom prst="rect">
-            <a:avLst/>
-          </a:prstGeom>
-          <a:noFill/>
-        </p:spPr>
-        <p:txBody>
-          <a:bodyPr vertOverflow="overflow" vert="horz" wrap="square" rtlCol="0" anchor="t">
-            <a:noAutofit/>
-          </a:bodyPr>
-          <a:lstStyle/>
-          <a:p>
-            <a:pPr algn="l"/>
-            <a:r>
-              <a:rPr lang="nl-BE" sz="1700" b="1">
-                <a:solidFill>
-                  <a:srgbClr val="1A1A1A"/>
-                </a:solidFill>
-                <a:latin typeface="Trebuchet MS"/>
-              </a:rPr>
-              <a:t>🔍  Nood identificeren</a:t>
-            </a:r>
-          </a:p>
-        </p:txBody>
-      </p:sp>
-      <p:sp>
-        <p:nvSpPr>
-          <p:cNvPr id="7" name="Tekstvak 6">
-            <a:extLst>
-              <a:ext uri="{FF2B5EF4-FFF2-40B4-BE49-F238E27FC236}">
-                <a16:creationId xmlns:a16="http://schemas.microsoft.com/office/drawing/2014/main" id="{8730C097-281E-704A-B6A7-6B51CAC5A2CB}"/>
-              </a:ext>
-            </a:extLst>
-          </p:cNvPr>
-          <p:cNvSpPr txBox="1"/>
-          <p:nvPr/>
-        </p:nvSpPr>
-        <p:spPr>
-          <a:xfrm>
-            <a:off x="1333500" y="1524000"/>
-            <a:ext cx="6921500" cy="330200"/>
-          </a:xfrm>
-          <a:prstGeom prst="rect">
-            <a:avLst/>
-          </a:prstGeom>
-          <a:noFill/>
-        </p:spPr>
-        <p:txBody>
-          <a:bodyPr vertOverflow="overflow" vert="horz" wrap="square" rtlCol="0" anchor="t">
-            <a:noAutofit/>
-          </a:bodyPr>
-          <a:lstStyle/>
-          <a:p>
-            <a:pPr algn="l"/>
-            <a:r>
-              <a:rPr lang="nl-BE" sz="1500">
-                <a:solidFill>
-                  <a:srgbClr val="2D2D2D"/>
-                </a:solidFill>
-                <a:latin typeface="Calibri"/>
-                <a:cs typeface="Calibri"/>
-              </a:rPr>
-              <a:t>Een eigen tool zou je rust geven</a:t>
-            </a:r>
-          </a:p>
-        </p:txBody>
-      </p:sp>
-      <p:sp>
-        <p:nvSpPr>
-          <p:cNvPr id="8" name="Tekstvak 7">
-            <a:extLst>
-              <a:ext uri="{FF2B5EF4-FFF2-40B4-BE49-F238E27FC236}">
-                <a16:creationId xmlns:a16="http://schemas.microsoft.com/office/drawing/2014/main" id="{6217AB14-FAC3-084F-B901-E277D7A4566C}"/>
-              </a:ext>
-            </a:extLst>
-          </p:cNvPr>
-          <p:cNvSpPr txBox="1"/>
-          <p:nvPr/>
-        </p:nvSpPr>
-        <p:spPr>
-          <a:xfrm>
-            <a:off x="889000" y="1866900"/>
-            <a:ext cx="7366000" cy="330200"/>
-          </a:xfrm>
-          <a:prstGeom prst="rect">
-            <a:avLst/>
-          </a:prstGeom>
-          <a:noFill/>
-        </p:spPr>
-        <p:txBody>
-          <a:bodyPr vertOverflow="overflow" vert="horz" wrap="square" rtlCol="0" anchor="t">
-            <a:noAutofit/>
-          </a:bodyPr>
-          <a:lstStyle/>
-          <a:p>
-            <a:pPr algn="l"/>
-            <a:r>
-              <a:rPr lang="nl-BE" sz="1700" b="1">
-                <a:solidFill>
-                  <a:srgbClr val="1A1A1A"/>
-                </a:solidFill>
-                <a:latin typeface="Trebuchet MS"/>
-              </a:rPr>
-              <a:t>📋  Scope bepalen</a:t>
-            </a:r>
-          </a:p>
-        </p:txBody>
-      </p:sp>
-      <p:sp>
-        <p:nvSpPr>
-          <p:cNvPr id="9" name="Tekstvak 8">
-            <a:extLst>
-              <a:ext uri="{FF2B5EF4-FFF2-40B4-BE49-F238E27FC236}">
-                <a16:creationId xmlns:a16="http://schemas.microsoft.com/office/drawing/2014/main" id="{22D1F089-4996-0642-A3F7-C42EC4BD1950}"/>
-              </a:ext>
-            </a:extLst>
-          </p:cNvPr>
-          <p:cNvSpPr txBox="1"/>
-          <p:nvPr/>
-        </p:nvSpPr>
-        <p:spPr>
-          <a:xfrm>
-            <a:off x="1333500" y="2209800"/>
-            <a:ext cx="6921500" cy="330200"/>
-          </a:xfrm>
-          <a:prstGeom prst="rect">
-            <a:avLst/>
-          </a:prstGeom>
-          <a:noFill/>
-        </p:spPr>
-        <p:txBody>
-          <a:bodyPr vertOverflow="overflow" vert="horz" wrap="square" rtlCol="0" anchor="t">
-            <a:noAutofit/>
-          </a:bodyPr>
-          <a:lstStyle/>
-          <a:p>
-            <a:pPr algn="l"/>
-            <a:r>
-              <a:rPr lang="nl-BE" sz="1500">
-                <a:solidFill>
-                  <a:srgbClr val="2D2D2D"/>
-                </a:solidFill>
-                <a:latin typeface="Calibri"/>
-                <a:cs typeface="Calibri"/>
-              </a:rPr>
-              <a:t>Samen de vereisten op hoog niveau vastleggen</a:t>
-            </a:r>
-          </a:p>
-        </p:txBody>
-      </p:sp>
-      <p:sp>
-        <p:nvSpPr>
-          <p:cNvPr id="10" name="Tekstvak 9">
-            <a:extLst>
-              <a:ext uri="{FF2B5EF4-FFF2-40B4-BE49-F238E27FC236}">
-                <a16:creationId xmlns:a16="http://schemas.microsoft.com/office/drawing/2014/main" id="{9C9C7B59-5289-B840-86EB-10BAF1635490}"/>
-              </a:ext>
-            </a:extLst>
-          </p:cNvPr>
-          <p:cNvSpPr txBox="1"/>
-          <p:nvPr/>
-        </p:nvSpPr>
-        <p:spPr>
-          <a:xfrm>
-            <a:off x="889000" y="2552700"/>
-            <a:ext cx="7366000" cy="330200"/>
-          </a:xfrm>
-          <a:prstGeom prst="rect">
-            <a:avLst/>
-          </a:prstGeom>
-          <a:noFill/>
-        </p:spPr>
-        <p:txBody>
-          <a:bodyPr vertOverflow="overflow" vert="horz" wrap="square" rtlCol="0" anchor="t">
-            <a:noAutofit/>
-          </a:bodyPr>
-          <a:lstStyle/>
-          <a:p>
-            <a:pPr algn="l"/>
-            <a:r>
-              <a:rPr lang="nl-BE" sz="1700" b="1">
-                <a:solidFill>
-                  <a:srgbClr val="1A1A1A"/>
-                </a:solidFill>
-                <a:latin typeface="Trebuchet MS"/>
-              </a:rPr>
-              <a:t>💰  Waardering</a:t>
-            </a:r>
-          </a:p>
-        </p:txBody>
-      </p:sp>
-      <p:sp>
-        <p:nvSpPr>
-          <p:cNvPr id="11" name="Tekstvak 10">
-            <a:extLst>
-              <a:ext uri="{FF2B5EF4-FFF2-40B4-BE49-F238E27FC236}">
-                <a16:creationId xmlns:a16="http://schemas.microsoft.com/office/drawing/2014/main" id="{EF129C18-16EE-0A42-BD00-9C9AE6B78788}"/>
-              </a:ext>
-            </a:extLst>
-          </p:cNvPr>
-          <p:cNvSpPr txBox="1"/>
-          <p:nvPr/>
-        </p:nvSpPr>
-        <p:spPr>
-          <a:xfrm>
-            <a:off x="1333500" y="2895600"/>
-            <a:ext cx="6921500" cy="330200"/>
-          </a:xfrm>
-          <a:prstGeom prst="rect">
-            <a:avLst/>
-          </a:prstGeom>
-          <a:noFill/>
-        </p:spPr>
-        <p:txBody>
-          <a:bodyPr vertOverflow="overflow" vert="horz" wrap="square" rtlCol="0" anchor="t">
-            <a:noAutofit/>
-          </a:bodyPr>
-          <a:lstStyle/>
-          <a:p>
-            <a:pPr algn="l"/>
-            <a:r>
-              <a:rPr lang="nl-BE" sz="1500">
-                <a:solidFill>
-                  <a:srgbClr val="2D2D2D"/>
-                </a:solidFill>
-                <a:latin typeface="Calibri"/>
-                <a:cs typeface="Calibri"/>
-              </a:rPr>
-              <a:t>Inschatting effort op basis van de scope</a:t>
-            </a:r>
-          </a:p>
-        </p:txBody>
-      </p:sp>
-      <p:sp>
-        <p:nvSpPr>
-          <p:cNvPr id="12" name="Tekstvak 11">
-            <a:extLst>
-              <a:ext uri="{FF2B5EF4-FFF2-40B4-BE49-F238E27FC236}">
-                <a16:creationId xmlns:a16="http://schemas.microsoft.com/office/drawing/2014/main" id="{7DEAB509-6BEB-D044-AEAD-A0824F17E9B2}"/>
-              </a:ext>
-            </a:extLst>
-          </p:cNvPr>
-          <p:cNvSpPr txBox="1"/>
-          <p:nvPr/>
-        </p:nvSpPr>
-        <p:spPr>
-          <a:xfrm>
-            <a:off x="889000" y="3238500"/>
-            <a:ext cx="7366000" cy="330200"/>
-          </a:xfrm>
-          <a:prstGeom prst="rect">
-            <a:avLst/>
-          </a:prstGeom>
-          <a:noFill/>
-        </p:spPr>
-        <p:txBody>
-          <a:bodyPr vertOverflow="overflow" vert="horz" wrap="square" rtlCol="0" anchor="t">
-            <a:noAutofit/>
-          </a:bodyPr>
-          <a:lstStyle/>
-          <a:p>
-            <a:pPr algn="l"/>
-            <a:r>
-              <a:rPr lang="nl-BE" sz="1700" b="1">
-                <a:solidFill>
-                  <a:srgbClr val="1A1A1A"/>
-                </a:solidFill>
-                <a:latin typeface="Trebuchet MS"/>
-              </a:rPr>
-              <a:t>🛠️  Wim bouwt</a:t>
-            </a:r>
-          </a:p>
-        </p:txBody>
-      </p:sp>
-      <p:sp>
-        <p:nvSpPr>
-          <p:cNvPr id="13" name="Tekstvak 12">
-            <a:extLst>
-              <a:ext uri="{FF2B5EF4-FFF2-40B4-BE49-F238E27FC236}">
-                <a16:creationId xmlns:a16="http://schemas.microsoft.com/office/drawing/2014/main" id="{A7A3357C-CACD-EC47-9774-CABAC1F871BD}"/>
-              </a:ext>
-            </a:extLst>
-          </p:cNvPr>
-          <p:cNvSpPr txBox="1"/>
-          <p:nvPr/>
-        </p:nvSpPr>
-        <p:spPr>
-          <a:xfrm>
-            <a:off x="1333500" y="3581400"/>
-            <a:ext cx="6921500" cy="330200"/>
-          </a:xfrm>
-          <a:prstGeom prst="rect">
-            <a:avLst/>
-          </a:prstGeom>
-          <a:noFill/>
-        </p:spPr>
-        <p:txBody>
-          <a:bodyPr vertOverflow="overflow" vert="horz" wrap="square" rtlCol="0" anchor="t">
-            <a:noAutofit/>
-          </a:bodyPr>
-          <a:lstStyle/>
-          <a:p>
-            <a:pPr algn="l"/>
-            <a:r>
-              <a:rPr lang="nl-BE" sz="1500">
-                <a:solidFill>
-                  <a:srgbClr val="2D2D2D"/>
-                </a:solidFill>
-                <a:latin typeface="Calibri"/>
-                <a:cs typeface="Calibri"/>
-              </a:rPr>
-              <a:t>De basis wordt ontwikkeld</a:t>
-            </a:r>
-          </a:p>
-        </p:txBody>
-      </p:sp>
-      <p:sp>
-        <p:nvSpPr>
-          <p:cNvPr id="14" name="Tekstvak 13">
-            <a:extLst>
-              <a:ext uri="{FF2B5EF4-FFF2-40B4-BE49-F238E27FC236}">
-                <a16:creationId xmlns:a16="http://schemas.microsoft.com/office/drawing/2014/main" id="{0C6E8AC8-A6E1-6D4C-80F5-0790768DB975}"/>
-              </a:ext>
-            </a:extLst>
-          </p:cNvPr>
-          <p:cNvSpPr txBox="1"/>
-          <p:nvPr/>
-        </p:nvSpPr>
-        <p:spPr>
-          <a:xfrm>
-            <a:off x="889000" y="3924300"/>
-            <a:ext cx="7366000" cy="330200"/>
-          </a:xfrm>
-          <a:prstGeom prst="rect">
-            <a:avLst/>
-          </a:prstGeom>
-          <a:noFill/>
-        </p:spPr>
-        <p:txBody>
-          <a:bodyPr vertOverflow="overflow" vert="horz" wrap="square" rtlCol="0" anchor="t">
-            <a:noAutofit/>
-          </a:bodyPr>
-          <a:lstStyle/>
-          <a:p>
-            <a:pPr algn="l"/>
-            <a:r>
-              <a:rPr lang="nl-BE" sz="1700" b="1">
-                <a:solidFill>
-                  <a:srgbClr val="1A1A1A"/>
-                </a:solidFill>
-                <a:latin typeface="Trebuchet MS"/>
-              </a:rPr>
-              <a:t>🤝  Overdracht</a:t>
-            </a:r>
-          </a:p>
-        </p:txBody>
-      </p:sp>
-      <p:sp>
-        <p:nvSpPr>
-          <p:cNvPr id="15" name="Tekstvak 14">
-            <a:extLst>
-              <a:ext uri="{FF2B5EF4-FFF2-40B4-BE49-F238E27FC236}">
-                <a16:creationId xmlns:a16="http://schemas.microsoft.com/office/drawing/2014/main" id="{93A411F5-5FE9-A242-B617-AB0595E224CC}"/>
-              </a:ext>
-            </a:extLst>
-          </p:cNvPr>
-          <p:cNvSpPr txBox="1"/>
-          <p:nvPr/>
-        </p:nvSpPr>
-        <p:spPr>
-          <a:xfrm>
-            <a:off x="1333500" y="4267200"/>
-            <a:ext cx="6921500" cy="330200"/>
-          </a:xfrm>
-          <a:prstGeom prst="rect">
-            <a:avLst/>
-          </a:prstGeom>
-          <a:noFill/>
-        </p:spPr>
-        <p:txBody>
-          <a:bodyPr vertOverflow="overflow" vert="horz" wrap="square" rtlCol="0" anchor="t">
-            <a:noAutofit/>
-          </a:bodyPr>
-          <a:lstStyle/>
-          <a:p>
-            <a:pPr algn="l"/>
-            <a:r>
-              <a:rPr lang="nl-BE" sz="1500">
-                <a:solidFill>
-                  <a:srgbClr val="2D2D2D"/>
-                </a:solidFill>
-                <a:latin typeface="Calibri"/>
-                <a:cs typeface="Calibri"/>
-              </a:rPr>
-              <a:t>Wim toont hoe jij zelfstandig verder kan</a:t>
-            </a:r>
-          </a:p>
-        </p:txBody>
-      </p:sp>
-      <p:sp>
-        <p:nvSpPr>
-          <p:cNvPr id="2" name="Rechthoek 1">
-            <a:extLst>
-              <a:ext uri="{FF2B5EF4-FFF2-40B4-BE49-F238E27FC236}">
-                <a16:creationId xmlns:a16="http://schemas.microsoft.com/office/drawing/2014/main" id="{B409C32C-D985-984E-BA04-0EA5A9B0262A}"/>
-              </a:ext>
-            </a:extLst>
-          </p:cNvPr>
-          <p:cNvSpPr/>
-          <p:nvPr/>
-        </p:nvSpPr>
-        <p:spPr>
-          <a:xfrm>
-            <a:off x="0" y="0"/>
-            <a:ext cx="9144000" cy="114300"/>
-          </a:xfrm>
-          <a:prstGeom prst="rect">
-            <a:avLst/>
-          </a:prstGeom>
-          <a:solidFill>
-            <a:srgbClr val="5B8DB8"/>
-          </a:solidFill>
-          <a:ln w="12700" cap="flat" cmpd="sng" algn="ctr">
-            <a:noFill/>
-            <a:prstDash val="solid"/>
-            <a:miter lim="800000"/>
-          </a:ln>
-        </p:spPr>
-        <p:style>
-          <a:lnRef idx="2">
-            <a:schemeClr val="accent1">
-              <a:shade val="15000"/>
-            </a:schemeClr>
-          </a:lnRef>
-          <a:fillRef idx="1">
-            <a:schemeClr val="accent1"/>
-          </a:fillRef>
-          <a:effectRef idx="0">
-            <a:schemeClr val="accent1"/>
-          </a:effectRef>
-          <a:fontRef idx="minor">
-            <a:schemeClr val="lt1"/>
-          </a:fontRef>
-        </p:style>
-        <p:txBody>
-          <a:bodyPr vertOverflow="clip" horzOverflow="clip" rtlCol="0" anchor="t"/>
-          <a:lstStyle/>
-          <a:p>
-            <a:pPr algn="l"/>
-            <a:endParaRPr lang="nl-BE"/>
-          </a:p>
-        </p:txBody>
-      </p:sp>
-    </p:spTree>
-    <p:extLst>
-      <p:ext uri="{BB962C8B-B14F-4D97-AF65-F5344CB8AC3E}">
-        <p14:creationId xmlns:p14="http://schemas.microsoft.com/office/powerpoint/2010/main" val="2849495398"/>
+        <p14:creationId xmlns:p14="http://schemas.microsoft.com/office/powerpoint/2010/main" val="2491280883"/>
       </p:ext>
     </p:extLst>
   </p:cSld>
@@ -4254,7 +4203,7 @@
           <p:cNvPr id="2" name="Rechthoek 1">
             <a:extLst>
               <a:ext uri="{FF2B5EF4-FFF2-40B4-BE49-F238E27FC236}">
-                <a16:creationId xmlns:a16="http://schemas.microsoft.com/office/drawing/2014/main" id="{CB9C96D5-207F-5C4E-8F97-A7C0CAB76C40}"/>
+                <a16:creationId xmlns:a16="http://schemas.microsoft.com/office/drawing/2014/main" id="{8004404B-92E0-E241-A2DB-DBAA3E9A652D}"/>
               </a:ext>
             </a:extLst>
           </p:cNvPr>
@@ -4308,7 +4257,7 @@
           <p:cNvPr id="3" name="Tekstvak 2">
             <a:extLst>
               <a:ext uri="{FF2B5EF4-FFF2-40B4-BE49-F238E27FC236}">
-                <a16:creationId xmlns:a16="http://schemas.microsoft.com/office/drawing/2014/main" id="{67A5D087-9873-194B-99C6-8465DEF15B8F}"/>
+                <a16:creationId xmlns:a16="http://schemas.microsoft.com/office/drawing/2014/main" id="{FC4E99D5-61F2-9140-B3B4-CFCFF9F3FA25}"/>
               </a:ext>
             </a:extLst>
           </p:cNvPr>
@@ -4339,7 +4288,7 @@
                 </a:solidFill>
                 <a:latin typeface="Trebuchet MS"/>
               </a:rPr>
-              <a:t>Waar ondersteunt Wim ?</a:t>
+              <a:t>Model 1 — in regie</a:t>
             </a:r>
           </a:p>
         </p:txBody>
@@ -4352,8 +4301,8 @@
         </p:nvSpPr>
         <p:spPr>
           <a:xfrm>
-            <a:off x="669290" y="1299210"/>
-            <a:ext cx="3746500" cy="2449830"/>
+            <a:off x="651510" y="990600"/>
+            <a:ext cx="7857490" cy="3821430"/>
           </a:xfrm>
           <a:prstGeom prst="roundRect">
             <a:avLst>
@@ -4383,8 +4332,8 @@
         </p:nvSpPr>
         <p:spPr>
           <a:xfrm>
-            <a:off x="732790" y="1350010"/>
-            <a:ext cx="3619500" cy="3238500"/>
+            <a:off x="889000" y="1206500"/>
+            <a:ext cx="7366000" cy="330200"/>
           </a:xfrm>
           <a:prstGeom prst="rect">
             <a:avLst/>
@@ -4395,167 +4344,223 @@
           </a:ln>
         </p:spPr>
         <p:txBody>
-          <a:bodyPr wrap="square" lIns="54000" tIns="36000" rIns="54000" bIns="36000" anchor="t"/>
-          <a:lstStyle/>
-          <a:p>
-            <a:pPr algn="l"/>
-            <a:r>
-              <a:rPr lang="nl-NL" sz="1800" b="1" dirty="0">
-                <a:solidFill>
-                  <a:srgbClr val="2C5F7C"/>
+          <a:bodyPr wrap="square" lIns="36000" tIns="0" rIns="36000" bIns="0" anchor="ctr"/>
+          <a:lstStyle/>
+          <a:p>
+            <a:pPr algn="l"/>
+            <a:r>
+              <a:rPr lang="nl-NL" sz="1700" b="1" dirty="0">
+                <a:solidFill>
+                  <a:srgbClr val="1A1A1A"/>
                 </a:solidFill>
                 <a:latin typeface="Trebuchet MS"/>
               </a:rPr>
-              <a:t>✅  Wat wel</a:t>
-            </a:r>
-          </a:p>
-          <a:p>
-            <a:pPr algn="l"/>
-            <a:endParaRPr lang="nl-NL" sz="1800" b="1" dirty="0">
-              <a:solidFill>
-                <a:srgbClr val="2C5F7C"/>
-              </a:solidFill>
-              <a:latin typeface="Trebuchet MS"/>
-            </a:endParaRPr>
-          </a:p>
+              <a:t>⏱️  Voorzie +- 3 à 4 uur per sessie</a:t>
+            </a:r>
+          </a:p>
+        </p:txBody>
+      </p:sp>
+      <p:sp>
+        <p:nvSpPr>
+          <p:cNvPr id="52" name="T52"/>
+          <p:cNvSpPr/>
+          <p:nvPr/>
+        </p:nvSpPr>
+        <p:spPr>
+          <a:xfrm>
+            <a:off x="1333500" y="1587500"/>
+            <a:ext cx="6921500" cy="330200"/>
+          </a:xfrm>
+          <a:prstGeom prst="rect">
+            <a:avLst/>
+          </a:prstGeom>
+          <a:noFill/>
+          <a:ln>
+            <a:noFill/>
+          </a:ln>
+        </p:spPr>
+        <p:txBody>
+          <a:bodyPr wrap="square" lIns="36000" tIns="0" rIns="36000" bIns="0" anchor="ctr"/>
+          <a:lstStyle/>
           <a:p>
             <a:pPr algn="l"/>
             <a:r>
               <a:rPr lang="nl-NL" sz="1500" dirty="0">
                 <a:solidFill>
+                  <a:srgbClr val="4A4A4A"/>
+                </a:solidFill>
+                <a:latin typeface="Calibri"/>
+              </a:rPr>
+              <a:t>Niet té lang, toch genoeg tijd om echt iets concreets te realiseren.</a:t>
+            </a:r>
+          </a:p>
+        </p:txBody>
+      </p:sp>
+      <p:sp>
+        <p:nvSpPr>
+          <p:cNvPr id="53" name="T53"/>
+          <p:cNvSpPr/>
+          <p:nvPr/>
+        </p:nvSpPr>
+        <p:spPr>
+          <a:xfrm>
+            <a:off x="889000" y="2159000"/>
+            <a:ext cx="7366000" cy="330200"/>
+          </a:xfrm>
+          <a:prstGeom prst="rect">
+            <a:avLst/>
+          </a:prstGeom>
+          <a:noFill/>
+          <a:ln>
+            <a:noFill/>
+          </a:ln>
+        </p:spPr>
+        <p:txBody>
+          <a:bodyPr wrap="square" lIns="36000" tIns="0" rIns="36000" bIns="0" anchor="ctr"/>
+          <a:lstStyle/>
+          <a:p>
+            <a:pPr algn="l"/>
+            <a:r>
+              <a:rPr lang="nl-NL" sz="1700" b="1" dirty="0">
+                <a:solidFill>
                   <a:srgbClr val="1A1A1A"/>
                 </a:solidFill>
-                <a:latin typeface="Calibri"/>
-              </a:rPr>
-              <a:t>Automatisaties &amp; optimalisaties</a:t>
-            </a:r>
-          </a:p>
+                <a:latin typeface="Trebuchet MS"/>
+              </a:rPr>
+              <a:t>✅  Einde sessie = resultaat</a:t>
+            </a:r>
+          </a:p>
+        </p:txBody>
+      </p:sp>
+      <p:sp>
+        <p:nvSpPr>
+          <p:cNvPr id="54" name="T54"/>
+          <p:cNvSpPr/>
+          <p:nvPr/>
+        </p:nvSpPr>
+        <p:spPr>
+          <a:xfrm>
+            <a:off x="1333500" y="2540000"/>
+            <a:ext cx="6921500" cy="330200"/>
+          </a:xfrm>
+          <a:prstGeom prst="rect">
+            <a:avLst/>
+          </a:prstGeom>
+          <a:noFill/>
+          <a:ln>
+            <a:noFill/>
+          </a:ln>
+        </p:spPr>
+        <p:txBody>
+          <a:bodyPr wrap="square" lIns="36000" tIns="0" rIns="36000" bIns="0" anchor="ctr"/>
+          <a:lstStyle/>
           <a:p>
             <a:pPr algn="l"/>
             <a:r>
               <a:rPr lang="nl-NL" sz="1500" dirty="0">
                 <a:solidFill>
+                  <a:srgbClr val="4A4A4A"/>
+                </a:solidFill>
+                <a:latin typeface="Calibri"/>
+              </a:rPr>
+              <a:t>Je vertrekt altijd met minstens 1 concrete oplossing of deliverable.</a:t>
+            </a:r>
+          </a:p>
+        </p:txBody>
+      </p:sp>
+      <p:sp>
+        <p:nvSpPr>
+          <p:cNvPr id="55" name="T55"/>
+          <p:cNvSpPr/>
+          <p:nvPr/>
+        </p:nvSpPr>
+        <p:spPr>
+          <a:xfrm>
+            <a:off x="889000" y="3111500"/>
+            <a:ext cx="7366000" cy="330200"/>
+          </a:xfrm>
+          <a:prstGeom prst="rect">
+            <a:avLst/>
+          </a:prstGeom>
+          <a:noFill/>
+          <a:ln>
+            <a:noFill/>
+          </a:ln>
+        </p:spPr>
+        <p:txBody>
+          <a:bodyPr wrap="square" lIns="36000" tIns="0" rIns="36000" bIns="0" anchor="ctr"/>
+          <a:lstStyle/>
+          <a:p>
+            <a:pPr algn="l"/>
+            <a:r>
+              <a:rPr lang="nl-NL" sz="1700" b="1" dirty="0">
+                <a:solidFill>
                   <a:srgbClr val="1A1A1A"/>
                 </a:solidFill>
-                <a:latin typeface="Calibri"/>
-              </a:rPr>
-              <a:t>Interne tools bouwen</a:t>
-            </a:r>
-          </a:p>
+                <a:latin typeface="Trebuchet MS"/>
+              </a:rPr>
+              <a:t>🔄  Flexibel en op jouw tempo</a:t>
+            </a:r>
+          </a:p>
+        </p:txBody>
+      </p:sp>
+      <p:sp>
+        <p:nvSpPr>
+          <p:cNvPr id="56" name="T56"/>
+          <p:cNvSpPr/>
+          <p:nvPr/>
+        </p:nvSpPr>
+        <p:spPr>
+          <a:xfrm>
+            <a:off x="1333500" y="3492500"/>
+            <a:ext cx="6921500" cy="330200"/>
+          </a:xfrm>
+          <a:prstGeom prst="rect">
+            <a:avLst/>
+          </a:prstGeom>
+          <a:noFill/>
+          <a:ln>
+            <a:noFill/>
+          </a:ln>
+        </p:spPr>
+        <p:txBody>
+          <a:bodyPr wrap="square" lIns="36000" tIns="0" rIns="36000" bIns="0" anchor="ctr"/>
+          <a:lstStyle/>
           <a:p>
             <a:pPr algn="l"/>
             <a:r>
               <a:rPr lang="nl-NL" sz="1500" dirty="0">
                 <a:solidFill>
-                  <a:srgbClr val="1A1A1A"/>
-                </a:solidFill>
-                <a:latin typeface="Calibri"/>
-              </a:rPr>
-              <a:t>Lokale oplossingen (op eigen systeem)</a:t>
-            </a:r>
-          </a:p>
-          <a:p>
-            <a:pPr algn="l"/>
-            <a:r>
-              <a:rPr lang="nl-NL" sz="1500" dirty="0">
-                <a:solidFill>
-                  <a:srgbClr val="1A1A1A"/>
-                </a:solidFill>
-                <a:latin typeface="Calibri"/>
-              </a:rPr>
-              <a:t>AI integreren in bestaande </a:t>
-            </a:r>
-            <a:r>
-              <a:rPr lang="nl-NL" sz="1500" dirty="0" err="1">
-                <a:solidFill>
-                  <a:srgbClr val="1A1A1A"/>
-                </a:solidFill>
-                <a:latin typeface="Calibri"/>
-              </a:rPr>
-              <a:t>workflows</a:t>
-            </a:r>
-            <a:endParaRPr lang="nl-NL" sz="1500" dirty="0">
-              <a:solidFill>
-                <a:srgbClr val="1A1A1A"/>
-              </a:solidFill>
-              <a:latin typeface="Calibri"/>
-            </a:endParaRPr>
-          </a:p>
-          <a:p>
-            <a:pPr algn="l"/>
-            <a:endParaRPr lang="nl-NL" sz="1500" dirty="0">
-              <a:solidFill>
-                <a:srgbClr val="1A1A1A"/>
-              </a:solidFill>
-              <a:latin typeface="Calibri"/>
-            </a:endParaRPr>
-          </a:p>
-          <a:p>
-            <a:pPr algn="l"/>
-            <a:r>
-              <a:rPr lang="nl-NL" sz="1500" dirty="0">
-                <a:solidFill>
-                  <a:srgbClr val="1A1A1A"/>
-                </a:solidFill>
-                <a:latin typeface="Calibri"/>
-              </a:rPr>
-              <a:t>Coaching naar zelfstandig gebruik</a:t>
-            </a:r>
-          </a:p>
-        </p:txBody>
-      </p:sp>
-      <p:sp>
-        <p:nvSpPr>
-          <p:cNvPr id="52" name="R52"/>
-          <p:cNvSpPr/>
-          <p:nvPr/>
-        </p:nvSpPr>
-        <p:spPr>
-          <a:xfrm>
-            <a:off x="4796790" y="1299210"/>
-            <a:ext cx="3746500" cy="3365500"/>
-          </a:xfrm>
-          <a:prstGeom prst="roundRect">
-            <a:avLst>
-              <a:gd name="adj" fmla="val 6000"/>
-            </a:avLst>
-          </a:prstGeom>
-          <a:solidFill>
-            <a:srgbClr val="FFFFFF"/>
-          </a:solidFill>
+                  <a:srgbClr val="4A4A4A"/>
+                </a:solidFill>
+                <a:latin typeface="Calibri"/>
+              </a:rPr>
+              <a:t>We bepalen samen wanneer en hoe vaak, met zelfstandigheid als einddoel. </a:t>
+            </a:r>
+          </a:p>
+        </p:txBody>
+      </p:sp>
+      <p:sp>
+        <p:nvSpPr>
+          <p:cNvPr id="57" name="T57"/>
+          <p:cNvSpPr/>
+          <p:nvPr/>
+        </p:nvSpPr>
+        <p:spPr>
+          <a:xfrm>
+            <a:off x="8407400" y="4749800"/>
+            <a:ext cx="457200" cy="279400"/>
+          </a:xfrm>
+          <a:prstGeom prst="rect">
+            <a:avLst/>
+          </a:prstGeom>
+          <a:noFill/>
           <a:ln>
             <a:noFill/>
           </a:ln>
         </p:spPr>
         <p:txBody>
-          <a:bodyPr/>
-          <a:lstStyle/>
-          <a:p>
-            <a:endParaRPr lang="nl-NL"/>
-          </a:p>
-        </p:txBody>
-      </p:sp>
-      <p:sp>
-        <p:nvSpPr>
-          <p:cNvPr id="54" name="T54"/>
-          <p:cNvSpPr/>
-          <p:nvPr/>
-        </p:nvSpPr>
-        <p:spPr>
-          <a:xfrm>
-            <a:off x="8407400" y="4864100"/>
-            <a:ext cx="457200" cy="279400"/>
-          </a:xfrm>
-          <a:prstGeom prst="rect">
-            <a:avLst/>
-          </a:prstGeom>
-          <a:noFill/>
-          <a:ln>
-            <a:noFill/>
-          </a:ln>
-        </p:spPr>
-        <p:txBody>
-          <a:bodyPr wrap="square" lIns="54000" tIns="36000" rIns="54000" bIns="36000" anchor="t"/>
+          <a:bodyPr wrap="square" lIns="36000" tIns="0" rIns="36000" bIns="0" anchor="ctr"/>
           <a:lstStyle/>
           <a:p>
             <a:pPr algn="r"/>
@@ -4566,17 +4571,17 @@
                 </a:solidFill>
                 <a:latin typeface="Calibri"/>
               </a:rPr>
-              <a:t>10</a:t>
-            </a:r>
-          </a:p>
-        </p:txBody>
-      </p:sp>
-      <p:sp>
-        <p:nvSpPr>
-          <p:cNvPr id="4" name="R50">
+              <a:t>8</a:t>
+            </a:r>
+          </a:p>
+        </p:txBody>
+      </p:sp>
+      <p:sp>
+        <p:nvSpPr>
+          <p:cNvPr id="4" name="T55">
             <a:extLst>
               <a:ext uri="{FF2B5EF4-FFF2-40B4-BE49-F238E27FC236}">
-                <a16:creationId xmlns:a16="http://schemas.microsoft.com/office/drawing/2014/main" id="{D5A1F439-5588-B9FC-8C66-9A14CD65B6F9}"/>
+                <a16:creationId xmlns:a16="http://schemas.microsoft.com/office/drawing/2014/main" id="{6EE9DCF1-E07C-2AC3-6F47-C385CB225F28}"/>
               </a:ext>
             </a:extLst>
           </p:cNvPr>
@@ -4585,121 +4590,47 @@
         </p:nvSpPr>
         <p:spPr>
           <a:xfrm>
-            <a:off x="4776470" y="1303020"/>
-            <a:ext cx="3746500" cy="2449830"/>
-          </a:xfrm>
-          <a:prstGeom prst="roundRect">
-            <a:avLst>
-              <a:gd name="adj" fmla="val 6000"/>
-            </a:avLst>
-          </a:prstGeom>
-          <a:solidFill>
-            <a:schemeClr val="accent2">
-              <a:lumMod val="20000"/>
-              <a:lumOff val="80000"/>
-            </a:schemeClr>
-          </a:solidFill>
+            <a:off x="915670" y="4018280"/>
+            <a:ext cx="7366000" cy="330200"/>
+          </a:xfrm>
+          <a:prstGeom prst="rect">
+            <a:avLst/>
+          </a:prstGeom>
+          <a:noFill/>
           <a:ln>
             <a:noFill/>
           </a:ln>
         </p:spPr>
         <p:txBody>
-          <a:bodyPr/>
-          <a:lstStyle/>
-          <a:p>
-            <a:r>
-              <a:rPr lang="nl-NL" sz="2000" b="1" dirty="0">
-                <a:solidFill>
-                  <a:srgbClr val="4A4A4A"/>
+          <a:bodyPr wrap="square" lIns="36000" tIns="0" rIns="36000" bIns="0" anchor="ctr"/>
+          <a:lstStyle/>
+          <a:p>
+            <a:r>
+              <a:rPr lang="en-US" dirty="0">
+                <a:solidFill>
+                  <a:srgbClr val="000000"/>
+                </a:solidFill>
+              </a:rPr>
+              <a:t>🎯</a:t>
+            </a:r>
+            <a:r>
+              <a:rPr lang="nl-NL" sz="1700" b="1" dirty="0">
+                <a:solidFill>
+                  <a:srgbClr val="1A1A1A"/>
                 </a:solidFill>
                 <a:latin typeface="Trebuchet MS"/>
               </a:rPr>
-              <a:t>❌  </a:t>
-            </a:r>
-            <a:r>
-              <a:rPr lang="nl-NL" b="1" dirty="0">
-                <a:latin typeface="Trebuchet MS"/>
-              </a:rPr>
-              <a:t>Wat niet</a:t>
-            </a:r>
-          </a:p>
-          <a:p>
-            <a:endParaRPr lang="nl-NL" sz="2000" b="1" dirty="0">
-              <a:solidFill>
-                <a:srgbClr val="4A4A4A"/>
-              </a:solidFill>
-              <a:latin typeface="Trebuchet MS"/>
-            </a:endParaRPr>
-          </a:p>
-          <a:p>
-            <a:r>
-              <a:rPr lang="nl-NL" sz="1500" dirty="0">
-                <a:solidFill>
-                  <a:srgbClr val="1A1A1A"/>
-                </a:solidFill>
-                <a:latin typeface="Calibri"/>
-              </a:rPr>
-              <a:t>Website &amp; content</a:t>
-            </a:r>
-          </a:p>
-          <a:p>
-            <a:r>
-              <a:rPr lang="nl-NL" sz="1500" dirty="0">
-                <a:solidFill>
-                  <a:srgbClr val="1A1A1A"/>
-                </a:solidFill>
-                <a:latin typeface="Calibri"/>
-              </a:rPr>
-              <a:t>Digital Marketing (SEO / GEO / SEA / …)</a:t>
-            </a:r>
-          </a:p>
-          <a:p>
-            <a:r>
-              <a:rPr lang="nl-NL" sz="1500" dirty="0" err="1">
-                <a:solidFill>
-                  <a:srgbClr val="1A1A1A"/>
-                </a:solidFill>
-                <a:latin typeface="Calibri"/>
-              </a:rPr>
-              <a:t>Social</a:t>
-            </a:r>
-            <a:r>
-              <a:rPr lang="nl-NL" sz="1500" dirty="0">
-                <a:solidFill>
-                  <a:srgbClr val="1A1A1A"/>
-                </a:solidFill>
-                <a:latin typeface="Calibri"/>
-              </a:rPr>
-              <a:t> media management</a:t>
-            </a:r>
-          </a:p>
-          <a:p>
-            <a:r>
-              <a:rPr lang="nl-NL" sz="1500" dirty="0">
-                <a:solidFill>
-                  <a:srgbClr val="1A1A1A"/>
-                </a:solidFill>
-                <a:latin typeface="Calibri"/>
-              </a:rPr>
-              <a:t>Geen IT </a:t>
-            </a:r>
-            <a:r>
-              <a:rPr lang="nl-NL" sz="1500" dirty="0">
-                <a:solidFill>
-                  <a:srgbClr val="1A1A1A"/>
-                </a:solidFill>
-              </a:rPr>
-              <a:t>Service (Internet, Office,…)</a:t>
-            </a:r>
-          </a:p>
-        </p:txBody>
-      </p:sp>
-      <p:sp>
-        <p:nvSpPr>
-          <p:cNvPr id="5" name="R50">
+              <a:t>  Focus op kleinere, afgelijnde aanpassingen </a:t>
+            </a:r>
+          </a:p>
+        </p:txBody>
+      </p:sp>
+      <p:sp>
+        <p:nvSpPr>
+          <p:cNvPr id="5" name="T56">
             <a:extLst>
               <a:ext uri="{FF2B5EF4-FFF2-40B4-BE49-F238E27FC236}">
-                <a16:creationId xmlns:a16="http://schemas.microsoft.com/office/drawing/2014/main" id="{CD55D6E7-F126-7A64-61C3-054A78DA5C36}"/>
+                <a16:creationId xmlns:a16="http://schemas.microsoft.com/office/drawing/2014/main" id="{A3DB02F3-DC56-E7E8-F9DC-4B264E7AD826}"/>
               </a:ext>
             </a:extLst>
           </p:cNvPr>
@@ -4708,89 +4639,48 @@
         </p:nvSpPr>
         <p:spPr>
           <a:xfrm>
-            <a:off x="680720" y="4079240"/>
-            <a:ext cx="7874000" cy="732790"/>
-          </a:xfrm>
-          <a:prstGeom prst="roundRect">
-            <a:avLst>
-              <a:gd name="adj" fmla="val 6000"/>
-            </a:avLst>
-          </a:prstGeom>
-          <a:solidFill>
-            <a:schemeClr val="accent6">
-              <a:lumMod val="20000"/>
-              <a:lumOff val="80000"/>
-            </a:schemeClr>
-          </a:solidFill>
+            <a:off x="1360170" y="4399280"/>
+            <a:ext cx="6921500" cy="330200"/>
+          </a:xfrm>
+          <a:prstGeom prst="rect">
+            <a:avLst/>
+          </a:prstGeom>
+          <a:noFill/>
           <a:ln>
             <a:noFill/>
           </a:ln>
         </p:spPr>
         <p:txBody>
-          <a:bodyPr/>
-          <a:lstStyle/>
-          <a:p>
-            <a:endParaRPr lang="nl-NL" dirty="0"/>
-          </a:p>
-        </p:txBody>
-      </p:sp>
-      <p:sp>
-        <p:nvSpPr>
-          <p:cNvPr id="6" name="T51">
-            <a:extLst>
-              <a:ext uri="{FF2B5EF4-FFF2-40B4-BE49-F238E27FC236}">
-                <a16:creationId xmlns:a16="http://schemas.microsoft.com/office/drawing/2014/main" id="{6B089BA4-3FF7-B386-A9F1-1AA42D85E552}"/>
-              </a:ext>
-            </a:extLst>
-          </p:cNvPr>
-          <p:cNvSpPr/>
-          <p:nvPr/>
-        </p:nvSpPr>
-        <p:spPr>
-          <a:xfrm>
-            <a:off x="807720" y="4142740"/>
-            <a:ext cx="7620000" cy="889000"/>
-          </a:xfrm>
-          <a:prstGeom prst="rect">
-            <a:avLst/>
-          </a:prstGeom>
-          <a:noFill/>
-          <a:ln>
-            <a:noFill/>
-          </a:ln>
-        </p:spPr>
-        <p:txBody>
-          <a:bodyPr wrap="square" lIns="54000" tIns="36000" rIns="54000" bIns="36000" anchor="t"/>
-          <a:lstStyle/>
-          <a:p>
-            <a:r>
-              <a:rPr lang="en-US" dirty="0">
-                <a:solidFill>
-                  <a:srgbClr val="000000"/>
-                </a:solidFill>
-              </a:rPr>
-              <a:t>🤝</a:t>
-            </a:r>
-            <a:r>
-              <a:rPr lang="nl-NL" sz="1700" b="1" dirty="0">
-                <a:solidFill>
-                  <a:srgbClr val="1A1A1A"/>
-                </a:solidFill>
-                <a:latin typeface="Trebuchet MS"/>
-              </a:rPr>
-              <a:t>  Samen akkoord</a:t>
-            </a:r>
-          </a:p>
-          <a:p>
-            <a:pPr algn="l"/>
-            <a:r>
-              <a:rPr lang="nl-NL" sz="1400" dirty="0">
+          <a:bodyPr wrap="square" lIns="36000" tIns="0" rIns="36000" bIns="0" anchor="ctr"/>
+          <a:lstStyle/>
+          <a:p>
+            <a:pPr algn="l"/>
+            <a:r>
+              <a:rPr lang="nl-NL" sz="1500" dirty="0">
                 <a:solidFill>
                   <a:srgbClr val="4A4A4A"/>
                 </a:solidFill>
                 <a:latin typeface="Calibri"/>
               </a:rPr>
-              <a:t>Klant is koning &lt;&gt; Wim bepaalt mee de scope, in functie van risicomitigatie.</a:t>
+              <a:t>We identificeren specifieke taken en sturen bij – ‘low </a:t>
+            </a:r>
+            <a:r>
+              <a:rPr lang="nl-NL" sz="1500" dirty="0" err="1">
+                <a:solidFill>
+                  <a:srgbClr val="4A4A4A"/>
+                </a:solidFill>
+                <a:latin typeface="Calibri"/>
+              </a:rPr>
+              <a:t>hanging</a:t>
+            </a:r>
+            <a:r>
+              <a:rPr lang="nl-NL" sz="1500" dirty="0">
+                <a:solidFill>
+                  <a:srgbClr val="4A4A4A"/>
+                </a:solidFill>
+                <a:latin typeface="Calibri"/>
+              </a:rPr>
+              <a:t> fruit’</a:t>
             </a:r>
           </a:p>
         </p:txBody>
@@ -4798,7 +4688,7 @@
     </p:spTree>
     <p:extLst>
       <p:ext uri="{BB962C8B-B14F-4D97-AF65-F5344CB8AC3E}">
-        <p14:creationId xmlns:p14="http://schemas.microsoft.com/office/powerpoint/2010/main" val="1391094614"/>
+        <p14:creationId xmlns:p14="http://schemas.microsoft.com/office/powerpoint/2010/main" val="3656677097"/>
       </p:ext>
     </p:extLst>
   </p:cSld>
@@ -5688,10 +5578,10 @@
       </p:grpSpPr>
       <p:sp>
         <p:nvSpPr>
-          <p:cNvPr id="2" name="Rechthoek 1">
+          <p:cNvPr id="5" name="Afgeronde rechthoek 4">
             <a:extLst>
               <a:ext uri="{FF2B5EF4-FFF2-40B4-BE49-F238E27FC236}">
-                <a16:creationId xmlns:a16="http://schemas.microsoft.com/office/drawing/2014/main" id="{FD1CF982-E1C9-1749-8C03-1D69026E48C5}"/>
+                <a16:creationId xmlns:a16="http://schemas.microsoft.com/office/drawing/2014/main" id="{B3D003A9-413F-054D-A637-D34FE69981DA}"/>
               </a:ext>
             </a:extLst>
           </p:cNvPr>
@@ -5700,14 +5590,14 @@
         </p:nvSpPr>
         <p:spPr>
           <a:xfrm>
-            <a:off x="0" y="0"/>
-            <a:ext cx="9144000" cy="114300"/>
-          </a:xfrm>
-          <a:prstGeom prst="rect">
+            <a:off x="647700" y="990600"/>
+            <a:ext cx="7861300" cy="3784600"/>
+          </a:xfrm>
+          <a:prstGeom prst="roundRect">
             <a:avLst/>
           </a:prstGeom>
           <a:solidFill>
-            <a:srgbClr val="5B8DB8"/>
+            <a:srgbClr val="D6E6F2"/>
           </a:solidFill>
           <a:ln w="12700" cap="flat" cmpd="sng" algn="ctr">
             <a:noFill/>
@@ -5745,6 +5635,1232 @@
           <p:cNvPr id="3" name="Tekstvak 2">
             <a:extLst>
               <a:ext uri="{FF2B5EF4-FFF2-40B4-BE49-F238E27FC236}">
+                <a16:creationId xmlns:a16="http://schemas.microsoft.com/office/drawing/2014/main" id="{ABE0F9DD-E437-6045-AF5C-B5C13AAB19CB}"/>
+              </a:ext>
+            </a:extLst>
+          </p:cNvPr>
+          <p:cNvSpPr txBox="1"/>
+          <p:nvPr/>
+        </p:nvSpPr>
+        <p:spPr>
+          <a:xfrm>
+            <a:off x="635000" y="279400"/>
+            <a:ext cx="7772400" cy="523220"/>
+          </a:xfrm>
+          <a:prstGeom prst="rect">
+            <a:avLst/>
+          </a:prstGeom>
+          <a:noFill/>
+        </p:spPr>
+        <p:txBody>
+          <a:bodyPr vertOverflow="overflow" vert="horz" wrap="square" rtlCol="0" anchor="t">
+            <a:spAutoFit/>
+          </a:bodyPr>
+          <a:lstStyle/>
+          <a:p>
+            <a:pPr algn="l"/>
+            <a:r>
+              <a:rPr lang="nl-BE" sz="2800" b="1" dirty="0">
+                <a:solidFill>
+                  <a:srgbClr val="1A1A1A"/>
+                </a:solidFill>
+                <a:latin typeface="Trebuchet MS"/>
+              </a:rPr>
+              <a:t>Model 2 — vaste scope</a:t>
+            </a:r>
+          </a:p>
+        </p:txBody>
+      </p:sp>
+      <p:sp>
+        <p:nvSpPr>
+          <p:cNvPr id="66" name="T66"/>
+          <p:cNvSpPr/>
+          <p:nvPr/>
+        </p:nvSpPr>
+        <p:spPr>
+          <a:xfrm>
+            <a:off x="8407400" y="4749800"/>
+            <a:ext cx="457200" cy="279400"/>
+          </a:xfrm>
+          <a:prstGeom prst="rect">
+            <a:avLst/>
+          </a:prstGeom>
+          <a:noFill/>
+          <a:ln>
+            <a:noFill/>
+          </a:ln>
+        </p:spPr>
+        <p:txBody>
+          <a:bodyPr wrap="square" lIns="36000" tIns="0" rIns="36000" bIns="0" anchor="ctr"/>
+          <a:lstStyle/>
+          <a:p>
+            <a:pPr algn="r"/>
+            <a:r>
+              <a:rPr lang="nl-NL" sz="1400" dirty="0">
+                <a:solidFill>
+                  <a:srgbClr val="AAAAAA"/>
+                </a:solidFill>
+                <a:latin typeface="Calibri"/>
+              </a:rPr>
+              <a:t>9</a:t>
+            </a:r>
+          </a:p>
+        </p:txBody>
+      </p:sp>
+      <p:sp>
+        <p:nvSpPr>
+          <p:cNvPr id="6" name="Tekstvak 5">
+            <a:extLst>
+              <a:ext uri="{FF2B5EF4-FFF2-40B4-BE49-F238E27FC236}">
+                <a16:creationId xmlns:a16="http://schemas.microsoft.com/office/drawing/2014/main" id="{BE2179B2-9ABF-234A-853D-A95ECC263053}"/>
+              </a:ext>
+            </a:extLst>
+          </p:cNvPr>
+          <p:cNvSpPr txBox="1"/>
+          <p:nvPr/>
+        </p:nvSpPr>
+        <p:spPr>
+          <a:xfrm>
+            <a:off x="889000" y="1181100"/>
+            <a:ext cx="7366000" cy="330200"/>
+          </a:xfrm>
+          <a:prstGeom prst="rect">
+            <a:avLst/>
+          </a:prstGeom>
+          <a:noFill/>
+        </p:spPr>
+        <p:txBody>
+          <a:bodyPr vertOverflow="overflow" vert="horz" wrap="square" rtlCol="0" anchor="t">
+            <a:noAutofit/>
+          </a:bodyPr>
+          <a:lstStyle/>
+          <a:p>
+            <a:pPr algn="l"/>
+            <a:r>
+              <a:rPr lang="nl-BE" sz="1700" b="1">
+                <a:solidFill>
+                  <a:srgbClr val="1A1A1A"/>
+                </a:solidFill>
+                <a:latin typeface="Trebuchet MS"/>
+              </a:rPr>
+              <a:t>🔍  Nood identificeren</a:t>
+            </a:r>
+          </a:p>
+        </p:txBody>
+      </p:sp>
+      <p:sp>
+        <p:nvSpPr>
+          <p:cNvPr id="7" name="Tekstvak 6">
+            <a:extLst>
+              <a:ext uri="{FF2B5EF4-FFF2-40B4-BE49-F238E27FC236}">
+                <a16:creationId xmlns:a16="http://schemas.microsoft.com/office/drawing/2014/main" id="{8730C097-281E-704A-B6A7-6B51CAC5A2CB}"/>
+              </a:ext>
+            </a:extLst>
+          </p:cNvPr>
+          <p:cNvSpPr txBox="1"/>
+          <p:nvPr/>
+        </p:nvSpPr>
+        <p:spPr>
+          <a:xfrm>
+            <a:off x="1333500" y="1524000"/>
+            <a:ext cx="6921500" cy="330200"/>
+          </a:xfrm>
+          <a:prstGeom prst="rect">
+            <a:avLst/>
+          </a:prstGeom>
+          <a:noFill/>
+        </p:spPr>
+        <p:txBody>
+          <a:bodyPr vertOverflow="overflow" vert="horz" wrap="square" rtlCol="0" anchor="t">
+            <a:noAutofit/>
+          </a:bodyPr>
+          <a:lstStyle/>
+          <a:p>
+            <a:pPr algn="l"/>
+            <a:r>
+              <a:rPr lang="nl-BE" sz="1500">
+                <a:solidFill>
+                  <a:srgbClr val="2D2D2D"/>
+                </a:solidFill>
+                <a:latin typeface="Calibri"/>
+                <a:cs typeface="Calibri"/>
+              </a:rPr>
+              <a:t>Een eigen tool zou je rust geven</a:t>
+            </a:r>
+          </a:p>
+        </p:txBody>
+      </p:sp>
+      <p:sp>
+        <p:nvSpPr>
+          <p:cNvPr id="8" name="Tekstvak 7">
+            <a:extLst>
+              <a:ext uri="{FF2B5EF4-FFF2-40B4-BE49-F238E27FC236}">
+                <a16:creationId xmlns:a16="http://schemas.microsoft.com/office/drawing/2014/main" id="{6217AB14-FAC3-084F-B901-E277D7A4566C}"/>
+              </a:ext>
+            </a:extLst>
+          </p:cNvPr>
+          <p:cNvSpPr txBox="1"/>
+          <p:nvPr/>
+        </p:nvSpPr>
+        <p:spPr>
+          <a:xfrm>
+            <a:off x="889000" y="1866900"/>
+            <a:ext cx="7366000" cy="330200"/>
+          </a:xfrm>
+          <a:prstGeom prst="rect">
+            <a:avLst/>
+          </a:prstGeom>
+          <a:noFill/>
+        </p:spPr>
+        <p:txBody>
+          <a:bodyPr vertOverflow="overflow" vert="horz" wrap="square" rtlCol="0" anchor="t">
+            <a:noAutofit/>
+          </a:bodyPr>
+          <a:lstStyle/>
+          <a:p>
+            <a:pPr algn="l"/>
+            <a:r>
+              <a:rPr lang="nl-BE" sz="1700" b="1">
+                <a:solidFill>
+                  <a:srgbClr val="1A1A1A"/>
+                </a:solidFill>
+                <a:latin typeface="Trebuchet MS"/>
+              </a:rPr>
+              <a:t>📋  Scope bepalen</a:t>
+            </a:r>
+          </a:p>
+        </p:txBody>
+      </p:sp>
+      <p:sp>
+        <p:nvSpPr>
+          <p:cNvPr id="9" name="Tekstvak 8">
+            <a:extLst>
+              <a:ext uri="{FF2B5EF4-FFF2-40B4-BE49-F238E27FC236}">
+                <a16:creationId xmlns:a16="http://schemas.microsoft.com/office/drawing/2014/main" id="{22D1F089-4996-0642-A3F7-C42EC4BD1950}"/>
+              </a:ext>
+            </a:extLst>
+          </p:cNvPr>
+          <p:cNvSpPr txBox="1"/>
+          <p:nvPr/>
+        </p:nvSpPr>
+        <p:spPr>
+          <a:xfrm>
+            <a:off x="1333500" y="2209800"/>
+            <a:ext cx="6921500" cy="330200"/>
+          </a:xfrm>
+          <a:prstGeom prst="rect">
+            <a:avLst/>
+          </a:prstGeom>
+          <a:noFill/>
+        </p:spPr>
+        <p:txBody>
+          <a:bodyPr vertOverflow="overflow" vert="horz" wrap="square" rtlCol="0" anchor="t">
+            <a:noAutofit/>
+          </a:bodyPr>
+          <a:lstStyle/>
+          <a:p>
+            <a:pPr algn="l"/>
+            <a:r>
+              <a:rPr lang="nl-BE" sz="1500">
+                <a:solidFill>
+                  <a:srgbClr val="2D2D2D"/>
+                </a:solidFill>
+                <a:latin typeface="Calibri"/>
+                <a:cs typeface="Calibri"/>
+              </a:rPr>
+              <a:t>Samen de vereisten op hoog niveau vastleggen</a:t>
+            </a:r>
+          </a:p>
+        </p:txBody>
+      </p:sp>
+      <p:sp>
+        <p:nvSpPr>
+          <p:cNvPr id="10" name="Tekstvak 9">
+            <a:extLst>
+              <a:ext uri="{FF2B5EF4-FFF2-40B4-BE49-F238E27FC236}">
+                <a16:creationId xmlns:a16="http://schemas.microsoft.com/office/drawing/2014/main" id="{9C9C7B59-5289-B840-86EB-10BAF1635490}"/>
+              </a:ext>
+            </a:extLst>
+          </p:cNvPr>
+          <p:cNvSpPr txBox="1"/>
+          <p:nvPr/>
+        </p:nvSpPr>
+        <p:spPr>
+          <a:xfrm>
+            <a:off x="889000" y="2552700"/>
+            <a:ext cx="7366000" cy="330200"/>
+          </a:xfrm>
+          <a:prstGeom prst="rect">
+            <a:avLst/>
+          </a:prstGeom>
+          <a:noFill/>
+        </p:spPr>
+        <p:txBody>
+          <a:bodyPr vertOverflow="overflow" vert="horz" wrap="square" rtlCol="0" anchor="t">
+            <a:noAutofit/>
+          </a:bodyPr>
+          <a:lstStyle/>
+          <a:p>
+            <a:pPr algn="l"/>
+            <a:r>
+              <a:rPr lang="nl-BE" sz="1700" b="1">
+                <a:solidFill>
+                  <a:srgbClr val="1A1A1A"/>
+                </a:solidFill>
+                <a:latin typeface="Trebuchet MS"/>
+              </a:rPr>
+              <a:t>💰  Waardering</a:t>
+            </a:r>
+          </a:p>
+        </p:txBody>
+      </p:sp>
+      <p:sp>
+        <p:nvSpPr>
+          <p:cNvPr id="11" name="Tekstvak 10">
+            <a:extLst>
+              <a:ext uri="{FF2B5EF4-FFF2-40B4-BE49-F238E27FC236}">
+                <a16:creationId xmlns:a16="http://schemas.microsoft.com/office/drawing/2014/main" id="{EF129C18-16EE-0A42-BD00-9C9AE6B78788}"/>
+              </a:ext>
+            </a:extLst>
+          </p:cNvPr>
+          <p:cNvSpPr txBox="1"/>
+          <p:nvPr/>
+        </p:nvSpPr>
+        <p:spPr>
+          <a:xfrm>
+            <a:off x="1333500" y="2895600"/>
+            <a:ext cx="6921500" cy="330200"/>
+          </a:xfrm>
+          <a:prstGeom prst="rect">
+            <a:avLst/>
+          </a:prstGeom>
+          <a:noFill/>
+        </p:spPr>
+        <p:txBody>
+          <a:bodyPr vertOverflow="overflow" vert="horz" wrap="square" rtlCol="0" anchor="t">
+            <a:noAutofit/>
+          </a:bodyPr>
+          <a:lstStyle/>
+          <a:p>
+            <a:pPr algn="l"/>
+            <a:r>
+              <a:rPr lang="nl-BE" sz="1500">
+                <a:solidFill>
+                  <a:srgbClr val="2D2D2D"/>
+                </a:solidFill>
+                <a:latin typeface="Calibri"/>
+                <a:cs typeface="Calibri"/>
+              </a:rPr>
+              <a:t>Inschatting effort op basis van de scope</a:t>
+            </a:r>
+          </a:p>
+        </p:txBody>
+      </p:sp>
+      <p:sp>
+        <p:nvSpPr>
+          <p:cNvPr id="12" name="Tekstvak 11">
+            <a:extLst>
+              <a:ext uri="{FF2B5EF4-FFF2-40B4-BE49-F238E27FC236}">
+                <a16:creationId xmlns:a16="http://schemas.microsoft.com/office/drawing/2014/main" id="{7DEAB509-6BEB-D044-AEAD-A0824F17E9B2}"/>
+              </a:ext>
+            </a:extLst>
+          </p:cNvPr>
+          <p:cNvSpPr txBox="1"/>
+          <p:nvPr/>
+        </p:nvSpPr>
+        <p:spPr>
+          <a:xfrm>
+            <a:off x="889000" y="3238500"/>
+            <a:ext cx="7366000" cy="330200"/>
+          </a:xfrm>
+          <a:prstGeom prst="rect">
+            <a:avLst/>
+          </a:prstGeom>
+          <a:noFill/>
+        </p:spPr>
+        <p:txBody>
+          <a:bodyPr vertOverflow="overflow" vert="horz" wrap="square" rtlCol="0" anchor="t">
+            <a:noAutofit/>
+          </a:bodyPr>
+          <a:lstStyle/>
+          <a:p>
+            <a:pPr algn="l"/>
+            <a:r>
+              <a:rPr lang="nl-BE" sz="1700" b="1">
+                <a:solidFill>
+                  <a:srgbClr val="1A1A1A"/>
+                </a:solidFill>
+                <a:latin typeface="Trebuchet MS"/>
+              </a:rPr>
+              <a:t>🛠️  Wim bouwt</a:t>
+            </a:r>
+          </a:p>
+        </p:txBody>
+      </p:sp>
+      <p:sp>
+        <p:nvSpPr>
+          <p:cNvPr id="13" name="Tekstvak 12">
+            <a:extLst>
+              <a:ext uri="{FF2B5EF4-FFF2-40B4-BE49-F238E27FC236}">
+                <a16:creationId xmlns:a16="http://schemas.microsoft.com/office/drawing/2014/main" id="{A7A3357C-CACD-EC47-9774-CABAC1F871BD}"/>
+              </a:ext>
+            </a:extLst>
+          </p:cNvPr>
+          <p:cNvSpPr txBox="1"/>
+          <p:nvPr/>
+        </p:nvSpPr>
+        <p:spPr>
+          <a:xfrm>
+            <a:off x="1333500" y="3581400"/>
+            <a:ext cx="6921500" cy="330200"/>
+          </a:xfrm>
+          <a:prstGeom prst="rect">
+            <a:avLst/>
+          </a:prstGeom>
+          <a:noFill/>
+        </p:spPr>
+        <p:txBody>
+          <a:bodyPr vertOverflow="overflow" vert="horz" wrap="square" rtlCol="0" anchor="t">
+            <a:noAutofit/>
+          </a:bodyPr>
+          <a:lstStyle/>
+          <a:p>
+            <a:pPr algn="l"/>
+            <a:r>
+              <a:rPr lang="nl-BE" sz="1500">
+                <a:solidFill>
+                  <a:srgbClr val="2D2D2D"/>
+                </a:solidFill>
+                <a:latin typeface="Calibri"/>
+                <a:cs typeface="Calibri"/>
+              </a:rPr>
+              <a:t>De basis wordt ontwikkeld</a:t>
+            </a:r>
+          </a:p>
+        </p:txBody>
+      </p:sp>
+      <p:sp>
+        <p:nvSpPr>
+          <p:cNvPr id="14" name="Tekstvak 13">
+            <a:extLst>
+              <a:ext uri="{FF2B5EF4-FFF2-40B4-BE49-F238E27FC236}">
+                <a16:creationId xmlns:a16="http://schemas.microsoft.com/office/drawing/2014/main" id="{0C6E8AC8-A6E1-6D4C-80F5-0790768DB975}"/>
+              </a:ext>
+            </a:extLst>
+          </p:cNvPr>
+          <p:cNvSpPr txBox="1"/>
+          <p:nvPr/>
+        </p:nvSpPr>
+        <p:spPr>
+          <a:xfrm>
+            <a:off x="889000" y="3924300"/>
+            <a:ext cx="7366000" cy="330200"/>
+          </a:xfrm>
+          <a:prstGeom prst="rect">
+            <a:avLst/>
+          </a:prstGeom>
+          <a:noFill/>
+        </p:spPr>
+        <p:txBody>
+          <a:bodyPr vertOverflow="overflow" vert="horz" wrap="square" rtlCol="0" anchor="t">
+            <a:noAutofit/>
+          </a:bodyPr>
+          <a:lstStyle/>
+          <a:p>
+            <a:pPr algn="l"/>
+            <a:r>
+              <a:rPr lang="nl-BE" sz="1700" b="1">
+                <a:solidFill>
+                  <a:srgbClr val="1A1A1A"/>
+                </a:solidFill>
+                <a:latin typeface="Trebuchet MS"/>
+              </a:rPr>
+              <a:t>🤝  Overdracht</a:t>
+            </a:r>
+          </a:p>
+        </p:txBody>
+      </p:sp>
+      <p:sp>
+        <p:nvSpPr>
+          <p:cNvPr id="15" name="Tekstvak 14">
+            <a:extLst>
+              <a:ext uri="{FF2B5EF4-FFF2-40B4-BE49-F238E27FC236}">
+                <a16:creationId xmlns:a16="http://schemas.microsoft.com/office/drawing/2014/main" id="{93A411F5-5FE9-A242-B617-AB0595E224CC}"/>
+              </a:ext>
+            </a:extLst>
+          </p:cNvPr>
+          <p:cNvSpPr txBox="1"/>
+          <p:nvPr/>
+        </p:nvSpPr>
+        <p:spPr>
+          <a:xfrm>
+            <a:off x="1333500" y="4267200"/>
+            <a:ext cx="6921500" cy="330200"/>
+          </a:xfrm>
+          <a:prstGeom prst="rect">
+            <a:avLst/>
+          </a:prstGeom>
+          <a:noFill/>
+        </p:spPr>
+        <p:txBody>
+          <a:bodyPr vertOverflow="overflow" vert="horz" wrap="square" rtlCol="0" anchor="t">
+            <a:noAutofit/>
+          </a:bodyPr>
+          <a:lstStyle/>
+          <a:p>
+            <a:pPr algn="l"/>
+            <a:r>
+              <a:rPr lang="nl-BE" sz="1500">
+                <a:solidFill>
+                  <a:srgbClr val="2D2D2D"/>
+                </a:solidFill>
+                <a:latin typeface="Calibri"/>
+                <a:cs typeface="Calibri"/>
+              </a:rPr>
+              <a:t>Wim toont hoe jij zelfstandig verder kan</a:t>
+            </a:r>
+          </a:p>
+        </p:txBody>
+      </p:sp>
+      <p:sp>
+        <p:nvSpPr>
+          <p:cNvPr id="2" name="Rechthoek 1">
+            <a:extLst>
+              <a:ext uri="{FF2B5EF4-FFF2-40B4-BE49-F238E27FC236}">
+                <a16:creationId xmlns:a16="http://schemas.microsoft.com/office/drawing/2014/main" id="{B409C32C-D985-984E-BA04-0EA5A9B0262A}"/>
+              </a:ext>
+            </a:extLst>
+          </p:cNvPr>
+          <p:cNvSpPr/>
+          <p:nvPr/>
+        </p:nvSpPr>
+        <p:spPr>
+          <a:xfrm>
+            <a:off x="0" y="0"/>
+            <a:ext cx="9144000" cy="114300"/>
+          </a:xfrm>
+          <a:prstGeom prst="rect">
+            <a:avLst/>
+          </a:prstGeom>
+          <a:solidFill>
+            <a:srgbClr val="5B8DB8"/>
+          </a:solidFill>
+          <a:ln w="12700" cap="flat" cmpd="sng" algn="ctr">
+            <a:noFill/>
+            <a:prstDash val="solid"/>
+            <a:miter lim="800000"/>
+          </a:ln>
+        </p:spPr>
+        <p:style>
+          <a:lnRef idx="2">
+            <a:schemeClr val="accent1">
+              <a:shade val="15000"/>
+            </a:schemeClr>
+          </a:lnRef>
+          <a:fillRef idx="1">
+            <a:schemeClr val="accent1"/>
+          </a:fillRef>
+          <a:effectRef idx="0">
+            <a:schemeClr val="accent1"/>
+          </a:effectRef>
+          <a:fontRef idx="minor">
+            <a:schemeClr val="lt1"/>
+          </a:fontRef>
+        </p:style>
+        <p:txBody>
+          <a:bodyPr vertOverflow="clip" horzOverflow="clip" rtlCol="0" anchor="t"/>
+          <a:lstStyle/>
+          <a:p>
+            <a:pPr algn="l"/>
+            <a:endParaRPr lang="nl-BE"/>
+          </a:p>
+        </p:txBody>
+      </p:sp>
+    </p:spTree>
+    <p:extLst>
+      <p:ext uri="{BB962C8B-B14F-4D97-AF65-F5344CB8AC3E}">
+        <p14:creationId xmlns:p14="http://schemas.microsoft.com/office/powerpoint/2010/main" val="2849495398"/>
+      </p:ext>
+    </p:extLst>
+  </p:cSld>
+  <p:clrMapOvr>
+    <a:masterClrMapping/>
+  </p:clrMapOvr>
+</p:sld>
+</file>
+
+<file path=ppt/slides/slide21.xml><?xml version="1.0" encoding="utf-8"?>
+<p:sld xmlns:a="http://schemas.openxmlformats.org/drawingml/2006/main" xmlns:r="http://schemas.openxmlformats.org/officeDocument/2006/relationships" xmlns:p="http://schemas.openxmlformats.org/presentationml/2006/main">
+  <p:cSld>
+    <p:bg>
+      <p:bgPr>
+        <a:solidFill>
+          <a:srgbClr val="FFFFFF">
+            <a:alpha val="100000"/>
+          </a:srgbClr>
+        </a:solidFill>
+        <a:effectLst/>
+      </p:bgPr>
+    </p:bg>
+    <p:spTree>
+      <p:nvGrpSpPr>
+        <p:cNvPr id="1" name=""/>
+        <p:cNvGrpSpPr/>
+        <p:nvPr/>
+      </p:nvGrpSpPr>
+      <p:grpSpPr>
+        <a:xfrm>
+          <a:off x="0" y="0"/>
+          <a:ext cx="0" cy="0"/>
+          <a:chOff x="0" y="0"/>
+          <a:chExt cx="0" cy="0"/>
+        </a:xfrm>
+      </p:grpSpPr>
+      <p:sp>
+        <p:nvSpPr>
+          <p:cNvPr id="2" name="Rechthoek 1">
+            <a:extLst>
+              <a:ext uri="{FF2B5EF4-FFF2-40B4-BE49-F238E27FC236}">
+                <a16:creationId xmlns:a16="http://schemas.microsoft.com/office/drawing/2014/main" id="{CB9C96D5-207F-5C4E-8F97-A7C0CAB76C40}"/>
+              </a:ext>
+            </a:extLst>
+          </p:cNvPr>
+          <p:cNvSpPr/>
+          <p:nvPr/>
+        </p:nvSpPr>
+        <p:spPr>
+          <a:xfrm>
+            <a:off x="0" y="0"/>
+            <a:ext cx="9144000" cy="114300"/>
+          </a:xfrm>
+          <a:prstGeom prst="rect">
+            <a:avLst/>
+          </a:prstGeom>
+          <a:solidFill>
+            <a:srgbClr val="5B8DB8"/>
+          </a:solidFill>
+          <a:ln w="12700" cap="flat" cmpd="sng" algn="ctr">
+            <a:noFill/>
+            <a:prstDash val="solid"/>
+            <a:miter lim="800000"/>
+          </a:ln>
+        </p:spPr>
+        <p:style>
+          <a:lnRef idx="2">
+            <a:schemeClr val="accent1">
+              <a:shade val="15000"/>
+            </a:schemeClr>
+          </a:lnRef>
+          <a:fillRef idx="1">
+            <a:schemeClr val="accent1"/>
+          </a:fillRef>
+          <a:effectRef idx="0">
+            <a:schemeClr val="accent1"/>
+          </a:effectRef>
+          <a:fontRef idx="minor">
+            <a:schemeClr val="lt1"/>
+          </a:fontRef>
+        </p:style>
+        <p:txBody>
+          <a:bodyPr vertOverflow="clip" horzOverflow="clip" rtlCol="0" anchor="t"/>
+          <a:lstStyle/>
+          <a:p>
+            <a:pPr algn="l"/>
+            <a:endParaRPr lang="nl-BE"/>
+          </a:p>
+        </p:txBody>
+      </p:sp>
+      <p:sp>
+        <p:nvSpPr>
+          <p:cNvPr id="3" name="Tekstvak 2">
+            <a:extLst>
+              <a:ext uri="{FF2B5EF4-FFF2-40B4-BE49-F238E27FC236}">
+                <a16:creationId xmlns:a16="http://schemas.microsoft.com/office/drawing/2014/main" id="{67A5D087-9873-194B-99C6-8465DEF15B8F}"/>
+              </a:ext>
+            </a:extLst>
+          </p:cNvPr>
+          <p:cNvSpPr txBox="1"/>
+          <p:nvPr/>
+        </p:nvSpPr>
+        <p:spPr>
+          <a:xfrm>
+            <a:off x="635000" y="279400"/>
+            <a:ext cx="7772400" cy="523220"/>
+          </a:xfrm>
+          <a:prstGeom prst="rect">
+            <a:avLst/>
+          </a:prstGeom>
+          <a:noFill/>
+        </p:spPr>
+        <p:txBody>
+          <a:bodyPr vertOverflow="overflow" vert="horz" wrap="square" rtlCol="0" anchor="t">
+            <a:spAutoFit/>
+          </a:bodyPr>
+          <a:lstStyle/>
+          <a:p>
+            <a:pPr algn="l"/>
+            <a:r>
+              <a:rPr lang="nl-BE" sz="2800" b="1" dirty="0">
+                <a:solidFill>
+                  <a:srgbClr val="1A1A1A"/>
+                </a:solidFill>
+                <a:latin typeface="Trebuchet MS"/>
+              </a:rPr>
+              <a:t>Waar ondersteunt Wim ?</a:t>
+            </a:r>
+          </a:p>
+        </p:txBody>
+      </p:sp>
+      <p:sp>
+        <p:nvSpPr>
+          <p:cNvPr id="50" name="R50"/>
+          <p:cNvSpPr/>
+          <p:nvPr/>
+        </p:nvSpPr>
+        <p:spPr>
+          <a:xfrm>
+            <a:off x="669290" y="1299210"/>
+            <a:ext cx="3746500" cy="2449830"/>
+          </a:xfrm>
+          <a:prstGeom prst="roundRect">
+            <a:avLst>
+              <a:gd name="adj" fmla="val 6000"/>
+            </a:avLst>
+          </a:prstGeom>
+          <a:solidFill>
+            <a:srgbClr val="D6E6F2"/>
+          </a:solidFill>
+          <a:ln>
+            <a:noFill/>
+          </a:ln>
+        </p:spPr>
+        <p:txBody>
+          <a:bodyPr/>
+          <a:lstStyle/>
+          <a:p>
+            <a:endParaRPr lang="nl-NL"/>
+          </a:p>
+        </p:txBody>
+      </p:sp>
+      <p:sp>
+        <p:nvSpPr>
+          <p:cNvPr id="51" name="T51"/>
+          <p:cNvSpPr/>
+          <p:nvPr/>
+        </p:nvSpPr>
+        <p:spPr>
+          <a:xfrm>
+            <a:off x="732790" y="1350010"/>
+            <a:ext cx="3619500" cy="3238500"/>
+          </a:xfrm>
+          <a:prstGeom prst="rect">
+            <a:avLst/>
+          </a:prstGeom>
+          <a:noFill/>
+          <a:ln>
+            <a:noFill/>
+          </a:ln>
+        </p:spPr>
+        <p:txBody>
+          <a:bodyPr wrap="square" lIns="54000" tIns="36000" rIns="54000" bIns="36000" anchor="t"/>
+          <a:lstStyle/>
+          <a:p>
+            <a:pPr algn="l"/>
+            <a:r>
+              <a:rPr lang="nl-NL" sz="1800" b="1" dirty="0">
+                <a:solidFill>
+                  <a:srgbClr val="2C5F7C"/>
+                </a:solidFill>
+                <a:latin typeface="Trebuchet MS"/>
+              </a:rPr>
+              <a:t>✅  Wat wel</a:t>
+            </a:r>
+          </a:p>
+          <a:p>
+            <a:pPr algn="l"/>
+            <a:endParaRPr lang="nl-NL" sz="1800" b="1" dirty="0">
+              <a:solidFill>
+                <a:srgbClr val="2C5F7C"/>
+              </a:solidFill>
+              <a:latin typeface="Trebuchet MS"/>
+            </a:endParaRPr>
+          </a:p>
+          <a:p>
+            <a:pPr algn="l"/>
+            <a:r>
+              <a:rPr lang="nl-NL" sz="1500" dirty="0">
+                <a:solidFill>
+                  <a:srgbClr val="1A1A1A"/>
+                </a:solidFill>
+                <a:latin typeface="Calibri"/>
+              </a:rPr>
+              <a:t>Automatisaties &amp; optimalisaties</a:t>
+            </a:r>
+          </a:p>
+          <a:p>
+            <a:pPr algn="l"/>
+            <a:r>
+              <a:rPr lang="nl-NL" sz="1500" dirty="0">
+                <a:solidFill>
+                  <a:srgbClr val="1A1A1A"/>
+                </a:solidFill>
+                <a:latin typeface="Calibri"/>
+              </a:rPr>
+              <a:t>Interne tools bouwen</a:t>
+            </a:r>
+          </a:p>
+          <a:p>
+            <a:pPr algn="l"/>
+            <a:r>
+              <a:rPr lang="nl-NL" sz="1500" dirty="0">
+                <a:solidFill>
+                  <a:srgbClr val="1A1A1A"/>
+                </a:solidFill>
+                <a:latin typeface="Calibri"/>
+              </a:rPr>
+              <a:t>Lokale oplossingen (op eigen systeem)</a:t>
+            </a:r>
+          </a:p>
+          <a:p>
+            <a:pPr algn="l"/>
+            <a:r>
+              <a:rPr lang="nl-NL" sz="1500" dirty="0">
+                <a:solidFill>
+                  <a:srgbClr val="1A1A1A"/>
+                </a:solidFill>
+                <a:latin typeface="Calibri"/>
+              </a:rPr>
+              <a:t>AI integreren in bestaande </a:t>
+            </a:r>
+            <a:r>
+              <a:rPr lang="nl-NL" sz="1500" dirty="0" err="1">
+                <a:solidFill>
+                  <a:srgbClr val="1A1A1A"/>
+                </a:solidFill>
+                <a:latin typeface="Calibri"/>
+              </a:rPr>
+              <a:t>workflows</a:t>
+            </a:r>
+            <a:endParaRPr lang="nl-NL" sz="1500" dirty="0">
+              <a:solidFill>
+                <a:srgbClr val="1A1A1A"/>
+              </a:solidFill>
+              <a:latin typeface="Calibri"/>
+            </a:endParaRPr>
+          </a:p>
+          <a:p>
+            <a:pPr algn="l"/>
+            <a:endParaRPr lang="nl-NL" sz="1500" dirty="0">
+              <a:solidFill>
+                <a:srgbClr val="1A1A1A"/>
+              </a:solidFill>
+              <a:latin typeface="Calibri"/>
+            </a:endParaRPr>
+          </a:p>
+          <a:p>
+            <a:pPr algn="l"/>
+            <a:r>
+              <a:rPr lang="nl-NL" sz="1500" dirty="0">
+                <a:solidFill>
+                  <a:srgbClr val="1A1A1A"/>
+                </a:solidFill>
+                <a:latin typeface="Calibri"/>
+              </a:rPr>
+              <a:t>Coaching naar zelfstandig gebruik</a:t>
+            </a:r>
+          </a:p>
+        </p:txBody>
+      </p:sp>
+      <p:sp>
+        <p:nvSpPr>
+          <p:cNvPr id="52" name="R52"/>
+          <p:cNvSpPr/>
+          <p:nvPr/>
+        </p:nvSpPr>
+        <p:spPr>
+          <a:xfrm>
+            <a:off x="4796790" y="1299210"/>
+            <a:ext cx="3746500" cy="3365500"/>
+          </a:xfrm>
+          <a:prstGeom prst="roundRect">
+            <a:avLst>
+              <a:gd name="adj" fmla="val 6000"/>
+            </a:avLst>
+          </a:prstGeom>
+          <a:solidFill>
+            <a:srgbClr val="FFFFFF"/>
+          </a:solidFill>
+          <a:ln>
+            <a:noFill/>
+          </a:ln>
+        </p:spPr>
+        <p:txBody>
+          <a:bodyPr/>
+          <a:lstStyle/>
+          <a:p>
+            <a:endParaRPr lang="nl-NL"/>
+          </a:p>
+        </p:txBody>
+      </p:sp>
+      <p:sp>
+        <p:nvSpPr>
+          <p:cNvPr id="54" name="T54"/>
+          <p:cNvSpPr/>
+          <p:nvPr/>
+        </p:nvSpPr>
+        <p:spPr>
+          <a:xfrm>
+            <a:off x="8407400" y="4864100"/>
+            <a:ext cx="457200" cy="279400"/>
+          </a:xfrm>
+          <a:prstGeom prst="rect">
+            <a:avLst/>
+          </a:prstGeom>
+          <a:noFill/>
+          <a:ln>
+            <a:noFill/>
+          </a:ln>
+        </p:spPr>
+        <p:txBody>
+          <a:bodyPr wrap="square" lIns="54000" tIns="36000" rIns="54000" bIns="36000" anchor="t"/>
+          <a:lstStyle/>
+          <a:p>
+            <a:pPr algn="r"/>
+            <a:r>
+              <a:rPr lang="nl-NL" sz="1400" dirty="0">
+                <a:solidFill>
+                  <a:srgbClr val="AAAAAA"/>
+                </a:solidFill>
+                <a:latin typeface="Calibri"/>
+              </a:rPr>
+              <a:t>10</a:t>
+            </a:r>
+          </a:p>
+        </p:txBody>
+      </p:sp>
+      <p:sp>
+        <p:nvSpPr>
+          <p:cNvPr id="4" name="R50">
+            <a:extLst>
+              <a:ext uri="{FF2B5EF4-FFF2-40B4-BE49-F238E27FC236}">
+                <a16:creationId xmlns:a16="http://schemas.microsoft.com/office/drawing/2014/main" id="{D5A1F439-5588-B9FC-8C66-9A14CD65B6F9}"/>
+              </a:ext>
+            </a:extLst>
+          </p:cNvPr>
+          <p:cNvSpPr/>
+          <p:nvPr/>
+        </p:nvSpPr>
+        <p:spPr>
+          <a:xfrm>
+            <a:off x="4776470" y="1303020"/>
+            <a:ext cx="3746500" cy="2449830"/>
+          </a:xfrm>
+          <a:prstGeom prst="roundRect">
+            <a:avLst>
+              <a:gd name="adj" fmla="val 6000"/>
+            </a:avLst>
+          </a:prstGeom>
+          <a:solidFill>
+            <a:schemeClr val="accent2">
+              <a:lumMod val="20000"/>
+              <a:lumOff val="80000"/>
+            </a:schemeClr>
+          </a:solidFill>
+          <a:ln>
+            <a:noFill/>
+          </a:ln>
+        </p:spPr>
+        <p:txBody>
+          <a:bodyPr/>
+          <a:lstStyle/>
+          <a:p>
+            <a:r>
+              <a:rPr lang="nl-NL" sz="2000" b="1" dirty="0">
+                <a:solidFill>
+                  <a:srgbClr val="4A4A4A"/>
+                </a:solidFill>
+                <a:latin typeface="Trebuchet MS"/>
+              </a:rPr>
+              <a:t>❌  </a:t>
+            </a:r>
+            <a:r>
+              <a:rPr lang="nl-NL" b="1" dirty="0">
+                <a:latin typeface="Trebuchet MS"/>
+              </a:rPr>
+              <a:t>Wat niet</a:t>
+            </a:r>
+          </a:p>
+          <a:p>
+            <a:endParaRPr lang="nl-NL" sz="2000" b="1" dirty="0">
+              <a:solidFill>
+                <a:srgbClr val="4A4A4A"/>
+              </a:solidFill>
+              <a:latin typeface="Trebuchet MS"/>
+            </a:endParaRPr>
+          </a:p>
+          <a:p>
+            <a:r>
+              <a:rPr lang="nl-NL" sz="1500" dirty="0">
+                <a:solidFill>
+                  <a:srgbClr val="1A1A1A"/>
+                </a:solidFill>
+                <a:latin typeface="Calibri"/>
+              </a:rPr>
+              <a:t>Website &amp; content</a:t>
+            </a:r>
+          </a:p>
+          <a:p>
+            <a:r>
+              <a:rPr lang="nl-NL" sz="1500" dirty="0">
+                <a:solidFill>
+                  <a:srgbClr val="1A1A1A"/>
+                </a:solidFill>
+                <a:latin typeface="Calibri"/>
+              </a:rPr>
+              <a:t>Digital Marketing (SEO / GEO / SEA / …)</a:t>
+            </a:r>
+          </a:p>
+          <a:p>
+            <a:r>
+              <a:rPr lang="nl-NL" sz="1500" dirty="0" err="1">
+                <a:solidFill>
+                  <a:srgbClr val="1A1A1A"/>
+                </a:solidFill>
+                <a:latin typeface="Calibri"/>
+              </a:rPr>
+              <a:t>Social</a:t>
+            </a:r>
+            <a:r>
+              <a:rPr lang="nl-NL" sz="1500" dirty="0">
+                <a:solidFill>
+                  <a:srgbClr val="1A1A1A"/>
+                </a:solidFill>
+                <a:latin typeface="Calibri"/>
+              </a:rPr>
+              <a:t> media management</a:t>
+            </a:r>
+          </a:p>
+          <a:p>
+            <a:r>
+              <a:rPr lang="nl-NL" sz="1500" dirty="0">
+                <a:solidFill>
+                  <a:srgbClr val="1A1A1A"/>
+                </a:solidFill>
+                <a:latin typeface="Calibri"/>
+              </a:rPr>
+              <a:t>Geen IT </a:t>
+            </a:r>
+            <a:r>
+              <a:rPr lang="nl-NL" sz="1500" dirty="0">
+                <a:solidFill>
+                  <a:srgbClr val="1A1A1A"/>
+                </a:solidFill>
+              </a:rPr>
+              <a:t>Service (Internet, Office,…)</a:t>
+            </a:r>
+          </a:p>
+        </p:txBody>
+      </p:sp>
+      <p:sp>
+        <p:nvSpPr>
+          <p:cNvPr id="5" name="R50">
+            <a:extLst>
+              <a:ext uri="{FF2B5EF4-FFF2-40B4-BE49-F238E27FC236}">
+                <a16:creationId xmlns:a16="http://schemas.microsoft.com/office/drawing/2014/main" id="{CD55D6E7-F126-7A64-61C3-054A78DA5C36}"/>
+              </a:ext>
+            </a:extLst>
+          </p:cNvPr>
+          <p:cNvSpPr/>
+          <p:nvPr/>
+        </p:nvSpPr>
+        <p:spPr>
+          <a:xfrm>
+            <a:off x="680720" y="4079240"/>
+            <a:ext cx="7874000" cy="732790"/>
+          </a:xfrm>
+          <a:prstGeom prst="roundRect">
+            <a:avLst>
+              <a:gd name="adj" fmla="val 6000"/>
+            </a:avLst>
+          </a:prstGeom>
+          <a:solidFill>
+            <a:schemeClr val="accent6">
+              <a:lumMod val="20000"/>
+              <a:lumOff val="80000"/>
+            </a:schemeClr>
+          </a:solidFill>
+          <a:ln>
+            <a:noFill/>
+          </a:ln>
+        </p:spPr>
+        <p:txBody>
+          <a:bodyPr/>
+          <a:lstStyle/>
+          <a:p>
+            <a:endParaRPr lang="nl-NL" dirty="0"/>
+          </a:p>
+        </p:txBody>
+      </p:sp>
+      <p:sp>
+        <p:nvSpPr>
+          <p:cNvPr id="6" name="T51">
+            <a:extLst>
+              <a:ext uri="{FF2B5EF4-FFF2-40B4-BE49-F238E27FC236}">
+                <a16:creationId xmlns:a16="http://schemas.microsoft.com/office/drawing/2014/main" id="{6B089BA4-3FF7-B386-A9F1-1AA42D85E552}"/>
+              </a:ext>
+            </a:extLst>
+          </p:cNvPr>
+          <p:cNvSpPr/>
+          <p:nvPr/>
+        </p:nvSpPr>
+        <p:spPr>
+          <a:xfrm>
+            <a:off x="807720" y="4142740"/>
+            <a:ext cx="7620000" cy="889000"/>
+          </a:xfrm>
+          <a:prstGeom prst="rect">
+            <a:avLst/>
+          </a:prstGeom>
+          <a:noFill/>
+          <a:ln>
+            <a:noFill/>
+          </a:ln>
+        </p:spPr>
+        <p:txBody>
+          <a:bodyPr wrap="square" lIns="54000" tIns="36000" rIns="54000" bIns="36000" anchor="t"/>
+          <a:lstStyle/>
+          <a:p>
+            <a:r>
+              <a:rPr lang="en-US" dirty="0">
+                <a:solidFill>
+                  <a:srgbClr val="000000"/>
+                </a:solidFill>
+              </a:rPr>
+              <a:t>🤝</a:t>
+            </a:r>
+            <a:r>
+              <a:rPr lang="nl-NL" sz="1700" b="1" dirty="0">
+                <a:solidFill>
+                  <a:srgbClr val="1A1A1A"/>
+                </a:solidFill>
+                <a:latin typeface="Trebuchet MS"/>
+              </a:rPr>
+              <a:t>  Samen akkoord</a:t>
+            </a:r>
+          </a:p>
+          <a:p>
+            <a:pPr algn="l"/>
+            <a:r>
+              <a:rPr lang="nl-NL" sz="1400" dirty="0">
+                <a:solidFill>
+                  <a:srgbClr val="4A4A4A"/>
+                </a:solidFill>
+                <a:latin typeface="Calibri"/>
+              </a:rPr>
+              <a:t>Klant is koning &lt;&gt; Wim bepaalt mee de scope, in functie van risicomitigatie.</a:t>
+            </a:r>
+          </a:p>
+        </p:txBody>
+      </p:sp>
+    </p:spTree>
+    <p:extLst>
+      <p:ext uri="{BB962C8B-B14F-4D97-AF65-F5344CB8AC3E}">
+        <p14:creationId xmlns:p14="http://schemas.microsoft.com/office/powerpoint/2010/main" val="1391094614"/>
+      </p:ext>
+    </p:extLst>
+  </p:cSld>
+  <p:clrMapOvr>
+    <a:masterClrMapping/>
+  </p:clrMapOvr>
+</p:sld>
+</file>
+
+<file path=ppt/slides/slide22.xml><?xml version="1.0" encoding="utf-8"?>
+<p:sld xmlns:a="http://schemas.openxmlformats.org/drawingml/2006/main" xmlns:r="http://schemas.openxmlformats.org/officeDocument/2006/relationships" xmlns:p="http://schemas.openxmlformats.org/presentationml/2006/main">
+  <p:cSld>
+    <p:bg>
+      <p:bgPr>
+        <a:solidFill>
+          <a:srgbClr val="FFFFFF">
+            <a:alpha val="100000"/>
+          </a:srgbClr>
+        </a:solidFill>
+        <a:effectLst/>
+      </p:bgPr>
+    </p:bg>
+    <p:spTree>
+      <p:nvGrpSpPr>
+        <p:cNvPr id="1" name=""/>
+        <p:cNvGrpSpPr/>
+        <p:nvPr/>
+      </p:nvGrpSpPr>
+      <p:grpSpPr>
+        <a:xfrm>
+          <a:off x="0" y="0"/>
+          <a:ext cx="0" cy="0"/>
+          <a:chOff x="0" y="0"/>
+          <a:chExt cx="0" cy="0"/>
+        </a:xfrm>
+      </p:grpSpPr>
+      <p:sp>
+        <p:nvSpPr>
+          <p:cNvPr id="2" name="Rechthoek 1">
+            <a:extLst>
+              <a:ext uri="{FF2B5EF4-FFF2-40B4-BE49-F238E27FC236}">
+                <a16:creationId xmlns:a16="http://schemas.microsoft.com/office/drawing/2014/main" id="{FD1CF982-E1C9-1749-8C03-1D69026E48C5}"/>
+              </a:ext>
+            </a:extLst>
+          </p:cNvPr>
+          <p:cNvSpPr/>
+          <p:nvPr/>
+        </p:nvSpPr>
+        <p:spPr>
+          <a:xfrm>
+            <a:off x="0" y="0"/>
+            <a:ext cx="9144000" cy="114300"/>
+          </a:xfrm>
+          <a:prstGeom prst="rect">
+            <a:avLst/>
+          </a:prstGeom>
+          <a:solidFill>
+            <a:srgbClr val="5B8DB8"/>
+          </a:solidFill>
+          <a:ln w="12700" cap="flat" cmpd="sng" algn="ctr">
+            <a:noFill/>
+            <a:prstDash val="solid"/>
+            <a:miter lim="800000"/>
+          </a:ln>
+        </p:spPr>
+        <p:style>
+          <a:lnRef idx="2">
+            <a:schemeClr val="accent1">
+              <a:shade val="15000"/>
+            </a:schemeClr>
+          </a:lnRef>
+          <a:fillRef idx="1">
+            <a:schemeClr val="accent1"/>
+          </a:fillRef>
+          <a:effectRef idx="0">
+            <a:schemeClr val="accent1"/>
+          </a:effectRef>
+          <a:fontRef idx="minor">
+            <a:schemeClr val="lt1"/>
+          </a:fontRef>
+        </p:style>
+        <p:txBody>
+          <a:bodyPr vertOverflow="clip" horzOverflow="clip" rtlCol="0" anchor="t"/>
+          <a:lstStyle/>
+          <a:p>
+            <a:pPr algn="l"/>
+            <a:endParaRPr lang="nl-BE"/>
+          </a:p>
+        </p:txBody>
+      </p:sp>
+      <p:sp>
+        <p:nvSpPr>
+          <p:cNvPr id="3" name="Tekstvak 2">
+            <a:extLst>
+              <a:ext uri="{FF2B5EF4-FFF2-40B4-BE49-F238E27FC236}">
                 <a16:creationId xmlns:a16="http://schemas.microsoft.com/office/drawing/2014/main" id="{50DE1310-772F-A54C-B3EC-D33590911964}"/>
               </a:ext>
             </a:extLst>
@@ -6297,7 +7413,7 @@
 </p:sld>
 </file>
 
-<file path=ppt/slides/slide21.xml><?xml version="1.0" encoding="utf-8"?>
+<file path=ppt/slides/slide23.xml><?xml version="1.0" encoding="utf-8"?>
 <p:sld xmlns:a="http://schemas.openxmlformats.org/drawingml/2006/main" xmlns:r="http://schemas.openxmlformats.org/officeDocument/2006/relationships" xmlns:p="http://schemas.openxmlformats.org/presentationml/2006/main">
   <p:cSld>
     <p:bg>
@@ -6612,7 +7728,7 @@
 </p:sld>
 </file>
 
-<file path=ppt/slides/slide22.xml><?xml version="1.0" encoding="utf-8"?>
+<file path=ppt/slides/slide24.xml><?xml version="1.0" encoding="utf-8"?>
 <p:sld xmlns:a="http://schemas.openxmlformats.org/drawingml/2006/main" xmlns:r="http://schemas.openxmlformats.org/officeDocument/2006/relationships" xmlns:p="http://schemas.openxmlformats.org/presentationml/2006/main">
   <p:cSld>
     <p:spTree>
@@ -7667,16 +8783,6 @@
 <file path=ppt/slides/slide5.xml><?xml version="1.0" encoding="utf-8"?>
 <p:sld xmlns:a="http://schemas.openxmlformats.org/drawingml/2006/main" xmlns:r="http://schemas.openxmlformats.org/officeDocument/2006/relationships" xmlns:p="http://schemas.openxmlformats.org/presentationml/2006/main">
   <p:cSld>
-    <p:bg>
-      <p:bgPr>
-        <a:solidFill>
-          <a:srgbClr val="FFFFFF">
-            <a:alpha val="100000"/>
-          </a:srgbClr>
-        </a:solidFill>
-        <a:effectLst/>
-      </p:bgPr>
-    </p:bg>
     <p:spTree>
       <p:nvGrpSpPr>
         <p:cNvPr id="1" name=""/>
@@ -7696,7 +8802,7 @@
           <p:cNvPr id="2" name="Rechthoek 1">
             <a:extLst>
               <a:ext uri="{FF2B5EF4-FFF2-40B4-BE49-F238E27FC236}">
-                <a16:creationId xmlns:a16="http://schemas.microsoft.com/office/drawing/2014/main" id="{3C152CFA-B67C-0F40-8E61-B4FC626CD6EF}"/>
+                <a16:creationId xmlns:a16="http://schemas.microsoft.com/office/drawing/2014/main" id="{8DB466C6-5706-A04D-ADF0-6B9DC4105D7E}"/>
               </a:ext>
             </a:extLst>
           </p:cNvPr>
@@ -7750,7 +8856,7 @@
           <p:cNvPr id="3" name="Tekstvak 2">
             <a:extLst>
               <a:ext uri="{FF2B5EF4-FFF2-40B4-BE49-F238E27FC236}">
-                <a16:creationId xmlns:a16="http://schemas.microsoft.com/office/drawing/2014/main" id="{141675D8-51BC-F945-886D-53F15AEDA858}"/>
+                <a16:creationId xmlns:a16="http://schemas.microsoft.com/office/drawing/2014/main" id="{698A2FDB-4DAE-044A-887B-91ED2FF0F810}"/>
               </a:ext>
             </a:extLst>
           </p:cNvPr>
@@ -7760,7 +8866,7 @@
         <p:spPr>
           <a:xfrm>
             <a:off x="635000" y="279400"/>
-            <a:ext cx="7772400" cy="523220"/>
+            <a:ext cx="7772400" cy="508000"/>
           </a:xfrm>
           <a:prstGeom prst="rect">
             <a:avLst/>
@@ -7775,35 +8881,35 @@
           <a:p>
             <a:pPr algn="l"/>
             <a:r>
-              <a:rPr lang="nl-BE" sz="2800" b="1" dirty="0">
+              <a:rPr lang="nl-BE" sz="2800" b="1">
                 <a:solidFill>
                   <a:srgbClr val="1A1A1A"/>
                 </a:solidFill>
                 <a:latin typeface="Trebuchet MS"/>
               </a:rPr>
-              <a:t>AI biedt steeds meer kansen</a:t>
-            </a:r>
-          </a:p>
-        </p:txBody>
-      </p:sp>
-      <p:sp>
-        <p:nvSpPr>
-          <p:cNvPr id="60" name="S60"/>
-          <p:cNvSpPr/>
-          <p:nvPr/>
-        </p:nvSpPr>
-        <p:spPr>
-          <a:xfrm>
-            <a:off x="635000" y="1662430"/>
-            <a:ext cx="3746500" cy="355600"/>
+              <a:t>Waarom samen met mij?</a:t>
+            </a:r>
+          </a:p>
+        </p:txBody>
+      </p:sp>
+      <p:sp>
+        <p:nvSpPr>
+          <p:cNvPr id="50" name="R50"/>
+          <p:cNvSpPr/>
+          <p:nvPr/>
+        </p:nvSpPr>
+        <p:spPr>
+          <a:xfrm>
+            <a:off x="635000" y="914400"/>
+            <a:ext cx="7874000" cy="3492500"/>
           </a:xfrm>
           <a:prstGeom prst="roundRect">
             <a:avLst>
-              <a:gd name="adj" fmla="val 16667"/>
+              <a:gd name="adj" fmla="val 5000"/>
             </a:avLst>
           </a:prstGeom>
           <a:solidFill>
-            <a:srgbClr val="D6E6F2"/>
+            <a:srgbClr val="F0F5FA"/>
           </a:solidFill>
           <a:ln>
             <a:noFill/>
@@ -7819,93 +8925,17 @@
       </p:sp>
       <p:sp>
         <p:nvSpPr>
-          <p:cNvPr id="61" name="T61"/>
-          <p:cNvSpPr/>
-          <p:nvPr/>
-        </p:nvSpPr>
-        <p:spPr>
-          <a:xfrm>
-            <a:off x="698500" y="1662430"/>
-            <a:ext cx="3619500" cy="355600"/>
-          </a:xfrm>
-          <a:prstGeom prst="rect">
-            <a:avLst/>
-          </a:prstGeom>
-          <a:noFill/>
-          <a:ln>
-            <a:noFill/>
-          </a:ln>
-        </p:spPr>
-        <p:txBody>
-          <a:bodyPr wrap="square" lIns="36000" tIns="0" rIns="36000" bIns="0" anchor="ctr"/>
-          <a:lstStyle/>
-          <a:p>
-            <a:pPr algn="l"/>
-            <a:r>
-              <a:rPr lang="nl-NL" sz="1600" b="1" dirty="0">
-                <a:solidFill>
-                  <a:srgbClr val="2C5F7C"/>
-                </a:solidFill>
-                <a:latin typeface="Trebuchet MS"/>
-              </a:rPr>
-              <a:t>De perceptie</a:t>
-            </a:r>
-          </a:p>
-        </p:txBody>
-      </p:sp>
-      <p:sp>
-        <p:nvSpPr>
-          <p:cNvPr id="62" name="T62"/>
-          <p:cNvSpPr/>
-          <p:nvPr/>
-        </p:nvSpPr>
-        <p:spPr>
-          <a:xfrm>
-            <a:off x="635000" y="2106930"/>
-            <a:ext cx="3746500" cy="1143000"/>
-          </a:xfrm>
-          <a:prstGeom prst="rect">
-            <a:avLst/>
-          </a:prstGeom>
-          <a:noFill/>
-          <a:ln>
-            <a:noFill/>
-          </a:ln>
-        </p:spPr>
-        <p:txBody>
-          <a:bodyPr wrap="square" lIns="36000" tIns="0" rIns="36000" bIns="0" anchor="ctr"/>
-          <a:lstStyle/>
-          <a:p>
-            <a:pPr algn="l"/>
-            <a:r>
-              <a:rPr lang="nl-NL" sz="1500" i="1" dirty="0">
-                <a:solidFill>
-                  <a:srgbClr val="4A4A4A"/>
-                </a:solidFill>
-                <a:latin typeface="Calibri"/>
-              </a:rPr>
-              <a:t>"AI is een bedreiging!"
-"Het is te complex voor mij!"
-”Zal het mij wel vooruit helpen?"</a:t>
-            </a:r>
-          </a:p>
-        </p:txBody>
-      </p:sp>
-      <p:sp>
-        <p:nvSpPr>
-          <p:cNvPr id="63" name="S63"/>
-          <p:cNvSpPr/>
-          <p:nvPr/>
-        </p:nvSpPr>
-        <p:spPr>
-          <a:xfrm>
-            <a:off x="4762500" y="1662430"/>
-            <a:ext cx="3746500" cy="355600"/>
-          </a:xfrm>
-          <a:prstGeom prst="roundRect">
-            <a:avLst>
-              <a:gd name="adj" fmla="val 16667"/>
-            </a:avLst>
+          <p:cNvPr id="51" name="R51"/>
+          <p:cNvSpPr/>
+          <p:nvPr/>
+        </p:nvSpPr>
+        <p:spPr>
+          <a:xfrm>
+            <a:off x="787400" y="1066800"/>
+            <a:ext cx="50800" cy="3175000"/>
+          </a:xfrm>
+          <a:prstGeom prst="rect">
+            <a:avLst/>
           </a:prstGeom>
           <a:solidFill>
             <a:srgbClr val="5B8DB8"/>
@@ -7924,14 +8954,14 @@
       </p:sp>
       <p:sp>
         <p:nvSpPr>
-          <p:cNvPr id="64" name="T64"/>
-          <p:cNvSpPr/>
-          <p:nvPr/>
-        </p:nvSpPr>
-        <p:spPr>
-          <a:xfrm>
-            <a:off x="4826000" y="1662430"/>
-            <a:ext cx="3619500" cy="355600"/>
+          <p:cNvPr id="52" name="T52"/>
+          <p:cNvSpPr/>
+          <p:nvPr/>
+        </p:nvSpPr>
+        <p:spPr>
+          <a:xfrm>
+            <a:off x="990600" y="1016000"/>
+            <a:ext cx="7366000" cy="787400"/>
           </a:xfrm>
           <a:prstGeom prst="rect">
             <a:avLst/>
@@ -7942,32 +8972,48 @@
           </a:ln>
         </p:spPr>
         <p:txBody>
-          <a:bodyPr wrap="square" lIns="36000" tIns="0" rIns="36000" bIns="0" anchor="ctr"/>
-          <a:lstStyle/>
-          <a:p>
-            <a:pPr algn="l"/>
-            <a:r>
-              <a:rPr lang="nl-NL" sz="1600" b="1" dirty="0">
-                <a:solidFill>
-                  <a:srgbClr val="FFFFFF"/>
+          <a:bodyPr wrap="square" lIns="72000" tIns="54000" rIns="72000" bIns="54000" anchor="t"/>
+          <a:lstStyle/>
+          <a:p>
+            <a:pPr algn="l"/>
+            <a:r>
+              <a:rPr lang="nl-NL" sz="1700" b="1" dirty="0">
+                <a:solidFill>
+                  <a:srgbClr val="1A1A1A"/>
                 </a:solidFill>
                 <a:latin typeface="Trebuchet MS"/>
               </a:rPr>
-              <a:t>De realiteit</a:t>
-            </a:r>
-          </a:p>
-        </p:txBody>
-      </p:sp>
-      <p:sp>
-        <p:nvSpPr>
-          <p:cNvPr id="65" name="T65"/>
-          <p:cNvSpPr/>
-          <p:nvPr/>
-        </p:nvSpPr>
-        <p:spPr>
-          <a:xfrm>
-            <a:off x="4762500" y="2106930"/>
-            <a:ext cx="3746500" cy="1143000"/>
+              <a:t>15 jaar digitale ervaring</a:t>
+            </a:r>
+          </a:p>
+          <a:p>
+            <a:pPr algn="l">
+              <a:spcBef>
+                <a:spcPts val="100"/>
+              </a:spcBef>
+            </a:pPr>
+            <a:r>
+              <a:rPr lang="nl-NL" sz="1400" dirty="0">
+                <a:solidFill>
+                  <a:srgbClr val="4A4A4A"/>
+                </a:solidFill>
+                <a:latin typeface="Calibri"/>
+              </a:rPr>
+              <a:t>Van enterprise-projecten tot hands-on bouwen.</a:t>
+            </a:r>
+          </a:p>
+        </p:txBody>
+      </p:sp>
+      <p:sp>
+        <p:nvSpPr>
+          <p:cNvPr id="53" name="T53"/>
+          <p:cNvSpPr/>
+          <p:nvPr/>
+        </p:nvSpPr>
+        <p:spPr>
+          <a:xfrm>
+            <a:off x="990600" y="1803400"/>
+            <a:ext cx="7366000" cy="787400"/>
           </a:xfrm>
           <a:prstGeom prst="rect">
             <a:avLst/>
@@ -7978,51 +9024,200 @@
           </a:ln>
         </p:spPr>
         <p:txBody>
-          <a:bodyPr wrap="square" lIns="36000" tIns="0" rIns="36000" bIns="0" anchor="ctr"/>
-          <a:lstStyle/>
-          <a:p>
-            <a:pPr algn="l"/>
-            <a:r>
-              <a:rPr lang="nl-NL" sz="1500" dirty="0">
+          <a:bodyPr wrap="square" lIns="72000" tIns="54000" rIns="72000" bIns="54000" anchor="t"/>
+          <a:lstStyle/>
+          <a:p>
+            <a:pPr algn="l"/>
+            <a:r>
+              <a:rPr lang="nl-NL" sz="1700" b="1" dirty="0">
+                <a:solidFill>
+                  <a:srgbClr val="1A1A1A"/>
+                </a:solidFill>
+                <a:latin typeface="Trebuchet MS"/>
+              </a:rPr>
+              <a:t>Analyse vóór actie</a:t>
+            </a:r>
+          </a:p>
+          <a:p>
+            <a:pPr algn="l">
+              <a:spcBef>
+                <a:spcPts val="100"/>
+              </a:spcBef>
+            </a:pPr>
+            <a:r>
+              <a:rPr lang="nl-NL" sz="1400" dirty="0">
                 <a:solidFill>
                   <a:srgbClr val="4A4A4A"/>
                 </a:solidFill>
                 <a:latin typeface="Calibri"/>
               </a:rPr>
-              <a:t>AI is een handige </a:t>
-            </a:r>
-            <a:r>
-              <a:rPr lang="nl-NL" sz="1500" u="sng" dirty="0">
+              <a:t>Ik help je eerst begrijpen wat je écht nodig hebt. De juiste vragen stellen is de halve oplossing.</a:t>
+            </a:r>
+          </a:p>
+        </p:txBody>
+      </p:sp>
+      <p:sp>
+        <p:nvSpPr>
+          <p:cNvPr id="54" name="T54"/>
+          <p:cNvSpPr/>
+          <p:nvPr/>
+        </p:nvSpPr>
+        <p:spPr>
+          <a:xfrm>
+            <a:off x="990600" y="2590800"/>
+            <a:ext cx="7366000" cy="787400"/>
+          </a:xfrm>
+          <a:prstGeom prst="rect">
+            <a:avLst/>
+          </a:prstGeom>
+          <a:noFill/>
+          <a:ln>
+            <a:noFill/>
+          </a:ln>
+        </p:spPr>
+        <p:txBody>
+          <a:bodyPr wrap="square" lIns="72000" tIns="54000" rIns="72000" bIns="54000" anchor="t"/>
+          <a:lstStyle/>
+          <a:p>
+            <a:pPr algn="l"/>
+            <a:r>
+              <a:rPr lang="nl-NL" sz="1700" b="1" dirty="0">
+                <a:solidFill>
+                  <a:srgbClr val="1A1A1A"/>
+                </a:solidFill>
+                <a:latin typeface="Trebuchet MS"/>
+              </a:rPr>
+              <a:t>Pragmatisch én oplossingsgericht</a:t>
+            </a:r>
+          </a:p>
+          <a:p>
+            <a:pPr algn="l">
+              <a:spcBef>
+                <a:spcPts val="100"/>
+              </a:spcBef>
+            </a:pPr>
+            <a:r>
+              <a:rPr lang="nl-NL" sz="1400" dirty="0">
                 <a:solidFill>
                   <a:srgbClr val="4A4A4A"/>
                 </a:solidFill>
                 <a:latin typeface="Calibri"/>
               </a:rPr>
-              <a:t>assistent</a:t>
-            </a:r>
-            <a:r>
-              <a:rPr lang="nl-NL" sz="1500" dirty="0">
+              <a:t>Ik combineer strategisch denken met de vaardigheid om het ook effectief te realiseren.</a:t>
+            </a:r>
+          </a:p>
+        </p:txBody>
+      </p:sp>
+      <p:sp>
+        <p:nvSpPr>
+          <p:cNvPr id="55" name="T55"/>
+          <p:cNvSpPr/>
+          <p:nvPr/>
+        </p:nvSpPr>
+        <p:spPr>
+          <a:xfrm>
+            <a:off x="990600" y="3378200"/>
+            <a:ext cx="7366000" cy="787400"/>
+          </a:xfrm>
+          <a:prstGeom prst="rect">
+            <a:avLst/>
+          </a:prstGeom>
+          <a:noFill/>
+          <a:ln>
+            <a:noFill/>
+          </a:ln>
+        </p:spPr>
+        <p:txBody>
+          <a:bodyPr wrap="square" lIns="72000" tIns="54000" rIns="72000" bIns="54000" anchor="t"/>
+          <a:lstStyle/>
+          <a:p>
+            <a:pPr algn="l"/>
+            <a:r>
+              <a:rPr lang="nl-NL" sz="1700" b="1" dirty="0">
+                <a:solidFill>
+                  <a:srgbClr val="1A1A1A"/>
+                </a:solidFill>
+                <a:latin typeface="Trebuchet MS"/>
+              </a:rPr>
+              <a:t>Jouw leerkurve verkorten</a:t>
+            </a:r>
+          </a:p>
+          <a:p>
+            <a:pPr algn="l">
+              <a:spcBef>
+                <a:spcPts val="100"/>
+              </a:spcBef>
+            </a:pPr>
+            <a:r>
+              <a:rPr lang="nl-NL" sz="1400" dirty="0">
                 <a:solidFill>
                   <a:srgbClr val="4A4A4A"/>
                 </a:solidFill>
                 <a:latin typeface="Calibri"/>
               </a:rPr>
-              <a:t>
-Het is toegankelijker dan ooit</a:t>
-            </a:r>
-          </a:p>
-          <a:p>
-            <a:r>
-              <a:rPr lang="nl-NL" sz="1500" dirty="0">
-                <a:solidFill>
-                  <a:srgbClr val="4A4A4A"/>
-                </a:solidFill>
-              </a:rPr>
-              <a:t>Het versnelt wat je al doet</a:t>
-            </a:r>
-            <a:endParaRPr lang="nl-NL" sz="1500" dirty="0">
+              <a:t>De eerste stappen zijn het lastigst. Ik breng je sneller voorbij dat punt.</a:t>
+            </a:r>
+          </a:p>
+        </p:txBody>
+      </p:sp>
+      <p:sp>
+        <p:nvSpPr>
+          <p:cNvPr id="56" name="T56"/>
+          <p:cNvSpPr/>
+          <p:nvPr/>
+        </p:nvSpPr>
+        <p:spPr>
+          <a:xfrm>
+            <a:off x="635000" y="4508500"/>
+            <a:ext cx="7874000" cy="330200"/>
+          </a:xfrm>
+          <a:prstGeom prst="rect">
+            <a:avLst/>
+          </a:prstGeom>
+          <a:noFill/>
+          <a:ln>
+            <a:noFill/>
+          </a:ln>
+        </p:spPr>
+        <p:txBody>
+          <a:bodyPr wrap="square" lIns="72000" tIns="54000" rIns="72000" bIns="54000" anchor="ctr"/>
+          <a:lstStyle/>
+          <a:p>
+            <a:r>
+              <a:rPr lang="nl-NL" sz="1500" i="1" dirty="0">
+                <a:solidFill>
+                  <a:srgbClr val="2C5F7C"/>
+                </a:solidFill>
+                <a:latin typeface="Calibri"/>
+              </a:rPr>
+              <a:t>Door samen te analyseren, structureren en itereren behalen we sneller </a:t>
+            </a:r>
+            <a:r>
+              <a:rPr lang="nl-NL" sz="1500" i="1" dirty="0">
+                <a:solidFill>
+                  <a:srgbClr val="2C5F7C"/>
+                </a:solidFill>
+              </a:rPr>
+              <a:t>resultaat.</a:t>
+            </a:r>
+            <a:br>
+              <a:rPr lang="nl-NL" sz="1500" i="1" dirty="0">
+                <a:solidFill>
+                  <a:srgbClr val="2C5F7C"/>
+                </a:solidFill>
+              </a:rPr>
+            </a:br>
+            <a:r>
+              <a:rPr lang="nl-NL" sz="1500" i="1" dirty="0">
+                <a:solidFill>
+                  <a:srgbClr val="2C5F7C"/>
+                </a:solidFill>
+              </a:rPr>
+              <a:t>Rekenvoorbeeld: bespaar je 2u/week? Dat is 100u/jaar aan teruggewonnen tijd.</a:t>
+            </a:r>
+            <a:endParaRPr lang="nl-NL" sz="1500" i="1" dirty="0">
               <a:solidFill>
-                <a:srgbClr val="4A4A4A"/>
+                <a:srgbClr val="2C5F7C"/>
               </a:solidFill>
               <a:latin typeface="Calibri"/>
             </a:endParaRPr>
@@ -8031,61 +9226,7 @@
       </p:sp>
       <p:sp>
         <p:nvSpPr>
-          <p:cNvPr id="66" name="T66"/>
-          <p:cNvSpPr/>
-          <p:nvPr/>
-        </p:nvSpPr>
-        <p:spPr>
-          <a:xfrm>
-            <a:off x="635000" y="4064000"/>
-            <a:ext cx="7874000" cy="381000"/>
-          </a:xfrm>
-          <a:prstGeom prst="rect">
-            <a:avLst/>
-          </a:prstGeom>
-          <a:noFill/>
-          <a:ln>
-            <a:noFill/>
-          </a:ln>
-        </p:spPr>
-        <p:txBody>
-          <a:bodyPr wrap="square" lIns="36000" tIns="0" rIns="36000" bIns="0" anchor="ctr"/>
-          <a:lstStyle/>
-          <a:p>
-            <a:pPr algn="l"/>
-            <a:r>
-              <a:rPr lang="nl-NL" sz="1600" i="1" dirty="0">
-                <a:solidFill>
-                  <a:srgbClr val="2C5F7C"/>
-                </a:solidFill>
-                <a:latin typeface="Calibri"/>
-              </a:rPr>
-              <a:t>De kloof tussen wie efficiënt werkt (</a:t>
-            </a:r>
-            <a:r>
-              <a:rPr lang="nl-NL" sz="1600" i="1" dirty="0" err="1">
-                <a:solidFill>
-                  <a:srgbClr val="2C5F7C"/>
-                </a:solidFill>
-                <a:latin typeface="Calibri"/>
-              </a:rPr>
-              <a:t>ahv</a:t>
-            </a:r>
-            <a:r>
-              <a:rPr lang="nl-NL" sz="1600" i="1" dirty="0">
-                <a:solidFill>
-                  <a:srgbClr val="2C5F7C"/>
-                </a:solidFill>
-                <a:latin typeface="Calibri"/>
-              </a:rPr>
-              <a:t> AI) en wie niet, groeit elke dag.</a:t>
-            </a:r>
-          </a:p>
-        </p:txBody>
-      </p:sp>
-      <p:sp>
-        <p:nvSpPr>
-          <p:cNvPr id="67" name="T67"/>
+          <p:cNvPr id="57" name="T57"/>
           <p:cNvSpPr/>
           <p:nvPr/>
         </p:nvSpPr>
@@ -8103,7 +9244,7 @@
           </a:ln>
         </p:spPr>
         <p:txBody>
-          <a:bodyPr wrap="square" lIns="36000" tIns="0" rIns="36000" bIns="0" anchor="ctr"/>
+          <a:bodyPr wrap="square" lIns="72000" tIns="54000" rIns="72000" bIns="54000" anchor="ctr"/>
           <a:lstStyle/>
           <a:p>
             <a:pPr algn="r"/>
@@ -8114,15 +9255,62 @@
                 </a:solidFill>
                 <a:latin typeface="Calibri"/>
               </a:rPr>
-              <a:t>3</a:t>
-            </a:r>
-          </a:p>
-        </p:txBody>
-      </p:sp>
+              <a:t>6</a:t>
+            </a:r>
+          </a:p>
+        </p:txBody>
+      </p:sp>
+      <p:pic>
+        <p:nvPicPr>
+          <p:cNvPr id="1026" name="Picture 2" descr="visie - Probeleggen">
+            <a:extLst>
+              <a:ext uri="{FF2B5EF4-FFF2-40B4-BE49-F238E27FC236}">
+                <a16:creationId xmlns:a16="http://schemas.microsoft.com/office/drawing/2014/main" id="{43EA0C86-8819-1109-0DBB-D472B8FEAF68}"/>
+              </a:ext>
+            </a:extLst>
+          </p:cNvPr>
+          <p:cNvPicPr>
+            <a:picLocks noChangeAspect="1" noChangeArrowheads="1"/>
+          </p:cNvPicPr>
+          <p:nvPr/>
+        </p:nvPicPr>
+        <p:blipFill rotWithShape="1">
+          <a:blip r:embed="rId2">
+            <a:extLst>
+              <a:ext uri="{28A0092B-C50C-407E-A947-70E740481C1C}">
+                <a14:useLocalDpi xmlns:a14="http://schemas.microsoft.com/office/drawing/2010/main" val="0"/>
+              </a:ext>
+            </a:extLst>
+          </a:blip>
+          <a:srcRect r="58909"/>
+          <a:stretch>
+            <a:fillRect/>
+          </a:stretch>
+        </p:blipFill>
+        <p:spPr bwMode="auto">
+          <a:xfrm>
+            <a:off x="6708370" y="3014711"/>
+            <a:ext cx="2144683" cy="1388206"/>
+          </a:xfrm>
+          <a:prstGeom prst="rect">
+            <a:avLst/>
+          </a:prstGeom>
+          <a:noFill/>
+          <a:extLst>
+            <a:ext uri="{909E8E84-426E-40DD-AFC4-6F175D3DCCD1}">
+              <a14:hiddenFill xmlns:a14="http://schemas.microsoft.com/office/drawing/2010/main">
+                <a:solidFill>
+                  <a:srgbClr val="FFFFFF"/>
+                </a:solidFill>
+              </a14:hiddenFill>
+            </a:ext>
+          </a:extLst>
+        </p:spPr>
+      </p:pic>
     </p:spTree>
     <p:extLst>
       <p:ext uri="{BB962C8B-B14F-4D97-AF65-F5344CB8AC3E}">
-        <p14:creationId xmlns:p14="http://schemas.microsoft.com/office/powerpoint/2010/main" val="2260582116"/>
+        <p14:creationId xmlns:p14="http://schemas.microsoft.com/office/powerpoint/2010/main" val="110955812"/>
       </p:ext>
     </p:extLst>
   </p:cSld>
@@ -8164,7 +9352,7 @@
           <p:cNvPr id="2" name="Rechthoek 1">
             <a:extLst>
               <a:ext uri="{FF2B5EF4-FFF2-40B4-BE49-F238E27FC236}">
-                <a16:creationId xmlns:a16="http://schemas.microsoft.com/office/drawing/2014/main" id="{1CF7AD78-DBCA-7648-984B-664E3AB88CFD}"/>
+                <a16:creationId xmlns:a16="http://schemas.microsoft.com/office/drawing/2014/main" id="{3C152CFA-B67C-0F40-8E61-B4FC626CD6EF}"/>
               </a:ext>
             </a:extLst>
           </p:cNvPr>
@@ -8218,7 +9406,7 @@
           <p:cNvPr id="3" name="Tekstvak 2">
             <a:extLst>
               <a:ext uri="{FF2B5EF4-FFF2-40B4-BE49-F238E27FC236}">
-                <a16:creationId xmlns:a16="http://schemas.microsoft.com/office/drawing/2014/main" id="{87BE6AF9-1C4B-B148-A83B-C806A6EAF50B}"/>
+                <a16:creationId xmlns:a16="http://schemas.microsoft.com/office/drawing/2014/main" id="{141675D8-51BC-F945-886D-53F15AEDA858}"/>
               </a:ext>
             </a:extLst>
           </p:cNvPr>
@@ -8249,29 +9437,29 @@
                 </a:solidFill>
                 <a:latin typeface="Trebuchet MS"/>
               </a:rPr>
-              <a:t>Probeer het uit en ervaar de winst</a:t>
-            </a:r>
-          </a:p>
-        </p:txBody>
-      </p:sp>
-      <p:sp>
-        <p:nvSpPr>
-          <p:cNvPr id="50" name="R50"/>
-          <p:cNvSpPr/>
-          <p:nvPr/>
-        </p:nvSpPr>
-        <p:spPr>
-          <a:xfrm>
-            <a:off x="635000" y="1485900"/>
-            <a:ext cx="5334000" cy="3111500"/>
+              <a:t>AI biedt steeds meer kansen</a:t>
+            </a:r>
+          </a:p>
+        </p:txBody>
+      </p:sp>
+      <p:sp>
+        <p:nvSpPr>
+          <p:cNvPr id="60" name="S60"/>
+          <p:cNvSpPr/>
+          <p:nvPr/>
+        </p:nvSpPr>
+        <p:spPr>
+          <a:xfrm>
+            <a:off x="635000" y="1662430"/>
+            <a:ext cx="3746500" cy="355600"/>
           </a:xfrm>
           <a:prstGeom prst="roundRect">
             <a:avLst>
-              <a:gd name="adj" fmla="val 5000"/>
+              <a:gd name="adj" fmla="val 16667"/>
             </a:avLst>
           </a:prstGeom>
           <a:solidFill>
-            <a:srgbClr val="EDEFF2"/>
+            <a:srgbClr val="D6E6F2"/>
           </a:solidFill>
           <a:ln>
             <a:noFill/>
@@ -8287,14 +9475,14 @@
       </p:sp>
       <p:sp>
         <p:nvSpPr>
-          <p:cNvPr id="51" name="T51"/>
-          <p:cNvSpPr/>
-          <p:nvPr/>
-        </p:nvSpPr>
-        <p:spPr>
-          <a:xfrm>
-            <a:off x="698500" y="1245870"/>
-            <a:ext cx="5207000" cy="3300730"/>
+          <p:cNvPr id="61" name="T61"/>
+          <p:cNvSpPr/>
+          <p:nvPr/>
+        </p:nvSpPr>
+        <p:spPr>
+          <a:xfrm>
+            <a:off x="698500" y="1662430"/>
+            <a:ext cx="3619500" cy="355600"/>
           </a:xfrm>
           <a:prstGeom prst="rect">
             <a:avLst/>
@@ -8305,200 +9493,74 @@
           </a:ln>
         </p:spPr>
         <p:txBody>
-          <a:bodyPr wrap="square" lIns="72000" tIns="54000" rIns="72000" bIns="54000" anchor="t"/>
-          <a:lstStyle/>
-          <a:p>
-            <a:pPr algn="l"/>
-            <a:endParaRPr lang="nl-NL" sz="1800" b="1" dirty="0">
-              <a:solidFill>
-                <a:srgbClr val="4A4A4A"/>
-              </a:solidFill>
-              <a:latin typeface="Trebuchet MS"/>
-            </a:endParaRPr>
-          </a:p>
-          <a:p>
-            <a:pPr algn="l">
-              <a:spcBef>
-                <a:spcPts val="400"/>
-              </a:spcBef>
-            </a:pPr>
-            <a:r>
-              <a:rPr lang="nl-NL" sz="1600" i="1" dirty="0">
-                <a:solidFill>
-                  <a:srgbClr val="3D3D3D"/>
-                </a:solidFill>
-                <a:latin typeface="Calibri"/>
-              </a:rPr>
-              <a:t>"Het werkt zo, ik ben het zo gewoon"</a:t>
-            </a:r>
-          </a:p>
-          <a:p>
-            <a:pPr algn="l">
-              <a:spcBef>
-                <a:spcPts val="100"/>
-              </a:spcBef>
-            </a:pPr>
-            <a:r>
-              <a:rPr lang="nl-NL" sz="1400" dirty="0">
-                <a:solidFill>
-                  <a:srgbClr val="6B6B6B"/>
-                </a:solidFill>
-                <a:latin typeface="Calibri"/>
-              </a:rPr>
-              <a:t>Repetitieve taken voelen als normaal — maar ze vreten je tijd.</a:t>
-            </a:r>
-          </a:p>
-          <a:p>
-            <a:pPr algn="l">
-              <a:spcBef>
-                <a:spcPts val="400"/>
-              </a:spcBef>
-            </a:pPr>
-            <a:endParaRPr lang="nl-NL" sz="1600" i="1" dirty="0">
-              <a:solidFill>
-                <a:srgbClr val="3D3D3D"/>
-              </a:solidFill>
-              <a:latin typeface="Calibri"/>
-            </a:endParaRPr>
-          </a:p>
-          <a:p>
-            <a:pPr algn="l">
-              <a:spcBef>
-                <a:spcPts val="400"/>
-              </a:spcBef>
-            </a:pPr>
-            <a:r>
-              <a:rPr lang="nl-NL" sz="1600" i="1" dirty="0">
-                <a:solidFill>
-                  <a:srgbClr val="3D3D3D"/>
-                </a:solidFill>
-                <a:latin typeface="Calibri"/>
-              </a:rPr>
-              <a:t>"Ik heb het al geprobeerd, tevergeefs"</a:t>
-            </a:r>
-          </a:p>
-          <a:p>
-            <a:pPr algn="l">
-              <a:spcBef>
-                <a:spcPts val="100"/>
-              </a:spcBef>
-            </a:pPr>
-            <a:r>
-              <a:rPr lang="nl-NL" sz="1400" dirty="0">
-                <a:solidFill>
-                  <a:srgbClr val="6B6B6B"/>
-                </a:solidFill>
-                <a:latin typeface="Calibri"/>
-              </a:rPr>
-              <a:t>Technologie evolueert snel. Wat gisteren niet lukte, kan vandaag wel.</a:t>
-            </a:r>
-          </a:p>
-          <a:p>
-            <a:pPr algn="l">
-              <a:spcBef>
-                <a:spcPts val="400"/>
-              </a:spcBef>
-            </a:pPr>
-            <a:endParaRPr lang="nl-NL" sz="1600" i="1" dirty="0">
-              <a:solidFill>
-                <a:srgbClr val="3D3D3D"/>
-              </a:solidFill>
-              <a:latin typeface="Calibri"/>
-            </a:endParaRPr>
-          </a:p>
-          <a:p>
-            <a:pPr algn="l">
-              <a:spcBef>
-                <a:spcPts val="400"/>
-              </a:spcBef>
-            </a:pPr>
-            <a:r>
-              <a:rPr lang="nl-NL" sz="1600" i="1" dirty="0">
-                <a:solidFill>
-                  <a:srgbClr val="3D3D3D"/>
-                </a:solidFill>
-                <a:latin typeface="Calibri"/>
-              </a:rPr>
-              <a:t>"Ik weet niet waar ik moet beginnen"</a:t>
-            </a:r>
-          </a:p>
-          <a:p>
-            <a:pPr algn="l">
-              <a:spcBef>
-                <a:spcPts val="100"/>
-              </a:spcBef>
-            </a:pPr>
-            <a:r>
-              <a:rPr lang="nl-NL" sz="1400" dirty="0">
-                <a:solidFill>
-                  <a:srgbClr val="6B6B6B"/>
-                </a:solidFill>
-                <a:latin typeface="Calibri"/>
-              </a:rPr>
-              <a:t>Dat hoeft ook niet — samen kijken we waar de winst zit.</a:t>
-            </a:r>
-          </a:p>
-          <a:p>
-            <a:pPr algn="l">
-              <a:spcBef>
-                <a:spcPts val="400"/>
-              </a:spcBef>
-            </a:pPr>
-            <a:endParaRPr lang="nl-NL" sz="1600" i="1" dirty="0">
-              <a:solidFill>
-                <a:srgbClr val="3D3D3D"/>
-              </a:solidFill>
-              <a:latin typeface="Calibri"/>
-            </a:endParaRPr>
-          </a:p>
-          <a:p>
-            <a:pPr algn="l">
-              <a:spcBef>
-                <a:spcPts val="400"/>
-              </a:spcBef>
-            </a:pPr>
-            <a:r>
-              <a:rPr lang="nl-NL" sz="1600" i="1" dirty="0">
-                <a:solidFill>
-                  <a:srgbClr val="3D3D3D"/>
-                </a:solidFill>
-                <a:latin typeface="Calibri"/>
-              </a:rPr>
-              <a:t>"Kost dat niet veel geld?"</a:t>
-            </a:r>
-          </a:p>
-          <a:p>
-            <a:pPr algn="l">
-              <a:spcBef>
-                <a:spcPts val="100"/>
-              </a:spcBef>
-            </a:pPr>
-            <a:r>
-              <a:rPr lang="nl-NL" sz="1400" dirty="0">
-                <a:solidFill>
-                  <a:srgbClr val="6B6B6B"/>
-                </a:solidFill>
-                <a:latin typeface="Calibri"/>
-              </a:rPr>
-              <a:t>We starten klein en afgelijnd. Geen grote investeringen nodig.</a:t>
-            </a:r>
-          </a:p>
-        </p:txBody>
-      </p:sp>
-      <p:sp>
-        <p:nvSpPr>
-          <p:cNvPr id="52" name="R52"/>
-          <p:cNvSpPr/>
-          <p:nvPr/>
-        </p:nvSpPr>
-        <p:spPr>
-          <a:xfrm>
-            <a:off x="6197600" y="1485900"/>
-            <a:ext cx="2476500" cy="3111500"/>
+          <a:bodyPr wrap="square" lIns="36000" tIns="0" rIns="36000" bIns="0" anchor="ctr"/>
+          <a:lstStyle/>
+          <a:p>
+            <a:pPr algn="l"/>
+            <a:r>
+              <a:rPr lang="nl-NL" sz="1600" b="1" dirty="0">
+                <a:solidFill>
+                  <a:srgbClr val="2C5F7C"/>
+                </a:solidFill>
+                <a:latin typeface="Trebuchet MS"/>
+              </a:rPr>
+              <a:t>De perceptie</a:t>
+            </a:r>
+          </a:p>
+        </p:txBody>
+      </p:sp>
+      <p:sp>
+        <p:nvSpPr>
+          <p:cNvPr id="62" name="T62"/>
+          <p:cNvSpPr/>
+          <p:nvPr/>
+        </p:nvSpPr>
+        <p:spPr>
+          <a:xfrm>
+            <a:off x="635000" y="2106930"/>
+            <a:ext cx="3746500" cy="1143000"/>
+          </a:xfrm>
+          <a:prstGeom prst="rect">
+            <a:avLst/>
+          </a:prstGeom>
+          <a:noFill/>
+          <a:ln>
+            <a:noFill/>
+          </a:ln>
+        </p:spPr>
+        <p:txBody>
+          <a:bodyPr wrap="square" lIns="36000" tIns="0" rIns="36000" bIns="0" anchor="ctr"/>
+          <a:lstStyle/>
+          <a:p>
+            <a:pPr algn="l"/>
+            <a:r>
+              <a:rPr lang="nl-NL" sz="1500" i="1" dirty="0">
+                <a:solidFill>
+                  <a:srgbClr val="4A4A4A"/>
+                </a:solidFill>
+                <a:latin typeface="Calibri"/>
+              </a:rPr>
+              <a:t>"AI is een bedreiging!"
+"Het is te complex voor mij!"
+”Zal het mij wel vooruit helpen?"</a:t>
+            </a:r>
+          </a:p>
+        </p:txBody>
+      </p:sp>
+      <p:sp>
+        <p:nvSpPr>
+          <p:cNvPr id="63" name="S63"/>
+          <p:cNvSpPr/>
+          <p:nvPr/>
+        </p:nvSpPr>
+        <p:spPr>
+          <a:xfrm>
+            <a:off x="4762500" y="1662430"/>
+            <a:ext cx="3746500" cy="355600"/>
           </a:xfrm>
           <a:prstGeom prst="roundRect">
             <a:avLst>
-              <a:gd name="adj" fmla="val 5000"/>
+              <a:gd name="adj" fmla="val 16667"/>
             </a:avLst>
           </a:prstGeom>
           <a:solidFill>
@@ -8518,14 +9580,14 @@
       </p:sp>
       <p:sp>
         <p:nvSpPr>
-          <p:cNvPr id="53" name="T53"/>
-          <p:cNvSpPr/>
-          <p:nvPr/>
-        </p:nvSpPr>
-        <p:spPr>
-          <a:xfrm>
-            <a:off x="6261100" y="1600200"/>
-            <a:ext cx="2349500" cy="2837180"/>
+          <p:cNvPr id="64" name="T64"/>
+          <p:cNvSpPr/>
+          <p:nvPr/>
+        </p:nvSpPr>
+        <p:spPr>
+          <a:xfrm>
+            <a:off x="4826000" y="1662430"/>
+            <a:ext cx="3619500" cy="355600"/>
           </a:xfrm>
           <a:prstGeom prst="rect">
             <a:avLst/>
@@ -8536,102 +9598,150 @@
           </a:ln>
         </p:spPr>
         <p:txBody>
-          <a:bodyPr wrap="square" lIns="72000" tIns="54000" rIns="72000" bIns="54000" anchor="ctr"/>
-          <a:lstStyle/>
-          <a:p>
-            <a:pPr algn="ctr">
-              <a:spcBef>
-                <a:spcPts val="300"/>
-              </a:spcBef>
-            </a:pPr>
-            <a:r>
-              <a:rPr lang="nl-NL" sz="1800" dirty="0">
+          <a:bodyPr wrap="square" lIns="36000" tIns="0" rIns="36000" bIns="0" anchor="ctr"/>
+          <a:lstStyle/>
+          <a:p>
+            <a:pPr algn="l"/>
+            <a:r>
+              <a:rPr lang="nl-NL" sz="1600" b="1" dirty="0">
                 <a:solidFill>
                   <a:srgbClr val="FFFFFF"/>
                 </a:solidFill>
-                <a:latin typeface="Calibri"/>
-              </a:rPr>
-              <a:t>Start met iets kleins</a:t>
-            </a:r>
-            <a:endParaRPr lang="nl-NL" dirty="0">
+                <a:latin typeface="Trebuchet MS"/>
+              </a:rPr>
+              <a:t>De realiteit</a:t>
+            </a:r>
+          </a:p>
+        </p:txBody>
+      </p:sp>
+      <p:sp>
+        <p:nvSpPr>
+          <p:cNvPr id="65" name="T65"/>
+          <p:cNvSpPr/>
+          <p:nvPr/>
+        </p:nvSpPr>
+        <p:spPr>
+          <a:xfrm>
+            <a:off x="4762500" y="2106930"/>
+            <a:ext cx="3746500" cy="1143000"/>
+          </a:xfrm>
+          <a:prstGeom prst="rect">
+            <a:avLst/>
+          </a:prstGeom>
+          <a:noFill/>
+          <a:ln>
+            <a:noFill/>
+          </a:ln>
+        </p:spPr>
+        <p:txBody>
+          <a:bodyPr wrap="square" lIns="36000" tIns="0" rIns="36000" bIns="0" anchor="ctr"/>
+          <a:lstStyle/>
+          <a:p>
+            <a:pPr algn="l"/>
+            <a:r>
+              <a:rPr lang="nl-NL" sz="1500" dirty="0">
+                <a:solidFill>
+                  <a:srgbClr val="4A4A4A"/>
+                </a:solidFill>
+                <a:latin typeface="Calibri"/>
+              </a:rPr>
+              <a:t>AI is een handige </a:t>
+            </a:r>
+            <a:r>
+              <a:rPr lang="nl-NL" sz="1500" u="sng" dirty="0">
+                <a:solidFill>
+                  <a:srgbClr val="4A4A4A"/>
+                </a:solidFill>
+                <a:latin typeface="Calibri"/>
+              </a:rPr>
+              <a:t>assistent</a:t>
+            </a:r>
+            <a:r>
+              <a:rPr lang="nl-NL" sz="1500" dirty="0">
+                <a:solidFill>
+                  <a:srgbClr val="4A4A4A"/>
+                </a:solidFill>
+                <a:latin typeface="Calibri"/>
+              </a:rPr>
+              <a:t>
+Het is toegankelijker dan ooit</a:t>
+            </a:r>
+          </a:p>
+          <a:p>
+            <a:r>
+              <a:rPr lang="nl-NL" sz="1500" dirty="0">
+                <a:solidFill>
+                  <a:srgbClr val="4A4A4A"/>
+                </a:solidFill>
+              </a:rPr>
+              <a:t>Het versnelt wat je al doet</a:t>
+            </a:r>
+            <a:endParaRPr lang="nl-NL" sz="1500" dirty="0">
               <a:solidFill>
-                <a:srgbClr val="FFFFFF"/>
+                <a:srgbClr val="4A4A4A"/>
               </a:solidFill>
               <a:latin typeface="Calibri"/>
             </a:endParaRPr>
           </a:p>
-          <a:p>
-            <a:pPr algn="ctr">
-              <a:spcBef>
-                <a:spcPts val="300"/>
-              </a:spcBef>
-            </a:pPr>
-            <a:endParaRPr lang="nl-NL" sz="1800" dirty="0">
-              <a:solidFill>
-                <a:srgbClr val="FFFFFF"/>
-              </a:solidFill>
-              <a:latin typeface="Calibri"/>
-            </a:endParaRPr>
-          </a:p>
-          <a:p>
-            <a:pPr algn="ctr">
-              <a:spcBef>
-                <a:spcPts val="300"/>
-              </a:spcBef>
-            </a:pPr>
-            <a:r>
-              <a:rPr lang="nl-NL" dirty="0">
-                <a:solidFill>
-                  <a:srgbClr val="FFFFFF"/>
-                </a:solidFill>
-                <a:latin typeface="Calibri"/>
-              </a:rPr>
-              <a:t>Je krijgt ongetwijfeld de smaak te pakken</a:t>
-            </a:r>
-          </a:p>
-          <a:p>
-            <a:pPr algn="ctr">
-              <a:spcBef>
-                <a:spcPts val="300"/>
-              </a:spcBef>
-            </a:pPr>
-            <a:endParaRPr lang="nl-NL" sz="1800" dirty="0">
-              <a:solidFill>
-                <a:srgbClr val="FFFFFF"/>
-              </a:solidFill>
-              <a:latin typeface="Calibri"/>
-            </a:endParaRPr>
-          </a:p>
-          <a:p>
-            <a:pPr algn="ctr">
-              <a:spcBef>
-                <a:spcPts val="100"/>
-              </a:spcBef>
-            </a:pPr>
-            <a:r>
-              <a:rPr lang="nl-NL" dirty="0">
-                <a:solidFill>
-                  <a:srgbClr val="FFFFFF"/>
-                </a:solidFill>
-                <a:latin typeface="Calibri"/>
-              </a:rPr>
-              <a:t>I</a:t>
-            </a:r>
-            <a:r>
-              <a:rPr lang="nl-NL" sz="1800" dirty="0">
-                <a:solidFill>
-                  <a:srgbClr val="FFFFFF"/>
-                </a:solidFill>
-                <a:latin typeface="Calibri"/>
-              </a:rPr>
-              <a:t>k help je graag verder</a:t>
-            </a:r>
-          </a:p>
-        </p:txBody>
-      </p:sp>
-      <p:sp>
-        <p:nvSpPr>
-          <p:cNvPr id="54" name="T54"/>
+        </p:txBody>
+      </p:sp>
+      <p:sp>
+        <p:nvSpPr>
+          <p:cNvPr id="66" name="T66"/>
+          <p:cNvSpPr/>
+          <p:nvPr/>
+        </p:nvSpPr>
+        <p:spPr>
+          <a:xfrm>
+            <a:off x="635000" y="4064000"/>
+            <a:ext cx="7874000" cy="381000"/>
+          </a:xfrm>
+          <a:prstGeom prst="rect">
+            <a:avLst/>
+          </a:prstGeom>
+          <a:noFill/>
+          <a:ln>
+            <a:noFill/>
+          </a:ln>
+        </p:spPr>
+        <p:txBody>
+          <a:bodyPr wrap="square" lIns="36000" tIns="0" rIns="36000" bIns="0" anchor="ctr"/>
+          <a:lstStyle/>
+          <a:p>
+            <a:pPr algn="l"/>
+            <a:r>
+              <a:rPr lang="nl-NL" sz="1600" i="1" dirty="0">
+                <a:solidFill>
+                  <a:srgbClr val="2C5F7C"/>
+                </a:solidFill>
+                <a:latin typeface="Calibri"/>
+              </a:rPr>
+              <a:t>De kloof tussen wie efficiënt werkt (</a:t>
+            </a:r>
+            <a:r>
+              <a:rPr lang="nl-NL" sz="1600" i="1" dirty="0" err="1">
+                <a:solidFill>
+                  <a:srgbClr val="2C5F7C"/>
+                </a:solidFill>
+                <a:latin typeface="Calibri"/>
+              </a:rPr>
+              <a:t>ahv</a:t>
+            </a:r>
+            <a:r>
+              <a:rPr lang="nl-NL" sz="1600" i="1" dirty="0">
+                <a:solidFill>
+                  <a:srgbClr val="2C5F7C"/>
+                </a:solidFill>
+                <a:latin typeface="Calibri"/>
+              </a:rPr>
+              <a:t> AI) en wie niet, groeit elke dag.</a:t>
+            </a:r>
+          </a:p>
+        </p:txBody>
+      </p:sp>
+      <p:sp>
+        <p:nvSpPr>
+          <p:cNvPr id="67" name="T67"/>
           <p:cNvSpPr/>
           <p:nvPr/>
         </p:nvSpPr>
@@ -8649,7 +9759,7 @@
           </a:ln>
         </p:spPr>
         <p:txBody>
-          <a:bodyPr wrap="square" lIns="72000" tIns="54000" rIns="72000" bIns="54000" anchor="ctr"/>
+          <a:bodyPr wrap="square" lIns="36000" tIns="0" rIns="36000" bIns="0" anchor="ctr"/>
           <a:lstStyle/>
           <a:p>
             <a:pPr algn="r"/>
@@ -8660,7 +9770,7 @@
                 </a:solidFill>
                 <a:latin typeface="Calibri"/>
               </a:rPr>
-              <a:t>4</a:t>
+              <a:t>3</a:t>
             </a:r>
           </a:p>
         </p:txBody>
@@ -8668,7 +9778,7 @@
     </p:spTree>
     <p:extLst>
       <p:ext uri="{BB962C8B-B14F-4D97-AF65-F5344CB8AC3E}">
-        <p14:creationId xmlns:p14="http://schemas.microsoft.com/office/powerpoint/2010/main" val="535605839"/>
+        <p14:creationId xmlns:p14="http://schemas.microsoft.com/office/powerpoint/2010/main" val="2260582116"/>
       </p:ext>
     </p:extLst>
   </p:cSld>
@@ -8710,7 +9820,7 @@
           <p:cNvPr id="2" name="Rechthoek 1">
             <a:extLst>
               <a:ext uri="{FF2B5EF4-FFF2-40B4-BE49-F238E27FC236}">
-                <a16:creationId xmlns:a16="http://schemas.microsoft.com/office/drawing/2014/main" id="{9CD54D08-A751-2D4D-ADF7-CFD6C4808899}"/>
+                <a16:creationId xmlns:a16="http://schemas.microsoft.com/office/drawing/2014/main" id="{1CF7AD78-DBCA-7648-984B-664E3AB88CFD}"/>
               </a:ext>
             </a:extLst>
           </p:cNvPr>
@@ -8764,7 +9874,7 @@
           <p:cNvPr id="3" name="Tekstvak 2">
             <a:extLst>
               <a:ext uri="{FF2B5EF4-FFF2-40B4-BE49-F238E27FC236}">
-                <a16:creationId xmlns:a16="http://schemas.microsoft.com/office/drawing/2014/main" id="{2B4B305A-C9A6-5149-AE57-22EFB0BEC167}"/>
+                <a16:creationId xmlns:a16="http://schemas.microsoft.com/office/drawing/2014/main" id="{87BE6AF9-1C4B-B148-A83B-C806A6EAF50B}"/>
               </a:ext>
             </a:extLst>
           </p:cNvPr>
@@ -8774,7 +9884,7 @@
         <p:spPr>
           <a:xfrm>
             <a:off x="635000" y="279400"/>
-            <a:ext cx="7772400" cy="508000"/>
+            <a:ext cx="7772400" cy="523220"/>
           </a:xfrm>
           <a:prstGeom prst="rect">
             <a:avLst/>
@@ -8789,30 +9899,263 @@
           <a:p>
             <a:pPr algn="l"/>
             <a:r>
-              <a:rPr lang="nl-BE" sz="2800" b="1">
+              <a:rPr lang="nl-BE" sz="2800" b="1" dirty="0">
                 <a:solidFill>
                   <a:srgbClr val="1A1A1A"/>
                 </a:solidFill>
                 <a:latin typeface="Trebuchet MS"/>
               </a:rPr>
-              <a:t>Hoe spot je kansen?</a:t>
-            </a:r>
-          </a:p>
-        </p:txBody>
-      </p:sp>
-      <p:sp>
-        <p:nvSpPr>
-          <p:cNvPr id="50" name="C50"/>
-          <p:cNvSpPr/>
-          <p:nvPr/>
-        </p:nvSpPr>
-        <p:spPr>
-          <a:xfrm>
-            <a:off x="698500" y="1092200"/>
-            <a:ext cx="508000" cy="508000"/>
-          </a:xfrm>
-          <a:prstGeom prst="ellipse">
-            <a:avLst/>
+              <a:t>Probeer het uit en ervaar de winst</a:t>
+            </a:r>
+          </a:p>
+        </p:txBody>
+      </p:sp>
+      <p:sp>
+        <p:nvSpPr>
+          <p:cNvPr id="50" name="R50"/>
+          <p:cNvSpPr/>
+          <p:nvPr/>
+        </p:nvSpPr>
+        <p:spPr>
+          <a:xfrm>
+            <a:off x="635000" y="1485900"/>
+            <a:ext cx="5334000" cy="3111500"/>
+          </a:xfrm>
+          <a:prstGeom prst="roundRect">
+            <a:avLst>
+              <a:gd name="adj" fmla="val 5000"/>
+            </a:avLst>
+          </a:prstGeom>
+          <a:solidFill>
+            <a:srgbClr val="EDEFF2"/>
+          </a:solidFill>
+          <a:ln>
+            <a:noFill/>
+          </a:ln>
+        </p:spPr>
+        <p:txBody>
+          <a:bodyPr/>
+          <a:lstStyle/>
+          <a:p>
+            <a:endParaRPr lang="nl-NL"/>
+          </a:p>
+        </p:txBody>
+      </p:sp>
+      <p:sp>
+        <p:nvSpPr>
+          <p:cNvPr id="51" name="T51"/>
+          <p:cNvSpPr/>
+          <p:nvPr/>
+        </p:nvSpPr>
+        <p:spPr>
+          <a:xfrm>
+            <a:off x="698500" y="1245870"/>
+            <a:ext cx="5207000" cy="3300730"/>
+          </a:xfrm>
+          <a:prstGeom prst="rect">
+            <a:avLst/>
+          </a:prstGeom>
+          <a:noFill/>
+          <a:ln>
+            <a:noFill/>
+          </a:ln>
+        </p:spPr>
+        <p:txBody>
+          <a:bodyPr wrap="square" lIns="72000" tIns="54000" rIns="72000" bIns="54000" anchor="t"/>
+          <a:lstStyle/>
+          <a:p>
+            <a:pPr algn="l"/>
+            <a:endParaRPr lang="nl-NL" sz="1800" b="1" dirty="0">
+              <a:solidFill>
+                <a:srgbClr val="4A4A4A"/>
+              </a:solidFill>
+              <a:latin typeface="Trebuchet MS"/>
+            </a:endParaRPr>
+          </a:p>
+          <a:p>
+            <a:pPr algn="l">
+              <a:spcBef>
+                <a:spcPts val="400"/>
+              </a:spcBef>
+            </a:pPr>
+            <a:r>
+              <a:rPr lang="nl-NL" sz="1600" i="1" dirty="0">
+                <a:solidFill>
+                  <a:srgbClr val="3D3D3D"/>
+                </a:solidFill>
+                <a:latin typeface="Calibri"/>
+              </a:rPr>
+              <a:t>"Het werkt zo, ik ben het zo gewoon"</a:t>
+            </a:r>
+          </a:p>
+          <a:p>
+            <a:pPr algn="l">
+              <a:spcBef>
+                <a:spcPts val="100"/>
+              </a:spcBef>
+            </a:pPr>
+            <a:r>
+              <a:rPr lang="nl-NL" sz="1400" dirty="0">
+                <a:solidFill>
+                  <a:srgbClr val="6B6B6B"/>
+                </a:solidFill>
+                <a:latin typeface="Calibri"/>
+              </a:rPr>
+              <a:t>Repetitieve taken voelen als normaal — maar ze vreten je tijd.</a:t>
+            </a:r>
+          </a:p>
+          <a:p>
+            <a:pPr algn="l">
+              <a:spcBef>
+                <a:spcPts val="400"/>
+              </a:spcBef>
+            </a:pPr>
+            <a:endParaRPr lang="nl-NL" sz="1600" i="1" dirty="0">
+              <a:solidFill>
+                <a:srgbClr val="3D3D3D"/>
+              </a:solidFill>
+              <a:latin typeface="Calibri"/>
+            </a:endParaRPr>
+          </a:p>
+          <a:p>
+            <a:pPr algn="l">
+              <a:spcBef>
+                <a:spcPts val="400"/>
+              </a:spcBef>
+            </a:pPr>
+            <a:r>
+              <a:rPr lang="nl-NL" sz="1600" i="1" dirty="0">
+                <a:solidFill>
+                  <a:srgbClr val="3D3D3D"/>
+                </a:solidFill>
+                <a:latin typeface="Calibri"/>
+              </a:rPr>
+              <a:t>"Ik heb het al geprobeerd, tevergeefs"</a:t>
+            </a:r>
+          </a:p>
+          <a:p>
+            <a:pPr algn="l">
+              <a:spcBef>
+                <a:spcPts val="100"/>
+              </a:spcBef>
+            </a:pPr>
+            <a:r>
+              <a:rPr lang="nl-NL" sz="1400" dirty="0">
+                <a:solidFill>
+                  <a:srgbClr val="6B6B6B"/>
+                </a:solidFill>
+                <a:latin typeface="Calibri"/>
+              </a:rPr>
+              <a:t>Technologie evolueert snel. Wat gisteren niet lukte, kan vandaag wel.</a:t>
+            </a:r>
+          </a:p>
+          <a:p>
+            <a:pPr algn="l">
+              <a:spcBef>
+                <a:spcPts val="400"/>
+              </a:spcBef>
+            </a:pPr>
+            <a:endParaRPr lang="nl-NL" sz="1600" i="1" dirty="0">
+              <a:solidFill>
+                <a:srgbClr val="3D3D3D"/>
+              </a:solidFill>
+              <a:latin typeface="Calibri"/>
+            </a:endParaRPr>
+          </a:p>
+          <a:p>
+            <a:pPr algn="l">
+              <a:spcBef>
+                <a:spcPts val="400"/>
+              </a:spcBef>
+            </a:pPr>
+            <a:r>
+              <a:rPr lang="nl-NL" sz="1600" i="1" dirty="0">
+                <a:solidFill>
+                  <a:srgbClr val="3D3D3D"/>
+                </a:solidFill>
+                <a:latin typeface="Calibri"/>
+              </a:rPr>
+              <a:t>"Ik weet niet waar ik moet beginnen"</a:t>
+            </a:r>
+          </a:p>
+          <a:p>
+            <a:pPr algn="l">
+              <a:spcBef>
+                <a:spcPts val="100"/>
+              </a:spcBef>
+            </a:pPr>
+            <a:r>
+              <a:rPr lang="nl-NL" sz="1400" dirty="0">
+                <a:solidFill>
+                  <a:srgbClr val="6B6B6B"/>
+                </a:solidFill>
+                <a:latin typeface="Calibri"/>
+              </a:rPr>
+              <a:t>Dat hoeft ook niet — samen kijken we waar de winst zit.</a:t>
+            </a:r>
+          </a:p>
+          <a:p>
+            <a:pPr algn="l">
+              <a:spcBef>
+                <a:spcPts val="400"/>
+              </a:spcBef>
+            </a:pPr>
+            <a:endParaRPr lang="nl-NL" sz="1600" i="1" dirty="0">
+              <a:solidFill>
+                <a:srgbClr val="3D3D3D"/>
+              </a:solidFill>
+              <a:latin typeface="Calibri"/>
+            </a:endParaRPr>
+          </a:p>
+          <a:p>
+            <a:pPr algn="l">
+              <a:spcBef>
+                <a:spcPts val="400"/>
+              </a:spcBef>
+            </a:pPr>
+            <a:r>
+              <a:rPr lang="nl-NL" sz="1600" i="1" dirty="0">
+                <a:solidFill>
+                  <a:srgbClr val="3D3D3D"/>
+                </a:solidFill>
+                <a:latin typeface="Calibri"/>
+              </a:rPr>
+              <a:t>"Kost dat niet veel geld?"</a:t>
+            </a:r>
+          </a:p>
+          <a:p>
+            <a:pPr algn="l">
+              <a:spcBef>
+                <a:spcPts val="100"/>
+              </a:spcBef>
+            </a:pPr>
+            <a:r>
+              <a:rPr lang="nl-NL" sz="1400" dirty="0">
+                <a:solidFill>
+                  <a:srgbClr val="6B6B6B"/>
+                </a:solidFill>
+                <a:latin typeface="Calibri"/>
+              </a:rPr>
+              <a:t>We starten klein en afgelijnd. Geen grote investeringen nodig.</a:t>
+            </a:r>
+          </a:p>
+        </p:txBody>
+      </p:sp>
+      <p:sp>
+        <p:nvSpPr>
+          <p:cNvPr id="52" name="R52"/>
+          <p:cNvSpPr/>
+          <p:nvPr/>
+        </p:nvSpPr>
+        <p:spPr>
+          <a:xfrm>
+            <a:off x="6197600" y="1485900"/>
+            <a:ext cx="2476500" cy="3111500"/>
+          </a:xfrm>
+          <a:prstGeom prst="roundRect">
+            <a:avLst>
+              <a:gd name="adj" fmla="val 5000"/>
+            </a:avLst>
           </a:prstGeom>
           <a:solidFill>
             <a:srgbClr val="5B8DB8"/>
@@ -8822,140 +10165,122 @@
           </a:ln>
         </p:spPr>
         <p:txBody>
-          <a:bodyPr wrap="none" lIns="0" tIns="0" rIns="0" bIns="0" anchor="ctr"/>
-          <a:lstStyle/>
-          <a:p>
-            <a:pPr algn="ctr"/>
-            <a:r>
-              <a:rPr lang="nl-NL" sz="1800" b="1" dirty="0">
+          <a:bodyPr/>
+          <a:lstStyle/>
+          <a:p>
+            <a:endParaRPr lang="nl-NL"/>
+          </a:p>
+        </p:txBody>
+      </p:sp>
+      <p:sp>
+        <p:nvSpPr>
+          <p:cNvPr id="53" name="T53"/>
+          <p:cNvSpPr/>
+          <p:nvPr/>
+        </p:nvSpPr>
+        <p:spPr>
+          <a:xfrm>
+            <a:off x="6261100" y="1600200"/>
+            <a:ext cx="2349500" cy="2837180"/>
+          </a:xfrm>
+          <a:prstGeom prst="rect">
+            <a:avLst/>
+          </a:prstGeom>
+          <a:noFill/>
+          <a:ln>
+            <a:noFill/>
+          </a:ln>
+        </p:spPr>
+        <p:txBody>
+          <a:bodyPr wrap="square" lIns="72000" tIns="54000" rIns="72000" bIns="54000" anchor="ctr"/>
+          <a:lstStyle/>
+          <a:p>
+            <a:pPr algn="ctr">
+              <a:spcBef>
+                <a:spcPts val="300"/>
+              </a:spcBef>
+            </a:pPr>
+            <a:r>
+              <a:rPr lang="nl-NL" sz="1800" dirty="0">
                 <a:solidFill>
                   <a:srgbClr val="FFFFFF"/>
                 </a:solidFill>
-                <a:latin typeface="Trebuchet MS"/>
-              </a:rPr>
-              <a:t>1</a:t>
-            </a:r>
-          </a:p>
-        </p:txBody>
-      </p:sp>
-      <p:sp>
-        <p:nvSpPr>
-          <p:cNvPr id="51" name="T51"/>
-          <p:cNvSpPr/>
-          <p:nvPr/>
-        </p:nvSpPr>
-        <p:spPr>
-          <a:xfrm>
-            <a:off x="1371600" y="1054100"/>
-            <a:ext cx="7048500" cy="330200"/>
-          </a:xfrm>
-          <a:prstGeom prst="rect">
-            <a:avLst/>
-          </a:prstGeom>
-          <a:noFill/>
-          <a:ln>
-            <a:noFill/>
-          </a:ln>
-        </p:spPr>
-        <p:txBody>
-          <a:bodyPr wrap="square" lIns="36000" tIns="0" rIns="36000" bIns="0" anchor="ctr"/>
-          <a:lstStyle/>
-          <a:p>
-            <a:pPr algn="l"/>
-            <a:r>
-              <a:rPr lang="nl-NL" sz="1700" b="1" dirty="0">
-                <a:solidFill>
-                  <a:srgbClr val="1A1A1A"/>
-                </a:solidFill>
-                <a:latin typeface="Trebuchet MS"/>
-              </a:rPr>
-              <a:t>Hou een week bij wat je doet</a:t>
-            </a:r>
-          </a:p>
-        </p:txBody>
-      </p:sp>
-      <p:sp>
-        <p:nvSpPr>
-          <p:cNvPr id="52" name="T52"/>
-          <p:cNvSpPr/>
-          <p:nvPr/>
-        </p:nvSpPr>
-        <p:spPr>
-          <a:xfrm>
-            <a:off x="1371600" y="1421939"/>
-            <a:ext cx="7048500" cy="330200"/>
-          </a:xfrm>
-          <a:prstGeom prst="rect">
-            <a:avLst/>
-          </a:prstGeom>
-          <a:noFill/>
-          <a:ln>
-            <a:noFill/>
-          </a:ln>
-        </p:spPr>
-        <p:txBody>
-          <a:bodyPr wrap="square" lIns="36000" tIns="0" rIns="36000" bIns="0" anchor="ctr"/>
-          <a:lstStyle/>
-          <a:p>
-            <a:pPr algn="l"/>
-            <a:r>
-              <a:rPr lang="nl-NL" sz="1400" dirty="0">
-                <a:solidFill>
-                  <a:srgbClr val="4A4A4A"/>
-                </a:solidFill>
-                <a:latin typeface="Calibri"/>
-              </a:rPr>
-              <a:t>Welke tools gebruik je en waarom? </a:t>
-            </a:r>
-          </a:p>
-          <a:p>
-            <a:pPr algn="l"/>
-            <a:r>
-              <a:rPr lang="nl-NL" sz="1400" dirty="0">
-                <a:solidFill>
-                  <a:srgbClr val="4A4A4A"/>
-                </a:solidFill>
-                <a:latin typeface="Calibri"/>
-              </a:rPr>
-              <a:t>Waar heb je zelf het gevoel dat het anders kan?</a:t>
-            </a:r>
-          </a:p>
-        </p:txBody>
-      </p:sp>
-      <p:sp>
-        <p:nvSpPr>
-          <p:cNvPr id="53" name="C53"/>
-          <p:cNvSpPr/>
-          <p:nvPr/>
-        </p:nvSpPr>
-        <p:spPr>
-          <a:xfrm>
-            <a:off x="698500" y="1917700"/>
-            <a:ext cx="508000" cy="508000"/>
-          </a:xfrm>
-          <a:prstGeom prst="ellipse">
-            <a:avLst/>
-          </a:prstGeom>
-          <a:solidFill>
-            <a:srgbClr val="5B8DB8"/>
-          </a:solidFill>
-          <a:ln>
-            <a:noFill/>
-          </a:ln>
-        </p:spPr>
-        <p:txBody>
-          <a:bodyPr wrap="none" lIns="0" tIns="0" rIns="0" bIns="0" anchor="ctr"/>
-          <a:lstStyle/>
-          <a:p>
-            <a:pPr algn="ctr"/>
-            <a:r>
-              <a:rPr lang="nl-NL" sz="1800" b="1" dirty="0">
+                <a:latin typeface="Calibri"/>
+              </a:rPr>
+              <a:t>Start met iets kleins</a:t>
+            </a:r>
+            <a:endParaRPr lang="nl-NL" dirty="0">
+              <a:solidFill>
+                <a:srgbClr val="FFFFFF"/>
+              </a:solidFill>
+              <a:latin typeface="Calibri"/>
+            </a:endParaRPr>
+          </a:p>
+          <a:p>
+            <a:pPr algn="ctr">
+              <a:spcBef>
+                <a:spcPts val="300"/>
+              </a:spcBef>
+            </a:pPr>
+            <a:endParaRPr lang="nl-NL" sz="1800" dirty="0">
+              <a:solidFill>
+                <a:srgbClr val="FFFFFF"/>
+              </a:solidFill>
+              <a:latin typeface="Calibri"/>
+            </a:endParaRPr>
+          </a:p>
+          <a:p>
+            <a:pPr algn="ctr">
+              <a:spcBef>
+                <a:spcPts val="300"/>
+              </a:spcBef>
+            </a:pPr>
+            <a:r>
+              <a:rPr lang="nl-NL" dirty="0">
                 <a:solidFill>
                   <a:srgbClr val="FFFFFF"/>
                 </a:solidFill>
-                <a:latin typeface="Trebuchet MS"/>
-              </a:rPr>
-              <a:t>2</a:t>
+                <a:latin typeface="Calibri"/>
+              </a:rPr>
+              <a:t>Je krijgt ongetwijfeld de smaak te pakken</a:t>
+            </a:r>
+          </a:p>
+          <a:p>
+            <a:pPr algn="ctr">
+              <a:spcBef>
+                <a:spcPts val="300"/>
+              </a:spcBef>
+            </a:pPr>
+            <a:endParaRPr lang="nl-NL" sz="1800" dirty="0">
+              <a:solidFill>
+                <a:srgbClr val="FFFFFF"/>
+              </a:solidFill>
+              <a:latin typeface="Calibri"/>
+            </a:endParaRPr>
+          </a:p>
+          <a:p>
+            <a:pPr algn="ctr">
+              <a:spcBef>
+                <a:spcPts val="100"/>
+              </a:spcBef>
+            </a:pPr>
+            <a:r>
+              <a:rPr lang="nl-NL" dirty="0">
+                <a:solidFill>
+                  <a:srgbClr val="FFFFFF"/>
+                </a:solidFill>
+                <a:latin typeface="Calibri"/>
+              </a:rPr>
+              <a:t>I</a:t>
+            </a:r>
+            <a:r>
+              <a:rPr lang="nl-NL" sz="1800" dirty="0">
+                <a:solidFill>
+                  <a:srgbClr val="FFFFFF"/>
+                </a:solidFill>
+                <a:latin typeface="Calibri"/>
+              </a:rPr>
+              <a:t>k help je graag verder</a:t>
             </a:r>
           </a:p>
         </p:txBody>
@@ -8963,346 +10288,6 @@
       <p:sp>
         <p:nvSpPr>
           <p:cNvPr id="54" name="T54"/>
-          <p:cNvSpPr/>
-          <p:nvPr/>
-        </p:nvSpPr>
-        <p:spPr>
-          <a:xfrm>
-            <a:off x="1371600" y="1879600"/>
-            <a:ext cx="7048500" cy="330200"/>
-          </a:xfrm>
-          <a:prstGeom prst="rect">
-            <a:avLst/>
-          </a:prstGeom>
-          <a:noFill/>
-          <a:ln>
-            <a:noFill/>
-          </a:ln>
-        </p:spPr>
-        <p:txBody>
-          <a:bodyPr wrap="square" lIns="36000" tIns="0" rIns="36000" bIns="0" anchor="ctr"/>
-          <a:lstStyle/>
-          <a:p>
-            <a:pPr algn="l"/>
-            <a:r>
-              <a:rPr lang="nl-NL" sz="1700" b="1" dirty="0">
-                <a:solidFill>
-                  <a:srgbClr val="1A1A1A"/>
-                </a:solidFill>
-                <a:latin typeface="Trebuchet MS"/>
-              </a:rPr>
-              <a:t>Omschrijf jouw 'probleem'</a:t>
-            </a:r>
-          </a:p>
-        </p:txBody>
-      </p:sp>
-      <p:sp>
-        <p:nvSpPr>
-          <p:cNvPr id="55" name="T55"/>
-          <p:cNvSpPr/>
-          <p:nvPr/>
-        </p:nvSpPr>
-        <p:spPr>
-          <a:xfrm>
-            <a:off x="1371600" y="2222500"/>
-            <a:ext cx="7048500" cy="330200"/>
-          </a:xfrm>
-          <a:prstGeom prst="rect">
-            <a:avLst/>
-          </a:prstGeom>
-          <a:noFill/>
-          <a:ln>
-            <a:noFill/>
-          </a:ln>
-        </p:spPr>
-        <p:txBody>
-          <a:bodyPr wrap="square" lIns="36000" tIns="0" rIns="36000" bIns="0" anchor="ctr"/>
-          <a:lstStyle/>
-          <a:p>
-            <a:pPr algn="l"/>
-            <a:r>
-              <a:rPr lang="nl-NL" sz="1400" dirty="0">
-                <a:solidFill>
-                  <a:srgbClr val="4A4A4A"/>
-                </a:solidFill>
-                <a:latin typeface="Calibri"/>
-              </a:rPr>
-              <a:t>Wat zou je graag anders zien? Wat frustreert je?</a:t>
-            </a:r>
-          </a:p>
-        </p:txBody>
-      </p:sp>
-      <p:sp>
-        <p:nvSpPr>
-          <p:cNvPr id="56" name="C56"/>
-          <p:cNvSpPr/>
-          <p:nvPr/>
-        </p:nvSpPr>
-        <p:spPr>
-          <a:xfrm>
-            <a:off x="698500" y="2743200"/>
-            <a:ext cx="508000" cy="508000"/>
-          </a:xfrm>
-          <a:prstGeom prst="ellipse">
-            <a:avLst/>
-          </a:prstGeom>
-          <a:solidFill>
-            <a:srgbClr val="5B8DB8"/>
-          </a:solidFill>
-          <a:ln>
-            <a:noFill/>
-          </a:ln>
-        </p:spPr>
-        <p:txBody>
-          <a:bodyPr wrap="none" lIns="0" tIns="0" rIns="0" bIns="0" anchor="ctr"/>
-          <a:lstStyle/>
-          <a:p>
-            <a:pPr algn="ctr"/>
-            <a:r>
-              <a:rPr lang="nl-NL" sz="1800" b="1" dirty="0">
-                <a:solidFill>
-                  <a:srgbClr val="FFFFFF"/>
-                </a:solidFill>
-                <a:latin typeface="Trebuchet MS"/>
-              </a:rPr>
-              <a:t>3</a:t>
-            </a:r>
-          </a:p>
-        </p:txBody>
-      </p:sp>
-      <p:sp>
-        <p:nvSpPr>
-          <p:cNvPr id="57" name="T57"/>
-          <p:cNvSpPr/>
-          <p:nvPr/>
-        </p:nvSpPr>
-        <p:spPr>
-          <a:xfrm>
-            <a:off x="1371600" y="2705100"/>
-            <a:ext cx="7048500" cy="330200"/>
-          </a:xfrm>
-          <a:prstGeom prst="rect">
-            <a:avLst/>
-          </a:prstGeom>
-          <a:noFill/>
-          <a:ln>
-            <a:noFill/>
-          </a:ln>
-        </p:spPr>
-        <p:txBody>
-          <a:bodyPr wrap="square" lIns="36000" tIns="0" rIns="36000" bIns="0" anchor="ctr"/>
-          <a:lstStyle/>
-          <a:p>
-            <a:pPr algn="l"/>
-            <a:r>
-              <a:rPr lang="nl-NL" sz="1700" b="1" dirty="0">
-                <a:solidFill>
-                  <a:srgbClr val="1A1A1A"/>
-                </a:solidFill>
-                <a:latin typeface="Trebuchet MS"/>
-              </a:rPr>
-              <a:t>Denk in A → B</a:t>
-            </a:r>
-          </a:p>
-        </p:txBody>
-      </p:sp>
-      <p:sp>
-        <p:nvSpPr>
-          <p:cNvPr id="58" name="T58"/>
-          <p:cNvSpPr/>
-          <p:nvPr/>
-        </p:nvSpPr>
-        <p:spPr>
-          <a:xfrm>
-            <a:off x="1371600" y="3048000"/>
-            <a:ext cx="7048500" cy="330200"/>
-          </a:xfrm>
-          <a:prstGeom prst="rect">
-            <a:avLst/>
-          </a:prstGeom>
-          <a:noFill/>
-          <a:ln>
-            <a:noFill/>
-          </a:ln>
-        </p:spPr>
-        <p:txBody>
-          <a:bodyPr wrap="square" lIns="36000" tIns="0" rIns="36000" bIns="0" anchor="ctr"/>
-          <a:lstStyle/>
-          <a:p>
-            <a:pPr algn="l"/>
-            <a:r>
-              <a:rPr lang="nl-NL" sz="1400" dirty="0">
-                <a:solidFill>
-                  <a:srgbClr val="4A4A4A"/>
-                </a:solidFill>
-                <a:latin typeface="Calibri"/>
-              </a:rPr>
-              <a:t>Waar sta je nu (A) en waar wil je naartoe (B)?</a:t>
-            </a:r>
-          </a:p>
-        </p:txBody>
-      </p:sp>
-      <p:sp>
-        <p:nvSpPr>
-          <p:cNvPr id="59" name="C59"/>
-          <p:cNvSpPr/>
-          <p:nvPr/>
-        </p:nvSpPr>
-        <p:spPr>
-          <a:xfrm>
-            <a:off x="698500" y="3568700"/>
-            <a:ext cx="508000" cy="508000"/>
-          </a:xfrm>
-          <a:prstGeom prst="ellipse">
-            <a:avLst/>
-          </a:prstGeom>
-          <a:solidFill>
-            <a:srgbClr val="5B8DB8"/>
-          </a:solidFill>
-          <a:ln>
-            <a:noFill/>
-          </a:ln>
-        </p:spPr>
-        <p:txBody>
-          <a:bodyPr wrap="none" lIns="0" tIns="0" rIns="0" bIns="0" anchor="ctr"/>
-          <a:lstStyle/>
-          <a:p>
-            <a:pPr algn="ctr"/>
-            <a:r>
-              <a:rPr lang="nl-NL" sz="1800" b="1" dirty="0">
-                <a:solidFill>
-                  <a:srgbClr val="FFFFFF"/>
-                </a:solidFill>
-                <a:latin typeface="Trebuchet MS"/>
-              </a:rPr>
-              <a:t>4</a:t>
-            </a:r>
-          </a:p>
-        </p:txBody>
-      </p:sp>
-      <p:sp>
-        <p:nvSpPr>
-          <p:cNvPr id="60" name="T60"/>
-          <p:cNvSpPr/>
-          <p:nvPr/>
-        </p:nvSpPr>
-        <p:spPr>
-          <a:xfrm>
-            <a:off x="1371600" y="3530600"/>
-            <a:ext cx="7048500" cy="330200"/>
-          </a:xfrm>
-          <a:prstGeom prst="rect">
-            <a:avLst/>
-          </a:prstGeom>
-          <a:noFill/>
-          <a:ln>
-            <a:noFill/>
-          </a:ln>
-        </p:spPr>
-        <p:txBody>
-          <a:bodyPr wrap="square" lIns="36000" tIns="0" rIns="36000" bIns="0" anchor="ctr"/>
-          <a:lstStyle/>
-          <a:p>
-            <a:pPr algn="l"/>
-            <a:r>
-              <a:rPr lang="nl-NL" sz="1700" b="1" dirty="0">
-                <a:solidFill>
-                  <a:srgbClr val="1A1A1A"/>
-                </a:solidFill>
-                <a:latin typeface="Trebuchet MS"/>
-              </a:rPr>
-              <a:t>Geef context en wens</a:t>
-            </a:r>
-          </a:p>
-        </p:txBody>
-      </p:sp>
-      <p:sp>
-        <p:nvSpPr>
-          <p:cNvPr id="61" name="T61"/>
-          <p:cNvSpPr/>
-          <p:nvPr/>
-        </p:nvSpPr>
-        <p:spPr>
-          <a:xfrm>
-            <a:off x="1371600" y="3890126"/>
-            <a:ext cx="7048500" cy="330200"/>
-          </a:xfrm>
-          <a:prstGeom prst="rect">
-            <a:avLst/>
-          </a:prstGeom>
-          <a:noFill/>
-          <a:ln>
-            <a:noFill/>
-          </a:ln>
-        </p:spPr>
-        <p:txBody>
-          <a:bodyPr wrap="square" lIns="36000" tIns="0" rIns="36000" bIns="0" anchor="ctr"/>
-          <a:lstStyle/>
-          <a:p>
-            <a:pPr algn="l"/>
-            <a:r>
-              <a:rPr lang="nl-NL" sz="1400" dirty="0">
-                <a:solidFill>
-                  <a:srgbClr val="4A4A4A"/>
-                </a:solidFill>
-                <a:latin typeface="Calibri"/>
-              </a:rPr>
-              <a:t>Waarom? Wat gebeurt voor A en na B? </a:t>
-            </a:r>
-          </a:p>
-          <a:p>
-            <a:pPr algn="l"/>
-            <a:r>
-              <a:rPr lang="nl-NL" sz="1400" dirty="0">
-                <a:solidFill>
-                  <a:srgbClr val="4A4A4A"/>
-                </a:solidFill>
-                <a:latin typeface="Calibri"/>
-              </a:rPr>
-              <a:t>Wat is je ideale situatie? Is B de bestemming?</a:t>
-            </a:r>
-          </a:p>
-        </p:txBody>
-      </p:sp>
-      <p:sp>
-        <p:nvSpPr>
-          <p:cNvPr id="62" name="T62"/>
-          <p:cNvSpPr/>
-          <p:nvPr/>
-        </p:nvSpPr>
-        <p:spPr>
-          <a:xfrm>
-            <a:off x="635000" y="4502266"/>
-            <a:ext cx="7772400" cy="330200"/>
-          </a:xfrm>
-          <a:prstGeom prst="rect">
-            <a:avLst/>
-          </a:prstGeom>
-          <a:noFill/>
-          <a:ln>
-            <a:noFill/>
-          </a:ln>
-        </p:spPr>
-        <p:txBody>
-          <a:bodyPr wrap="square" lIns="36000" tIns="0" rIns="36000" bIns="0" anchor="ctr"/>
-          <a:lstStyle/>
-          <a:p>
-            <a:pPr algn="l"/>
-            <a:r>
-              <a:rPr lang="nl-NL" sz="1500" i="1" dirty="0">
-                <a:solidFill>
-                  <a:srgbClr val="2C5F7C"/>
-                </a:solidFill>
-                <a:latin typeface="Calibri"/>
-              </a:rPr>
-              <a:t>💡 Tip: Hoog resultaat = (brede context + specifieke input) * iteratie</a:t>
-            </a:r>
-          </a:p>
-        </p:txBody>
-      </p:sp>
-      <p:sp>
-        <p:nvSpPr>
-          <p:cNvPr id="63" name="T63"/>
           <p:cNvSpPr/>
           <p:nvPr/>
         </p:nvSpPr>
@@ -9320,10 +10305,10 @@
           </a:ln>
         </p:spPr>
         <p:txBody>
-          <a:bodyPr wrap="square" lIns="36000" tIns="0" rIns="36000" bIns="0" anchor="ctr"/>
-          <a:lstStyle/>
-          <a:p>
-            <a:pPr algn="l"/>
+          <a:bodyPr wrap="square" lIns="72000" tIns="54000" rIns="72000" bIns="54000" anchor="ctr"/>
+          <a:lstStyle/>
+          <a:p>
+            <a:pPr algn="r"/>
             <a:r>
               <a:rPr lang="nl-NL" sz="1400" dirty="0">
                 <a:solidFill>
@@ -9331,62 +10316,15 @@
                 </a:solidFill>
                 <a:latin typeface="Calibri"/>
               </a:rPr>
-              <a:t>5</a:t>
-            </a:r>
-          </a:p>
-        </p:txBody>
-      </p:sp>
-      <p:pic>
-        <p:nvPicPr>
-          <p:cNvPr id="3074" name="Picture 2" descr="Doodle plan icon hand drawn infographic notepaper piece to do list project  planning 1 2 3 steps | Premium Vector">
-            <a:extLst>
-              <a:ext uri="{FF2B5EF4-FFF2-40B4-BE49-F238E27FC236}">
-                <a16:creationId xmlns:a16="http://schemas.microsoft.com/office/drawing/2014/main" id="{CDDD4955-B53E-45D2-7B06-95EFC3998882}"/>
-              </a:ext>
-            </a:extLst>
-          </p:cNvPr>
-          <p:cNvPicPr>
-            <a:picLocks noChangeAspect="1" noChangeArrowheads="1"/>
-          </p:cNvPicPr>
-          <p:nvPr/>
-        </p:nvPicPr>
-        <p:blipFill>
-          <a:blip r:embed="rId2">
-            <a:extLst>
-              <a:ext uri="{28A0092B-C50C-407E-A947-70E740481C1C}">
-                <a14:useLocalDpi xmlns:a14="http://schemas.microsoft.com/office/drawing/2010/main" val="0"/>
-              </a:ext>
-            </a:extLst>
-          </a:blip>
-          <a:srcRect/>
-          <a:stretch>
-            <a:fillRect/>
-          </a:stretch>
-        </p:blipFill>
-        <p:spPr bwMode="auto">
-          <a:xfrm rot="826834">
-            <a:off x="6427816" y="1064029"/>
-            <a:ext cx="2716184" cy="2716184"/>
-          </a:xfrm>
-          <a:prstGeom prst="rect">
-            <a:avLst/>
-          </a:prstGeom>
-          <a:noFill/>
-          <a:extLst>
-            <a:ext uri="{909E8E84-426E-40DD-AFC4-6F175D3DCCD1}">
-              <a14:hiddenFill xmlns:a14="http://schemas.microsoft.com/office/drawing/2010/main">
-                <a:solidFill>
-                  <a:srgbClr val="FFFFFF"/>
-                </a:solidFill>
-              </a14:hiddenFill>
-            </a:ext>
-          </a:extLst>
-        </p:spPr>
-      </p:pic>
+              <a:t>4</a:t>
+            </a:r>
+          </a:p>
+        </p:txBody>
+      </p:sp>
     </p:spTree>
     <p:extLst>
       <p:ext uri="{BB962C8B-B14F-4D97-AF65-F5344CB8AC3E}">
-        <p14:creationId xmlns:p14="http://schemas.microsoft.com/office/powerpoint/2010/main" val="276683111"/>
+        <p14:creationId xmlns:p14="http://schemas.microsoft.com/office/powerpoint/2010/main" val="535605839"/>
       </p:ext>
     </p:extLst>
   </p:cSld>
@@ -9397,454 +10335,6 @@
 </file>
 
 <file path=ppt/slides/slide8.xml><?xml version="1.0" encoding="utf-8"?>
-<p:sld xmlns:a="http://schemas.openxmlformats.org/drawingml/2006/main" xmlns:r="http://schemas.openxmlformats.org/officeDocument/2006/relationships" xmlns:p="http://schemas.openxmlformats.org/presentationml/2006/main">
-  <p:cSld>
-    <p:spTree>
-      <p:nvGrpSpPr>
-        <p:cNvPr id="1" name="">
-          <a:extLst>
-            <a:ext uri="{FF2B5EF4-FFF2-40B4-BE49-F238E27FC236}">
-              <a16:creationId xmlns:a16="http://schemas.microsoft.com/office/drawing/2014/main" id="{8D50EC0A-F7B9-98E7-5368-A4B5067823C1}"/>
-            </a:ext>
-          </a:extLst>
-        </p:cNvPr>
-        <p:cNvGrpSpPr/>
-        <p:nvPr/>
-      </p:nvGrpSpPr>
-      <p:grpSpPr>
-        <a:xfrm>
-          <a:off x="0" y="0"/>
-          <a:ext cx="0" cy="0"/>
-          <a:chOff x="0" y="0"/>
-          <a:chExt cx="0" cy="0"/>
-        </a:xfrm>
-      </p:grpSpPr>
-      <p:sp>
-        <p:nvSpPr>
-          <p:cNvPr id="2" name="Rechthoek 1">
-            <a:extLst>
-              <a:ext uri="{FF2B5EF4-FFF2-40B4-BE49-F238E27FC236}">
-                <a16:creationId xmlns:a16="http://schemas.microsoft.com/office/drawing/2014/main" id="{95AD3011-F4C5-3F4C-4852-B95357D5653D}"/>
-              </a:ext>
-            </a:extLst>
-          </p:cNvPr>
-          <p:cNvSpPr/>
-          <p:nvPr/>
-        </p:nvSpPr>
-        <p:spPr>
-          <a:xfrm>
-            <a:off x="0" y="0"/>
-            <a:ext cx="9144000" cy="114300"/>
-          </a:xfrm>
-          <a:prstGeom prst="rect">
-            <a:avLst/>
-          </a:prstGeom>
-          <a:solidFill>
-            <a:srgbClr val="5B8DB8"/>
-          </a:solidFill>
-          <a:ln w="12700" cap="flat" cmpd="sng" algn="ctr">
-            <a:noFill/>
-            <a:prstDash val="solid"/>
-            <a:miter lim="800000"/>
-          </a:ln>
-        </p:spPr>
-        <p:style>
-          <a:lnRef idx="2">
-            <a:schemeClr val="accent1">
-              <a:shade val="15000"/>
-            </a:schemeClr>
-          </a:lnRef>
-          <a:fillRef idx="1">
-            <a:schemeClr val="accent1"/>
-          </a:fillRef>
-          <a:effectRef idx="0">
-            <a:schemeClr val="accent1"/>
-          </a:effectRef>
-          <a:fontRef idx="minor">
-            <a:schemeClr val="lt1"/>
-          </a:fontRef>
-        </p:style>
-        <p:txBody>
-          <a:bodyPr vertOverflow="clip" horzOverflow="clip" rtlCol="0" anchor="t"/>
-          <a:lstStyle/>
-          <a:p>
-            <a:pPr algn="l"/>
-            <a:endParaRPr lang="nl-BE"/>
-          </a:p>
-        </p:txBody>
-      </p:sp>
-      <p:sp>
-        <p:nvSpPr>
-          <p:cNvPr id="3" name="Tekstvak 2">
-            <a:extLst>
-              <a:ext uri="{FF2B5EF4-FFF2-40B4-BE49-F238E27FC236}">
-                <a16:creationId xmlns:a16="http://schemas.microsoft.com/office/drawing/2014/main" id="{4DB21216-F948-A7D1-65F4-E180C81D9B9A}"/>
-              </a:ext>
-            </a:extLst>
-          </p:cNvPr>
-          <p:cNvSpPr txBox="1"/>
-          <p:nvPr/>
-        </p:nvSpPr>
-        <p:spPr>
-          <a:xfrm>
-            <a:off x="635000" y="279400"/>
-            <a:ext cx="7772400" cy="523220"/>
-          </a:xfrm>
-          <a:prstGeom prst="rect">
-            <a:avLst/>
-          </a:prstGeom>
-          <a:noFill/>
-        </p:spPr>
-        <p:txBody>
-          <a:bodyPr vertOverflow="overflow" vert="horz" wrap="square" rtlCol="0" anchor="t">
-            <a:spAutoFit/>
-          </a:bodyPr>
-          <a:lstStyle/>
-          <a:p>
-            <a:pPr algn="l"/>
-            <a:r>
-              <a:rPr lang="nl-BE" sz="2800" b="1" dirty="0">
-                <a:solidFill>
-                  <a:srgbClr val="1A1A1A"/>
-                </a:solidFill>
-                <a:latin typeface="Trebuchet MS"/>
-              </a:rPr>
-              <a:t>Voorbeelden, ideeën..</a:t>
-            </a:r>
-          </a:p>
-        </p:txBody>
-      </p:sp>
-      <p:sp>
-        <p:nvSpPr>
-          <p:cNvPr id="6" name="Tekstvak 5">
-            <a:extLst>
-              <a:ext uri="{FF2B5EF4-FFF2-40B4-BE49-F238E27FC236}">
-                <a16:creationId xmlns:a16="http://schemas.microsoft.com/office/drawing/2014/main" id="{D6530194-C24D-9643-3C12-7C7FCFC9A852}"/>
-              </a:ext>
-            </a:extLst>
-          </p:cNvPr>
-          <p:cNvSpPr txBox="1"/>
-          <p:nvPr/>
-        </p:nvSpPr>
-        <p:spPr>
-          <a:xfrm>
-            <a:off x="601749" y="1209156"/>
-            <a:ext cx="7874000" cy="3539430"/>
-          </a:xfrm>
-          <a:prstGeom prst="rect">
-            <a:avLst/>
-          </a:prstGeom>
-          <a:noFill/>
-        </p:spPr>
-        <p:txBody>
-          <a:bodyPr vertOverflow="overflow" vert="horz" wrap="square" rtlCol="0" anchor="t">
-            <a:spAutoFit/>
-          </a:bodyPr>
-          <a:lstStyle/>
-          <a:p>
-            <a:pPr algn="l"/>
-            <a:r>
-              <a:rPr lang="nl-BE" sz="1600" dirty="0">
-                <a:solidFill>
-                  <a:srgbClr val="4A4A4A"/>
-                </a:solidFill>
-                <a:latin typeface="Calibri"/>
-                <a:cs typeface="Calibri"/>
-              </a:rPr>
-              <a:t>Specifieke optimalisaties</a:t>
-            </a:r>
-          </a:p>
-          <a:p>
-            <a:pPr marL="285750" indent="-285750" algn="l">
-              <a:buFont typeface="Arial" panose="020B0604020202020204" pitchFamily="34" charset="0"/>
-              <a:buChar char="•"/>
-            </a:pPr>
-            <a:r>
-              <a:rPr lang="nl-BE" sz="1600" dirty="0">
-                <a:solidFill>
-                  <a:srgbClr val="4A4A4A"/>
-                </a:solidFill>
-                <a:latin typeface="Calibri"/>
-                <a:cs typeface="Calibri"/>
-              </a:rPr>
-              <a:t>Data verwerken en interpreteren met Excel</a:t>
-            </a:r>
-          </a:p>
-          <a:p>
-            <a:pPr marL="285750" indent="-285750" algn="l">
-              <a:buFont typeface="Arial" panose="020B0604020202020204" pitchFamily="34" charset="0"/>
-              <a:buChar char="•"/>
-            </a:pPr>
-            <a:r>
-              <a:rPr lang="nl-BE" sz="1600" dirty="0">
-                <a:solidFill>
-                  <a:srgbClr val="4A4A4A"/>
-                </a:solidFill>
-                <a:latin typeface="Calibri"/>
-                <a:cs typeface="Calibri"/>
-              </a:rPr>
-              <a:t>Slides maken (visueel en inhoudelijk) met PowerPoint</a:t>
-            </a:r>
-          </a:p>
-          <a:p>
-            <a:pPr marL="285750" indent="-285750" algn="l">
-              <a:buFont typeface="Arial" panose="020B0604020202020204" pitchFamily="34" charset="0"/>
-              <a:buChar char="•"/>
-            </a:pPr>
-            <a:r>
-              <a:rPr lang="nl-BE" sz="1600" dirty="0">
-                <a:solidFill>
-                  <a:srgbClr val="4A4A4A"/>
-                </a:solidFill>
-                <a:latin typeface="Calibri"/>
-                <a:cs typeface="Calibri"/>
-              </a:rPr>
-              <a:t>Mailtjes automatiseren</a:t>
-            </a:r>
-          </a:p>
-          <a:p>
-            <a:pPr marL="285750" indent="-285750">
-              <a:buFont typeface="Arial" panose="020B0604020202020204" pitchFamily="34" charset="0"/>
-              <a:buChar char="•"/>
-            </a:pPr>
-            <a:r>
-              <a:rPr lang="nl-BE" sz="1600" dirty="0">
-                <a:solidFill>
-                  <a:srgbClr val="4A4A4A"/>
-                </a:solidFill>
-                <a:cs typeface="Calibri"/>
-              </a:rPr>
-              <a:t>Meetings transcriberen &amp; samenvatten</a:t>
-            </a:r>
-          </a:p>
-          <a:p>
-            <a:pPr marL="285750" indent="-285750">
-              <a:buFont typeface="Arial" panose="020B0604020202020204" pitchFamily="34" charset="0"/>
-              <a:buChar char="•"/>
-            </a:pPr>
-            <a:r>
-              <a:rPr lang="nl-BE" sz="1600" dirty="0">
-                <a:solidFill>
-                  <a:srgbClr val="4A4A4A"/>
-                </a:solidFill>
-                <a:latin typeface="Calibri"/>
-                <a:cs typeface="Calibri"/>
-              </a:rPr>
-              <a:t>…</a:t>
-            </a:r>
-          </a:p>
-          <a:p>
-            <a:pPr algn="l"/>
-            <a:endParaRPr lang="nl-BE" sz="1600" dirty="0">
-              <a:solidFill>
-                <a:srgbClr val="4A4A4A"/>
-              </a:solidFill>
-              <a:latin typeface="Calibri"/>
-              <a:cs typeface="Calibri"/>
-            </a:endParaRPr>
-          </a:p>
-          <a:p>
-            <a:pPr algn="l"/>
-            <a:r>
-              <a:rPr lang="nl-BE" sz="1600" dirty="0">
-                <a:solidFill>
-                  <a:srgbClr val="4A4A4A"/>
-                </a:solidFill>
-                <a:latin typeface="Calibri"/>
-                <a:cs typeface="Calibri"/>
-              </a:rPr>
-              <a:t>Zelforganisatie</a:t>
-            </a:r>
-          </a:p>
-          <a:p>
-            <a:pPr marL="285750" indent="-285750" algn="l">
-              <a:buFont typeface="Arial" panose="020B0604020202020204" pitchFamily="34" charset="0"/>
-              <a:buChar char="•"/>
-            </a:pPr>
-            <a:r>
-              <a:rPr lang="nl-BE" sz="1600" dirty="0">
-                <a:solidFill>
-                  <a:srgbClr val="4A4A4A"/>
-                </a:solidFill>
-                <a:latin typeface="Calibri"/>
-                <a:cs typeface="Calibri"/>
-              </a:rPr>
-              <a:t>Samen een plan opstellen</a:t>
-            </a:r>
-          </a:p>
-          <a:p>
-            <a:pPr marL="285750" indent="-285750" algn="l">
-              <a:buFont typeface="Arial" panose="020B0604020202020204" pitchFamily="34" charset="0"/>
-              <a:buChar char="•"/>
-            </a:pPr>
-            <a:r>
-              <a:rPr lang="nl-BE" sz="1600" dirty="0">
-                <a:solidFill>
-                  <a:srgbClr val="4A4A4A"/>
-                </a:solidFill>
-                <a:latin typeface="Calibri"/>
-                <a:cs typeface="Calibri"/>
-              </a:rPr>
-              <a:t>Ondersteuning (Outlook) agenda</a:t>
-            </a:r>
-          </a:p>
-          <a:p>
-            <a:pPr marL="285750" indent="-285750" algn="l">
-              <a:buFont typeface="Arial" panose="020B0604020202020204" pitchFamily="34" charset="0"/>
-              <a:buChar char="•"/>
-            </a:pPr>
-            <a:r>
-              <a:rPr lang="nl-BE" sz="1600" dirty="0">
-                <a:solidFill>
-                  <a:srgbClr val="4A4A4A"/>
-                </a:solidFill>
-                <a:latin typeface="Calibri"/>
-                <a:cs typeface="Calibri"/>
-              </a:rPr>
-              <a:t>Op jouw maat tips aangeboden krijgen</a:t>
-            </a:r>
-          </a:p>
-          <a:p>
-            <a:pPr marL="285750" indent="-285750" algn="l">
-              <a:buFont typeface="Arial" panose="020B0604020202020204" pitchFamily="34" charset="0"/>
-              <a:buChar char="•"/>
-            </a:pPr>
-            <a:r>
-              <a:rPr lang="nl-BE" sz="1600" dirty="0">
-                <a:solidFill>
-                  <a:srgbClr val="4A4A4A"/>
-                </a:solidFill>
-                <a:latin typeface="Calibri"/>
-                <a:cs typeface="Calibri"/>
-              </a:rPr>
-              <a:t>…</a:t>
-            </a:r>
-          </a:p>
-          <a:p>
-            <a:pPr marL="285750" indent="-285750" algn="l">
-              <a:buFont typeface="Arial" panose="020B0604020202020204" pitchFamily="34" charset="0"/>
-              <a:buChar char="•"/>
-            </a:pPr>
-            <a:endParaRPr lang="nl-BE" sz="1600" dirty="0">
-              <a:solidFill>
-                <a:srgbClr val="4A4A4A"/>
-              </a:solidFill>
-              <a:latin typeface="Calibri"/>
-              <a:cs typeface="Calibri"/>
-            </a:endParaRPr>
-          </a:p>
-          <a:p>
-            <a:pPr algn="l"/>
-            <a:r>
-              <a:rPr lang="nl-BE" sz="1600" dirty="0">
-                <a:solidFill>
-                  <a:srgbClr val="4A4A4A"/>
-                </a:solidFill>
-                <a:latin typeface="Calibri"/>
-                <a:cs typeface="Calibri"/>
-              </a:rPr>
-              <a:t>Tot zelf volledig op maat gemaakte tools – toegespitst op jouw specifieke noden</a:t>
-            </a:r>
-          </a:p>
-        </p:txBody>
-      </p:sp>
-      <p:sp>
-        <p:nvSpPr>
-          <p:cNvPr id="7" name="Tekstvak 6">
-            <a:extLst>
-              <a:ext uri="{FF2B5EF4-FFF2-40B4-BE49-F238E27FC236}">
-                <a16:creationId xmlns:a16="http://schemas.microsoft.com/office/drawing/2014/main" id="{0EEFE08C-54FF-0C7D-4C35-04C1B8D6AA39}"/>
-              </a:ext>
-            </a:extLst>
-          </p:cNvPr>
-          <p:cNvSpPr txBox="1"/>
-          <p:nvPr/>
-        </p:nvSpPr>
-        <p:spPr>
-          <a:xfrm>
-            <a:off x="8407400" y="4749800"/>
-            <a:ext cx="457200" cy="279400"/>
-          </a:xfrm>
-          <a:prstGeom prst="rect">
-            <a:avLst/>
-          </a:prstGeom>
-          <a:noFill/>
-        </p:spPr>
-        <p:txBody>
-          <a:bodyPr vertOverflow="overflow" vert="horz" wrap="square" rtlCol="0" anchor="t">
-            <a:spAutoFit/>
-          </a:bodyPr>
-          <a:lstStyle/>
-          <a:p>
-            <a:pPr algn="l"/>
-            <a:r>
-              <a:rPr lang="nl-BE" sz="1400">
-                <a:solidFill>
-                  <a:srgbClr val="AAAAAA"/>
-                </a:solidFill>
-                <a:latin typeface="Calibri"/>
-                <a:cs typeface="Calibri"/>
-              </a:rPr>
-              <a:t>2</a:t>
-            </a:r>
-          </a:p>
-        </p:txBody>
-      </p:sp>
-      <p:sp>
-        <p:nvSpPr>
-          <p:cNvPr id="8" name="Tekstvak 7">
-            <a:extLst>
-              <a:ext uri="{FF2B5EF4-FFF2-40B4-BE49-F238E27FC236}">
-                <a16:creationId xmlns:a16="http://schemas.microsoft.com/office/drawing/2014/main" id="{77C15C83-6FA1-2F7F-3346-37A45BDA64AC}"/>
-              </a:ext>
-            </a:extLst>
-          </p:cNvPr>
-          <p:cNvSpPr txBox="1"/>
-          <p:nvPr/>
-        </p:nvSpPr>
-        <p:spPr>
-          <a:xfrm>
-            <a:off x="5389643" y="3391911"/>
-            <a:ext cx="3687855" cy="523220"/>
-          </a:xfrm>
-          <a:prstGeom prst="rect">
-            <a:avLst/>
-          </a:prstGeom>
-          <a:noFill/>
-        </p:spPr>
-        <p:txBody>
-          <a:bodyPr vertOverflow="overflow" vert="horz" wrap="square" rtlCol="0" anchor="t">
-            <a:spAutoFit/>
-          </a:bodyPr>
-          <a:lstStyle/>
-          <a:p>
-            <a:pPr algn="l"/>
-            <a:r>
-              <a:rPr lang="nl-BE" sz="2800" b="1" dirty="0">
-                <a:solidFill>
-                  <a:srgbClr val="1A1A1A"/>
-                </a:solidFill>
-                <a:latin typeface="Trebuchet MS"/>
-              </a:rPr>
-              <a:t>..the sky is the limit</a:t>
-            </a:r>
-          </a:p>
-        </p:txBody>
-      </p:sp>
-    </p:spTree>
-    <p:extLst>
-      <p:ext uri="{BB962C8B-B14F-4D97-AF65-F5344CB8AC3E}">
-        <p14:creationId xmlns:p14="http://schemas.microsoft.com/office/powerpoint/2010/main" val="2572914434"/>
-      </p:ext>
-    </p:extLst>
-  </p:cSld>
-  <p:clrMapOvr>
-    <a:masterClrMapping/>
-  </p:clrMapOvr>
-</p:sld>
-</file>
-
-<file path=ppt/slides/slide9.xml><?xml version="1.0" encoding="utf-8"?>
 <p:sld xmlns:a="http://schemas.openxmlformats.org/drawingml/2006/main" xmlns:r="http://schemas.openxmlformats.org/officeDocument/2006/relationships" xmlns:p="http://schemas.openxmlformats.org/presentationml/2006/main">
   <p:cSld>
     <p:bg>
@@ -9873,7 +10363,13 @@
       </p:grpSpPr>
       <p:sp>
         <p:nvSpPr>
-          <p:cNvPr id="40" name="R40"/>
+          <p:cNvPr id="2" name="Rechthoek 1">
+            <a:extLst>
+              <a:ext uri="{FF2B5EF4-FFF2-40B4-BE49-F238E27FC236}">
+                <a16:creationId xmlns:a16="http://schemas.microsoft.com/office/drawing/2014/main" id="{9CD54D08-A751-2D4D-ADF7-CFD6C4808899}"/>
+              </a:ext>
+            </a:extLst>
+          </p:cNvPr>
           <p:cNvSpPr/>
           <p:nvPr/>
         </p:nvSpPr>
@@ -9883,6 +10379,95 @@
             <a:ext cx="9144000" cy="114300"/>
           </a:xfrm>
           <a:prstGeom prst="rect">
+            <a:avLst/>
+          </a:prstGeom>
+          <a:solidFill>
+            <a:srgbClr val="5B8DB8"/>
+          </a:solidFill>
+          <a:ln w="12700" cap="flat" cmpd="sng" algn="ctr">
+            <a:noFill/>
+            <a:prstDash val="solid"/>
+            <a:miter lim="800000"/>
+          </a:ln>
+        </p:spPr>
+        <p:style>
+          <a:lnRef idx="2">
+            <a:schemeClr val="accent1">
+              <a:shade val="15000"/>
+            </a:schemeClr>
+          </a:lnRef>
+          <a:fillRef idx="1">
+            <a:schemeClr val="accent1"/>
+          </a:fillRef>
+          <a:effectRef idx="0">
+            <a:schemeClr val="accent1"/>
+          </a:effectRef>
+          <a:fontRef idx="minor">
+            <a:schemeClr val="lt1"/>
+          </a:fontRef>
+        </p:style>
+        <p:txBody>
+          <a:bodyPr vertOverflow="clip" horzOverflow="clip" rtlCol="0" anchor="t"/>
+          <a:lstStyle/>
+          <a:p>
+            <a:pPr algn="l"/>
+            <a:endParaRPr lang="nl-BE"/>
+          </a:p>
+        </p:txBody>
+      </p:sp>
+      <p:sp>
+        <p:nvSpPr>
+          <p:cNvPr id="3" name="Tekstvak 2">
+            <a:extLst>
+              <a:ext uri="{FF2B5EF4-FFF2-40B4-BE49-F238E27FC236}">
+                <a16:creationId xmlns:a16="http://schemas.microsoft.com/office/drawing/2014/main" id="{2B4B305A-C9A6-5149-AE57-22EFB0BEC167}"/>
+              </a:ext>
+            </a:extLst>
+          </p:cNvPr>
+          <p:cNvSpPr txBox="1"/>
+          <p:nvPr/>
+        </p:nvSpPr>
+        <p:spPr>
+          <a:xfrm>
+            <a:off x="635000" y="279400"/>
+            <a:ext cx="7772400" cy="508000"/>
+          </a:xfrm>
+          <a:prstGeom prst="rect">
+            <a:avLst/>
+          </a:prstGeom>
+          <a:noFill/>
+        </p:spPr>
+        <p:txBody>
+          <a:bodyPr vertOverflow="overflow" vert="horz" wrap="square" rtlCol="0" anchor="t">
+            <a:spAutoFit/>
+          </a:bodyPr>
+          <a:lstStyle/>
+          <a:p>
+            <a:pPr algn="l"/>
+            <a:r>
+              <a:rPr lang="nl-BE" sz="2800" b="1">
+                <a:solidFill>
+                  <a:srgbClr val="1A1A1A"/>
+                </a:solidFill>
+                <a:latin typeface="Trebuchet MS"/>
+              </a:rPr>
+              <a:t>Hoe spot je kansen?</a:t>
+            </a:r>
+          </a:p>
+        </p:txBody>
+      </p:sp>
+      <p:sp>
+        <p:nvSpPr>
+          <p:cNvPr id="50" name="C50"/>
+          <p:cNvSpPr/>
+          <p:nvPr/>
+        </p:nvSpPr>
+        <p:spPr>
+          <a:xfrm>
+            <a:off x="698500" y="1092200"/>
+            <a:ext cx="508000" cy="508000"/>
+          </a:xfrm>
+          <a:prstGeom prst="ellipse">
             <a:avLst/>
           </a:prstGeom>
           <a:solidFill>
@@ -9893,23 +10478,32 @@
           </a:ln>
         </p:spPr>
         <p:txBody>
-          <a:bodyPr/>
-          <a:lstStyle/>
-          <a:p>
-            <a:endParaRPr lang="nl-NL"/>
-          </a:p>
-        </p:txBody>
-      </p:sp>
-      <p:sp>
-        <p:nvSpPr>
-          <p:cNvPr id="41" name="T41"/>
-          <p:cNvSpPr/>
-          <p:nvPr/>
-        </p:nvSpPr>
-        <p:spPr>
-          <a:xfrm>
-            <a:off x="635000" y="228600"/>
-            <a:ext cx="7772400" cy="508000"/>
+          <a:bodyPr wrap="none" lIns="0" tIns="0" rIns="0" bIns="0" anchor="ctr"/>
+          <a:lstStyle/>
+          <a:p>
+            <a:pPr algn="ctr"/>
+            <a:r>
+              <a:rPr lang="nl-NL" sz="1800" b="1" dirty="0">
+                <a:solidFill>
+                  <a:srgbClr val="FFFFFF"/>
+                </a:solidFill>
+                <a:latin typeface="Trebuchet MS"/>
+              </a:rPr>
+              <a:t>1</a:t>
+            </a:r>
+          </a:p>
+        </p:txBody>
+      </p:sp>
+      <p:sp>
+        <p:nvSpPr>
+          <p:cNvPr id="51" name="T51"/>
+          <p:cNvSpPr/>
+          <p:nvPr/>
+        </p:nvSpPr>
+        <p:spPr>
+          <a:xfrm>
+            <a:off x="1371600" y="1054100"/>
+            <a:ext cx="7048500" cy="330200"/>
           </a:xfrm>
           <a:prstGeom prst="rect">
             <a:avLst/>
@@ -9920,154 +10514,83 @@
           </a:ln>
         </p:spPr>
         <p:txBody>
-          <a:bodyPr wrap="square" lIns="54000" tIns="36000" rIns="54000" bIns="36000" anchor="ctr"/>
-          <a:lstStyle/>
-          <a:p>
-            <a:pPr algn="l"/>
-            <a:r>
-              <a:rPr lang="nl-NL" sz="2800" b="1" dirty="0">
+          <a:bodyPr wrap="square" lIns="36000" tIns="0" rIns="36000" bIns="0" anchor="ctr"/>
+          <a:lstStyle/>
+          <a:p>
+            <a:pPr algn="l"/>
+            <a:r>
+              <a:rPr lang="nl-NL" sz="1700" b="1" dirty="0">
                 <a:solidFill>
                   <a:srgbClr val="1A1A1A"/>
                 </a:solidFill>
                 <a:latin typeface="Trebuchet MS"/>
               </a:rPr>
-              <a:t>Proces: ondersteuning → zelfstandigheid</a:t>
-            </a:r>
-          </a:p>
-        </p:txBody>
-      </p:sp>
-      <p:sp>
-        <p:nvSpPr>
-          <p:cNvPr id="42" name="R42"/>
-          <p:cNvSpPr/>
-          <p:nvPr/>
-        </p:nvSpPr>
-        <p:spPr>
-          <a:xfrm>
-            <a:off x="734060" y="3368040"/>
-            <a:ext cx="2413000" cy="1079500"/>
-          </a:xfrm>
-          <a:prstGeom prst="roundRect">
-            <a:avLst>
-              <a:gd name="adj" fmla="val 6000"/>
-            </a:avLst>
-          </a:prstGeom>
-          <a:solidFill>
-            <a:srgbClr val="2C5F7C"/>
-          </a:solidFill>
+              <a:t>Hou een week bij wat je doet</a:t>
+            </a:r>
+          </a:p>
+        </p:txBody>
+      </p:sp>
+      <p:sp>
+        <p:nvSpPr>
+          <p:cNvPr id="52" name="T52"/>
+          <p:cNvSpPr/>
+          <p:nvPr/>
+        </p:nvSpPr>
+        <p:spPr>
+          <a:xfrm>
+            <a:off x="1371600" y="1421939"/>
+            <a:ext cx="7048500" cy="330200"/>
+          </a:xfrm>
+          <a:prstGeom prst="rect">
+            <a:avLst/>
+          </a:prstGeom>
+          <a:noFill/>
           <a:ln>
             <a:noFill/>
           </a:ln>
         </p:spPr>
         <p:txBody>
-          <a:bodyPr/>
-          <a:lstStyle/>
-          <a:p>
-            <a:endParaRPr lang="nl-NL"/>
-          </a:p>
-        </p:txBody>
-      </p:sp>
-      <p:sp>
-        <p:nvSpPr>
-          <p:cNvPr id="43" name="T43"/>
-          <p:cNvSpPr/>
-          <p:nvPr/>
-        </p:nvSpPr>
-        <p:spPr>
-          <a:xfrm>
-            <a:off x="734060" y="3368040"/>
-            <a:ext cx="2413000" cy="1079500"/>
-          </a:xfrm>
-          <a:prstGeom prst="rect">
-            <a:avLst/>
-          </a:prstGeom>
-          <a:noFill/>
-          <a:ln>
-            <a:noFill/>
-          </a:ln>
-        </p:spPr>
-        <p:txBody>
-          <a:bodyPr wrap="square" lIns="54000" tIns="36000" rIns="54000" bIns="36000" anchor="ctr"/>
-          <a:lstStyle/>
-          <a:p>
-            <a:pPr algn="ctr"/>
-            <a:r>
-              <a:rPr lang="nl-NL" sz="2000" b="1" dirty="0">
-                <a:solidFill>
-                  <a:srgbClr val="FFFFFF"/>
-                </a:solidFill>
-                <a:latin typeface="Trebuchet MS"/>
-              </a:rPr>
-              <a:t>Wim stuurt</a:t>
-            </a:r>
-          </a:p>
-          <a:p>
-            <a:pPr algn="ctr">
-              <a:spcBef>
-                <a:spcPts val="150"/>
-              </a:spcBef>
-            </a:pPr>
-            <a:r>
-              <a:rPr lang="nl-NL" sz="1300" dirty="0">
-                <a:solidFill>
-                  <a:srgbClr val="D6E6F2"/>
-                </a:solidFill>
-                <a:latin typeface="Calibri"/>
-              </a:rPr>
-              <a:t>Analyseren, opzetten, bouwen</a:t>
-            </a:r>
-          </a:p>
-        </p:txBody>
-      </p:sp>
-      <p:sp>
-        <p:nvSpPr>
-          <p:cNvPr id="44" name="A44"/>
-          <p:cNvSpPr/>
-          <p:nvPr/>
-        </p:nvSpPr>
-        <p:spPr>
-          <a:xfrm rot="-2700000">
-            <a:off x="2663190" y="2862581"/>
-            <a:ext cx="635000" cy="381000"/>
-          </a:xfrm>
-          <a:prstGeom prst="rightArrow">
-            <a:avLst>
-              <a:gd name="adj1" fmla="val 50000"/>
-              <a:gd name="adj2" fmla="val 50000"/>
-            </a:avLst>
-          </a:prstGeom>
-          <a:solidFill>
-            <a:srgbClr val="5B8DB8">
-              <a:alpha val="50000"/>
-            </a:srgbClr>
-          </a:solidFill>
-          <a:ln>
-            <a:noFill/>
-          </a:ln>
-        </p:spPr>
-        <p:txBody>
-          <a:bodyPr/>
-          <a:lstStyle/>
-          <a:p>
-            <a:endParaRPr lang="nl-NL"/>
-          </a:p>
-        </p:txBody>
-      </p:sp>
-      <p:sp>
-        <p:nvSpPr>
-          <p:cNvPr id="45" name="R45"/>
-          <p:cNvSpPr/>
-          <p:nvPr/>
-        </p:nvSpPr>
-        <p:spPr>
-          <a:xfrm>
-            <a:off x="3274060" y="2288540"/>
-            <a:ext cx="2413000" cy="1079500"/>
-          </a:xfrm>
-          <a:prstGeom prst="roundRect">
-            <a:avLst>
-              <a:gd name="adj" fmla="val 6000"/>
-            </a:avLst>
+          <a:bodyPr wrap="square" lIns="36000" tIns="0" rIns="36000" bIns="0" anchor="ctr"/>
+          <a:lstStyle/>
+          <a:p>
+            <a:pPr algn="l"/>
+            <a:r>
+              <a:rPr lang="nl-NL" sz="1400" dirty="0">
+                <a:solidFill>
+                  <a:srgbClr val="4A4A4A"/>
+                </a:solidFill>
+                <a:latin typeface="Calibri"/>
+              </a:rPr>
+              <a:t>Welke tools gebruik je en waarom? </a:t>
+            </a:r>
+          </a:p>
+          <a:p>
+            <a:pPr algn="l"/>
+            <a:r>
+              <a:rPr lang="nl-NL" sz="1400" dirty="0">
+                <a:solidFill>
+                  <a:srgbClr val="4A4A4A"/>
+                </a:solidFill>
+                <a:latin typeface="Calibri"/>
+              </a:rPr>
+              <a:t>Waar heb je zelf het gevoel dat het anders kan?</a:t>
+            </a:r>
+          </a:p>
+        </p:txBody>
+      </p:sp>
+      <p:sp>
+        <p:nvSpPr>
+          <p:cNvPr id="53" name="C53"/>
+          <p:cNvSpPr/>
+          <p:nvPr/>
+        </p:nvSpPr>
+        <p:spPr>
+          <a:xfrm>
+            <a:off x="698500" y="1917700"/>
+            <a:ext cx="508000" cy="508000"/>
+          </a:xfrm>
+          <a:prstGeom prst="ellipse">
+            <a:avLst/>
           </a:prstGeom>
           <a:solidFill>
             <a:srgbClr val="5B8DB8"/>
@@ -10077,23 +10600,32 @@
           </a:ln>
         </p:spPr>
         <p:txBody>
-          <a:bodyPr/>
-          <a:lstStyle/>
-          <a:p>
-            <a:endParaRPr lang="nl-NL"/>
-          </a:p>
-        </p:txBody>
-      </p:sp>
-      <p:sp>
-        <p:nvSpPr>
-          <p:cNvPr id="46" name="T46"/>
-          <p:cNvSpPr/>
-          <p:nvPr/>
-        </p:nvSpPr>
-        <p:spPr>
-          <a:xfrm>
-            <a:off x="3274060" y="2288540"/>
-            <a:ext cx="2413000" cy="1079500"/>
+          <a:bodyPr wrap="none" lIns="0" tIns="0" rIns="0" bIns="0" anchor="ctr"/>
+          <a:lstStyle/>
+          <a:p>
+            <a:pPr algn="ctr"/>
+            <a:r>
+              <a:rPr lang="nl-NL" sz="1800" b="1" dirty="0">
+                <a:solidFill>
+                  <a:srgbClr val="FFFFFF"/>
+                </a:solidFill>
+                <a:latin typeface="Trebuchet MS"/>
+              </a:rPr>
+              <a:t>2</a:t>
+            </a:r>
+          </a:p>
+        </p:txBody>
+      </p:sp>
+      <p:sp>
+        <p:nvSpPr>
+          <p:cNvPr id="54" name="T54"/>
+          <p:cNvSpPr/>
+          <p:nvPr/>
+        </p:nvSpPr>
+        <p:spPr>
+          <a:xfrm>
+            <a:off x="1371600" y="1879600"/>
+            <a:ext cx="7048500" cy="330200"/>
           </a:xfrm>
           <a:prstGeom prst="rect">
             <a:avLst/>
@@ -10104,113 +10636,216 @@
           </a:ln>
         </p:spPr>
         <p:txBody>
-          <a:bodyPr wrap="square" lIns="54000" tIns="36000" rIns="54000" bIns="36000" anchor="ctr"/>
-          <a:lstStyle/>
-          <a:p>
-            <a:pPr algn="ctr"/>
-            <a:r>
-              <a:rPr lang="nl-NL" sz="2000" b="1" dirty="0">
-                <a:solidFill>
-                  <a:srgbClr val="FFFFFF"/>
+          <a:bodyPr wrap="square" lIns="36000" tIns="0" rIns="36000" bIns="0" anchor="ctr"/>
+          <a:lstStyle/>
+          <a:p>
+            <a:pPr algn="l"/>
+            <a:r>
+              <a:rPr lang="nl-NL" sz="1700" b="1" dirty="0">
+                <a:solidFill>
+                  <a:srgbClr val="1A1A1A"/>
                 </a:solidFill>
                 <a:latin typeface="Trebuchet MS"/>
               </a:rPr>
-              <a:t>Wim begeleidt</a:t>
-            </a:r>
-          </a:p>
-          <a:p>
-            <a:pPr algn="ctr">
-              <a:spcBef>
-                <a:spcPts val="150"/>
-              </a:spcBef>
-            </a:pPr>
-            <a:r>
-              <a:rPr lang="nl-NL" sz="1300" dirty="0">
-                <a:solidFill>
-                  <a:srgbClr val="D6E6F2"/>
-                </a:solidFill>
-                <a:latin typeface="Calibri"/>
-              </a:rPr>
-              <a:t>Overdragen, uitleggen, coachen</a:t>
-            </a:r>
-          </a:p>
-        </p:txBody>
-      </p:sp>
-      <p:sp>
-        <p:nvSpPr>
-          <p:cNvPr id="47" name="A47"/>
-          <p:cNvSpPr/>
-          <p:nvPr/>
-        </p:nvSpPr>
-        <p:spPr>
-          <a:xfrm rot="-2700000">
-            <a:off x="5237480" y="1748790"/>
-            <a:ext cx="635000" cy="381000"/>
-          </a:xfrm>
-          <a:prstGeom prst="rightArrow">
-            <a:avLst>
-              <a:gd name="adj1" fmla="val 50000"/>
-              <a:gd name="adj2" fmla="val 50000"/>
-            </a:avLst>
+              <a:t>Omschrijf jouw 'probleem'</a:t>
+            </a:r>
+          </a:p>
+        </p:txBody>
+      </p:sp>
+      <p:sp>
+        <p:nvSpPr>
+          <p:cNvPr id="55" name="T55"/>
+          <p:cNvSpPr/>
+          <p:nvPr/>
+        </p:nvSpPr>
+        <p:spPr>
+          <a:xfrm>
+            <a:off x="1371600" y="2222500"/>
+            <a:ext cx="7048500" cy="330200"/>
+          </a:xfrm>
+          <a:prstGeom prst="rect">
+            <a:avLst/>
+          </a:prstGeom>
+          <a:noFill/>
+          <a:ln>
+            <a:noFill/>
+          </a:ln>
+        </p:spPr>
+        <p:txBody>
+          <a:bodyPr wrap="square" lIns="36000" tIns="0" rIns="36000" bIns="0" anchor="ctr"/>
+          <a:lstStyle/>
+          <a:p>
+            <a:pPr algn="l"/>
+            <a:r>
+              <a:rPr lang="nl-NL" sz="1400" dirty="0">
+                <a:solidFill>
+                  <a:srgbClr val="4A4A4A"/>
+                </a:solidFill>
+                <a:latin typeface="Calibri"/>
+              </a:rPr>
+              <a:t>Wat zou je graag anders zien? Wat frustreert je?</a:t>
+            </a:r>
+          </a:p>
+        </p:txBody>
+      </p:sp>
+      <p:sp>
+        <p:nvSpPr>
+          <p:cNvPr id="56" name="C56"/>
+          <p:cNvSpPr/>
+          <p:nvPr/>
+        </p:nvSpPr>
+        <p:spPr>
+          <a:xfrm>
+            <a:off x="698500" y="2743200"/>
+            <a:ext cx="508000" cy="508000"/>
+          </a:xfrm>
+          <a:prstGeom prst="ellipse">
+            <a:avLst/>
           </a:prstGeom>
           <a:solidFill>
-            <a:srgbClr val="5B8DB8">
-              <a:alpha val="50000"/>
-            </a:srgbClr>
+            <a:srgbClr val="5B8DB8"/>
           </a:solidFill>
           <a:ln>
             <a:noFill/>
           </a:ln>
         </p:spPr>
         <p:txBody>
-          <a:bodyPr/>
-          <a:lstStyle/>
-          <a:p>
-            <a:endParaRPr lang="nl-NL"/>
-          </a:p>
-        </p:txBody>
-      </p:sp>
-      <p:sp>
-        <p:nvSpPr>
-          <p:cNvPr id="48" name="R48"/>
-          <p:cNvSpPr/>
-          <p:nvPr/>
-        </p:nvSpPr>
-        <p:spPr>
-          <a:xfrm>
-            <a:off x="5814060" y="1234440"/>
-            <a:ext cx="2413000" cy="1079500"/>
-          </a:xfrm>
-          <a:prstGeom prst="roundRect">
-            <a:avLst>
-              <a:gd name="adj" fmla="val 6000"/>
-            </a:avLst>
+          <a:bodyPr wrap="none" lIns="0" tIns="0" rIns="0" bIns="0" anchor="ctr"/>
+          <a:lstStyle/>
+          <a:p>
+            <a:pPr algn="ctr"/>
+            <a:r>
+              <a:rPr lang="nl-NL" sz="1800" b="1" dirty="0">
+                <a:solidFill>
+                  <a:srgbClr val="FFFFFF"/>
+                </a:solidFill>
+                <a:latin typeface="Trebuchet MS"/>
+              </a:rPr>
+              <a:t>3</a:t>
+            </a:r>
+          </a:p>
+        </p:txBody>
+      </p:sp>
+      <p:sp>
+        <p:nvSpPr>
+          <p:cNvPr id="57" name="T57"/>
+          <p:cNvSpPr/>
+          <p:nvPr/>
+        </p:nvSpPr>
+        <p:spPr>
+          <a:xfrm>
+            <a:off x="1371600" y="2705100"/>
+            <a:ext cx="7048500" cy="330200"/>
+          </a:xfrm>
+          <a:prstGeom prst="rect">
+            <a:avLst/>
+          </a:prstGeom>
+          <a:noFill/>
+          <a:ln>
+            <a:noFill/>
+          </a:ln>
+        </p:spPr>
+        <p:txBody>
+          <a:bodyPr wrap="square" lIns="36000" tIns="0" rIns="36000" bIns="0" anchor="ctr"/>
+          <a:lstStyle/>
+          <a:p>
+            <a:pPr algn="l"/>
+            <a:r>
+              <a:rPr lang="nl-NL" sz="1700" b="1" dirty="0">
+                <a:solidFill>
+                  <a:srgbClr val="1A1A1A"/>
+                </a:solidFill>
+                <a:latin typeface="Trebuchet MS"/>
+              </a:rPr>
+              <a:t>Denk in A → B</a:t>
+            </a:r>
+          </a:p>
+        </p:txBody>
+      </p:sp>
+      <p:sp>
+        <p:nvSpPr>
+          <p:cNvPr id="58" name="T58"/>
+          <p:cNvSpPr/>
+          <p:nvPr/>
+        </p:nvSpPr>
+        <p:spPr>
+          <a:xfrm>
+            <a:off x="1371600" y="3048000"/>
+            <a:ext cx="7048500" cy="330200"/>
+          </a:xfrm>
+          <a:prstGeom prst="rect">
+            <a:avLst/>
+          </a:prstGeom>
+          <a:noFill/>
+          <a:ln>
+            <a:noFill/>
+          </a:ln>
+        </p:spPr>
+        <p:txBody>
+          <a:bodyPr wrap="square" lIns="36000" tIns="0" rIns="36000" bIns="0" anchor="ctr"/>
+          <a:lstStyle/>
+          <a:p>
+            <a:pPr algn="l"/>
+            <a:r>
+              <a:rPr lang="nl-NL" sz="1400" dirty="0">
+                <a:solidFill>
+                  <a:srgbClr val="4A4A4A"/>
+                </a:solidFill>
+                <a:latin typeface="Calibri"/>
+              </a:rPr>
+              <a:t>Waar sta je nu (A) en waar wil je naartoe (B)?</a:t>
+            </a:r>
+          </a:p>
+        </p:txBody>
+      </p:sp>
+      <p:sp>
+        <p:nvSpPr>
+          <p:cNvPr id="59" name="C59"/>
+          <p:cNvSpPr/>
+          <p:nvPr/>
+        </p:nvSpPr>
+        <p:spPr>
+          <a:xfrm>
+            <a:off x="698500" y="3568700"/>
+            <a:ext cx="508000" cy="508000"/>
+          </a:xfrm>
+          <a:prstGeom prst="ellipse">
+            <a:avLst/>
           </a:prstGeom>
           <a:solidFill>
-            <a:srgbClr val="D6E6F2"/>
+            <a:srgbClr val="5B8DB8"/>
           </a:solidFill>
           <a:ln>
             <a:noFill/>
           </a:ln>
         </p:spPr>
         <p:txBody>
-          <a:bodyPr/>
-          <a:lstStyle/>
-          <a:p>
-            <a:endParaRPr lang="nl-NL"/>
-          </a:p>
-        </p:txBody>
-      </p:sp>
-      <p:sp>
-        <p:nvSpPr>
-          <p:cNvPr id="49" name="T49"/>
-          <p:cNvSpPr/>
-          <p:nvPr/>
-        </p:nvSpPr>
-        <p:spPr>
-          <a:xfrm>
-            <a:off x="5814060" y="1234440"/>
-            <a:ext cx="2413000" cy="1079500"/>
+          <a:bodyPr wrap="none" lIns="0" tIns="0" rIns="0" bIns="0" anchor="ctr"/>
+          <a:lstStyle/>
+          <a:p>
+            <a:pPr algn="ctr"/>
+            <a:r>
+              <a:rPr lang="nl-NL" sz="1800" b="1" dirty="0">
+                <a:solidFill>
+                  <a:srgbClr val="FFFFFF"/>
+                </a:solidFill>
+                <a:latin typeface="Trebuchet MS"/>
+              </a:rPr>
+              <a:t>4</a:t>
+            </a:r>
+          </a:p>
+        </p:txBody>
+      </p:sp>
+      <p:sp>
+        <p:nvSpPr>
+          <p:cNvPr id="60" name="T60"/>
+          <p:cNvSpPr/>
+          <p:nvPr/>
+        </p:nvSpPr>
+        <p:spPr>
+          <a:xfrm>
+            <a:off x="1371600" y="3530600"/>
+            <a:ext cx="7048500" cy="330200"/>
           </a:xfrm>
           <a:prstGeom prst="rect">
             <a:avLst/>
@@ -10221,77 +10856,109 @@
           </a:ln>
         </p:spPr>
         <p:txBody>
-          <a:bodyPr wrap="square" lIns="54000" tIns="36000" rIns="54000" bIns="36000" anchor="ctr"/>
-          <a:lstStyle/>
-          <a:p>
-            <a:pPr algn="ctr"/>
-            <a:r>
-              <a:rPr lang="nl-NL" sz="2000" b="1" dirty="0">
+          <a:bodyPr wrap="square" lIns="36000" tIns="0" rIns="36000" bIns="0" anchor="ctr"/>
+          <a:lstStyle/>
+          <a:p>
+            <a:pPr algn="l"/>
+            <a:r>
+              <a:rPr lang="nl-NL" sz="1700" b="1" dirty="0">
+                <a:solidFill>
+                  <a:srgbClr val="1A1A1A"/>
+                </a:solidFill>
+                <a:latin typeface="Trebuchet MS"/>
+              </a:rPr>
+              <a:t>Geef context en wens</a:t>
+            </a:r>
+          </a:p>
+        </p:txBody>
+      </p:sp>
+      <p:sp>
+        <p:nvSpPr>
+          <p:cNvPr id="61" name="T61"/>
+          <p:cNvSpPr/>
+          <p:nvPr/>
+        </p:nvSpPr>
+        <p:spPr>
+          <a:xfrm>
+            <a:off x="1371600" y="3890126"/>
+            <a:ext cx="7048500" cy="330200"/>
+          </a:xfrm>
+          <a:prstGeom prst="rect">
+            <a:avLst/>
+          </a:prstGeom>
+          <a:noFill/>
+          <a:ln>
+            <a:noFill/>
+          </a:ln>
+        </p:spPr>
+        <p:txBody>
+          <a:bodyPr wrap="square" lIns="36000" tIns="0" rIns="36000" bIns="0" anchor="ctr"/>
+          <a:lstStyle/>
+          <a:p>
+            <a:pPr algn="l"/>
+            <a:r>
+              <a:rPr lang="nl-NL" sz="1400" dirty="0">
+                <a:solidFill>
+                  <a:srgbClr val="4A4A4A"/>
+                </a:solidFill>
+                <a:latin typeface="Calibri"/>
+              </a:rPr>
+              <a:t>Waarom? Wat gebeurt voor A en na B? </a:t>
+            </a:r>
+          </a:p>
+          <a:p>
+            <a:pPr algn="l"/>
+            <a:r>
+              <a:rPr lang="nl-NL" sz="1400" dirty="0">
+                <a:solidFill>
+                  <a:srgbClr val="4A4A4A"/>
+                </a:solidFill>
+                <a:latin typeface="Calibri"/>
+              </a:rPr>
+              <a:t>Wat is je ideale situatie? Is B de bestemming?</a:t>
+            </a:r>
+          </a:p>
+        </p:txBody>
+      </p:sp>
+      <p:sp>
+        <p:nvSpPr>
+          <p:cNvPr id="62" name="T62"/>
+          <p:cNvSpPr/>
+          <p:nvPr/>
+        </p:nvSpPr>
+        <p:spPr>
+          <a:xfrm>
+            <a:off x="635000" y="4502266"/>
+            <a:ext cx="7772400" cy="330200"/>
+          </a:xfrm>
+          <a:prstGeom prst="rect">
+            <a:avLst/>
+          </a:prstGeom>
+          <a:noFill/>
+          <a:ln>
+            <a:noFill/>
+          </a:ln>
+        </p:spPr>
+        <p:txBody>
+          <a:bodyPr wrap="square" lIns="36000" tIns="0" rIns="36000" bIns="0" anchor="ctr"/>
+          <a:lstStyle/>
+          <a:p>
+            <a:pPr algn="l"/>
+            <a:r>
+              <a:rPr lang="nl-NL" sz="1500" i="1" dirty="0">
                 <a:solidFill>
                   <a:srgbClr val="2C5F7C"/>
                 </a:solidFill>
-                <a:latin typeface="Trebuchet MS"/>
-              </a:rPr>
-              <a:t>Jij kan verder</a:t>
-            </a:r>
-          </a:p>
-          <a:p>
-            <a:pPr algn="ctr">
-              <a:spcBef>
-                <a:spcPts val="150"/>
-              </a:spcBef>
-            </a:pPr>
-            <a:r>
-              <a:rPr lang="nl-NL" sz="1300" dirty="0">
-                <a:solidFill>
-                  <a:srgbClr val="5B8DB8"/>
-                </a:solidFill>
-                <a:latin typeface="Calibri"/>
-              </a:rPr>
-              <a:t>Wim verdwijnt naar de achtergrond</a:t>
-            </a:r>
-          </a:p>
-        </p:txBody>
-      </p:sp>
-      <p:sp>
-        <p:nvSpPr>
-          <p:cNvPr id="50" name="T50"/>
-          <p:cNvSpPr/>
-          <p:nvPr/>
-        </p:nvSpPr>
-        <p:spPr>
-          <a:xfrm>
-            <a:off x="440690" y="4133850"/>
-            <a:ext cx="7874000" cy="330200"/>
-          </a:xfrm>
-          <a:prstGeom prst="rect">
-            <a:avLst/>
-          </a:prstGeom>
-          <a:noFill/>
-          <a:ln>
-            <a:noFill/>
-          </a:ln>
-        </p:spPr>
-        <p:txBody>
-          <a:bodyPr wrap="square" lIns="54000" tIns="36000" rIns="54000" bIns="36000" anchor="ctr"/>
-          <a:lstStyle/>
-          <a:p>
-            <a:pPr algn="r"/>
-            <a:r>
-              <a:rPr lang="nl-NL" sz="1600" i="1" dirty="0">
-                <a:solidFill>
-                  <a:srgbClr val="5B8DB8"/>
-                </a:solidFill>
-                <a:latin typeface="Calibri"/>
-              </a:rPr>
-              <a:t>Mijn rol vervaagt naarmate jij sterker wordt.</a:t>
-            </a:r>
-          </a:p>
-        </p:txBody>
-      </p:sp>
-      <p:sp>
-        <p:nvSpPr>
-          <p:cNvPr id="51" name="T51"/>
+                <a:latin typeface="Calibri"/>
+              </a:rPr>
+              <a:t>💡 Tip: Hoog resultaat = (brede context + specifieke input) * iteratie</a:t>
+            </a:r>
+          </a:p>
+        </p:txBody>
+      </p:sp>
+      <p:sp>
+        <p:nvSpPr>
+          <p:cNvPr id="63" name="T63"/>
           <p:cNvSpPr/>
           <p:nvPr/>
         </p:nvSpPr>
@@ -10309,10 +10976,10 @@
           </a:ln>
         </p:spPr>
         <p:txBody>
-          <a:bodyPr wrap="square" lIns="54000" tIns="36000" rIns="54000" bIns="36000" anchor="ctr"/>
-          <a:lstStyle/>
-          <a:p>
-            <a:pPr algn="r"/>
+          <a:bodyPr wrap="square" lIns="36000" tIns="0" rIns="36000" bIns="0" anchor="ctr"/>
+          <a:lstStyle/>
+          <a:p>
+            <a:pPr algn="l"/>
             <a:r>
               <a:rPr lang="nl-NL" sz="1400" dirty="0">
                 <a:solidFill>
@@ -10320,15 +10987,510 @@
                 </a:solidFill>
                 <a:latin typeface="Calibri"/>
               </a:rPr>
-              <a:t>7</a:t>
-            </a:r>
-          </a:p>
-        </p:txBody>
-      </p:sp>
+              <a:t>5</a:t>
+            </a:r>
+          </a:p>
+        </p:txBody>
+      </p:sp>
+      <p:pic>
+        <p:nvPicPr>
+          <p:cNvPr id="3074" name="Picture 2" descr="Doodle plan icon hand drawn infographic notepaper piece to do list project  planning 1 2 3 steps | Premium Vector">
+            <a:extLst>
+              <a:ext uri="{FF2B5EF4-FFF2-40B4-BE49-F238E27FC236}">
+                <a16:creationId xmlns:a16="http://schemas.microsoft.com/office/drawing/2014/main" id="{CDDD4955-B53E-45D2-7B06-95EFC3998882}"/>
+              </a:ext>
+            </a:extLst>
+          </p:cNvPr>
+          <p:cNvPicPr>
+            <a:picLocks noChangeAspect="1" noChangeArrowheads="1"/>
+          </p:cNvPicPr>
+          <p:nvPr/>
+        </p:nvPicPr>
+        <p:blipFill>
+          <a:blip r:embed="rId2">
+            <a:extLst>
+              <a:ext uri="{28A0092B-C50C-407E-A947-70E740481C1C}">
+                <a14:useLocalDpi xmlns:a14="http://schemas.microsoft.com/office/drawing/2010/main" val="0"/>
+              </a:ext>
+            </a:extLst>
+          </a:blip>
+          <a:srcRect/>
+          <a:stretch>
+            <a:fillRect/>
+          </a:stretch>
+        </p:blipFill>
+        <p:spPr bwMode="auto">
+          <a:xfrm rot="826834">
+            <a:off x="6427816" y="1064029"/>
+            <a:ext cx="2716184" cy="2716184"/>
+          </a:xfrm>
+          <a:prstGeom prst="rect">
+            <a:avLst/>
+          </a:prstGeom>
+          <a:noFill/>
+          <a:extLst>
+            <a:ext uri="{909E8E84-426E-40DD-AFC4-6F175D3DCCD1}">
+              <a14:hiddenFill xmlns:a14="http://schemas.microsoft.com/office/drawing/2010/main">
+                <a:solidFill>
+                  <a:srgbClr val="FFFFFF"/>
+                </a:solidFill>
+              </a14:hiddenFill>
+            </a:ext>
+          </a:extLst>
+        </p:spPr>
+      </p:pic>
     </p:spTree>
     <p:extLst>
       <p:ext uri="{BB962C8B-B14F-4D97-AF65-F5344CB8AC3E}">
-        <p14:creationId xmlns:p14="http://schemas.microsoft.com/office/powerpoint/2010/main" val="3404714821"/>
+        <p14:creationId xmlns:p14="http://schemas.microsoft.com/office/powerpoint/2010/main" val="276683111"/>
+      </p:ext>
+    </p:extLst>
+  </p:cSld>
+  <p:clrMapOvr>
+    <a:masterClrMapping/>
+  </p:clrMapOvr>
+</p:sld>
+</file>
+
+<file path=ppt/slides/slide9.xml><?xml version="1.0" encoding="utf-8"?>
+<p:sld xmlns:a="http://schemas.openxmlformats.org/drawingml/2006/main" xmlns:r="http://schemas.openxmlformats.org/officeDocument/2006/relationships" xmlns:p="http://schemas.openxmlformats.org/presentationml/2006/main" show="0">
+  <p:cSld>
+    <p:spTree>
+      <p:nvGrpSpPr>
+        <p:cNvPr id="1" name="">
+          <a:extLst>
+            <a:ext uri="{FF2B5EF4-FFF2-40B4-BE49-F238E27FC236}">
+              <a16:creationId xmlns:a16="http://schemas.microsoft.com/office/drawing/2014/main" id="{8D50EC0A-F7B9-98E7-5368-A4B5067823C1}"/>
+            </a:ext>
+          </a:extLst>
+        </p:cNvPr>
+        <p:cNvGrpSpPr/>
+        <p:nvPr/>
+      </p:nvGrpSpPr>
+      <p:grpSpPr>
+        <a:xfrm>
+          <a:off x="0" y="0"/>
+          <a:ext cx="0" cy="0"/>
+          <a:chOff x="0" y="0"/>
+          <a:chExt cx="0" cy="0"/>
+        </a:xfrm>
+      </p:grpSpPr>
+      <p:sp>
+        <p:nvSpPr>
+          <p:cNvPr id="2" name="Rechthoek 1">
+            <a:extLst>
+              <a:ext uri="{FF2B5EF4-FFF2-40B4-BE49-F238E27FC236}">
+                <a16:creationId xmlns:a16="http://schemas.microsoft.com/office/drawing/2014/main" id="{95AD3011-F4C5-3F4C-4852-B95357D5653D}"/>
+              </a:ext>
+            </a:extLst>
+          </p:cNvPr>
+          <p:cNvSpPr/>
+          <p:nvPr/>
+        </p:nvSpPr>
+        <p:spPr>
+          <a:xfrm>
+            <a:off x="0" y="0"/>
+            <a:ext cx="9144000" cy="114300"/>
+          </a:xfrm>
+          <a:prstGeom prst="rect">
+            <a:avLst/>
+          </a:prstGeom>
+          <a:solidFill>
+            <a:srgbClr val="5B8DB8"/>
+          </a:solidFill>
+          <a:ln w="12700" cap="flat" cmpd="sng" algn="ctr">
+            <a:noFill/>
+            <a:prstDash val="solid"/>
+            <a:miter lim="800000"/>
+          </a:ln>
+        </p:spPr>
+        <p:style>
+          <a:lnRef idx="2">
+            <a:schemeClr val="accent1">
+              <a:shade val="15000"/>
+            </a:schemeClr>
+          </a:lnRef>
+          <a:fillRef idx="1">
+            <a:schemeClr val="accent1"/>
+          </a:fillRef>
+          <a:effectRef idx="0">
+            <a:schemeClr val="accent1"/>
+          </a:effectRef>
+          <a:fontRef idx="minor">
+            <a:schemeClr val="lt1"/>
+          </a:fontRef>
+        </p:style>
+        <p:txBody>
+          <a:bodyPr vertOverflow="clip" horzOverflow="clip" rtlCol="0" anchor="t"/>
+          <a:lstStyle/>
+          <a:p>
+            <a:pPr algn="l"/>
+            <a:endParaRPr lang="nl-BE"/>
+          </a:p>
+        </p:txBody>
+      </p:sp>
+      <p:sp>
+        <p:nvSpPr>
+          <p:cNvPr id="3" name="Tekstvak 2">
+            <a:extLst>
+              <a:ext uri="{FF2B5EF4-FFF2-40B4-BE49-F238E27FC236}">
+                <a16:creationId xmlns:a16="http://schemas.microsoft.com/office/drawing/2014/main" id="{4DB21216-F948-A7D1-65F4-E180C81D9B9A}"/>
+              </a:ext>
+            </a:extLst>
+          </p:cNvPr>
+          <p:cNvSpPr txBox="1"/>
+          <p:nvPr/>
+        </p:nvSpPr>
+        <p:spPr>
+          <a:xfrm>
+            <a:off x="635000" y="279400"/>
+            <a:ext cx="7772400" cy="523220"/>
+          </a:xfrm>
+          <a:prstGeom prst="rect">
+            <a:avLst/>
+          </a:prstGeom>
+          <a:noFill/>
+        </p:spPr>
+        <p:txBody>
+          <a:bodyPr vertOverflow="overflow" vert="horz" wrap="square" rtlCol="0" anchor="t">
+            <a:spAutoFit/>
+          </a:bodyPr>
+          <a:lstStyle/>
+          <a:p>
+            <a:pPr algn="l"/>
+            <a:r>
+              <a:rPr lang="nl-BE" sz="2800" b="1" dirty="0">
+                <a:solidFill>
+                  <a:srgbClr val="1A1A1A"/>
+                </a:solidFill>
+                <a:latin typeface="Trebuchet MS"/>
+              </a:rPr>
+              <a:t>Voorbeelden, ideeën..</a:t>
+            </a:r>
+          </a:p>
+        </p:txBody>
+      </p:sp>
+      <p:sp>
+        <p:nvSpPr>
+          <p:cNvPr id="6" name="Tekstvak 5">
+            <a:extLst>
+              <a:ext uri="{FF2B5EF4-FFF2-40B4-BE49-F238E27FC236}">
+                <a16:creationId xmlns:a16="http://schemas.microsoft.com/office/drawing/2014/main" id="{D6530194-C24D-9643-3C12-7C7FCFC9A852}"/>
+              </a:ext>
+            </a:extLst>
+          </p:cNvPr>
+          <p:cNvSpPr txBox="1"/>
+          <p:nvPr/>
+        </p:nvSpPr>
+        <p:spPr>
+          <a:xfrm>
+            <a:off x="601749" y="1209156"/>
+            <a:ext cx="7874000" cy="3539430"/>
+          </a:xfrm>
+          <a:prstGeom prst="rect">
+            <a:avLst/>
+          </a:prstGeom>
+          <a:noFill/>
+        </p:spPr>
+        <p:txBody>
+          <a:bodyPr vertOverflow="overflow" vert="horz" wrap="square" rtlCol="0" anchor="t">
+            <a:spAutoFit/>
+          </a:bodyPr>
+          <a:lstStyle/>
+          <a:p>
+            <a:pPr algn="l"/>
+            <a:r>
+              <a:rPr lang="nl-BE" sz="1600" dirty="0">
+                <a:solidFill>
+                  <a:srgbClr val="4A4A4A"/>
+                </a:solidFill>
+                <a:latin typeface="Calibri"/>
+                <a:cs typeface="Calibri"/>
+              </a:rPr>
+              <a:t>Specifieke optimalisaties</a:t>
+            </a:r>
+          </a:p>
+          <a:p>
+            <a:pPr marL="285750" indent="-285750" algn="l">
+              <a:buFont typeface="Arial" panose="020B0604020202020204" pitchFamily="34" charset="0"/>
+              <a:buChar char="•"/>
+            </a:pPr>
+            <a:r>
+              <a:rPr lang="nl-BE" sz="1600" dirty="0">
+                <a:solidFill>
+                  <a:srgbClr val="4A4A4A"/>
+                </a:solidFill>
+                <a:latin typeface="Calibri"/>
+                <a:cs typeface="Calibri"/>
+              </a:rPr>
+              <a:t>Data verwerken en interpreteren met Excel</a:t>
+            </a:r>
+          </a:p>
+          <a:p>
+            <a:pPr marL="285750" indent="-285750" algn="l">
+              <a:buFont typeface="Arial" panose="020B0604020202020204" pitchFamily="34" charset="0"/>
+              <a:buChar char="•"/>
+            </a:pPr>
+            <a:r>
+              <a:rPr lang="nl-BE" sz="1600" dirty="0">
+                <a:solidFill>
+                  <a:srgbClr val="4A4A4A"/>
+                </a:solidFill>
+                <a:latin typeface="Calibri"/>
+                <a:cs typeface="Calibri"/>
+              </a:rPr>
+              <a:t>Slides maken (visueel en inhoudelijk) met PowerPoint</a:t>
+            </a:r>
+          </a:p>
+          <a:p>
+            <a:pPr marL="285750" indent="-285750" algn="l">
+              <a:buFont typeface="Arial" panose="020B0604020202020204" pitchFamily="34" charset="0"/>
+              <a:buChar char="•"/>
+            </a:pPr>
+            <a:r>
+              <a:rPr lang="nl-BE" sz="1600" dirty="0">
+                <a:solidFill>
+                  <a:srgbClr val="4A4A4A"/>
+                </a:solidFill>
+                <a:latin typeface="Calibri"/>
+                <a:cs typeface="Calibri"/>
+              </a:rPr>
+              <a:t>Mailtjes automatiseren</a:t>
+            </a:r>
+          </a:p>
+          <a:p>
+            <a:pPr marL="285750" indent="-285750">
+              <a:buFont typeface="Arial" panose="020B0604020202020204" pitchFamily="34" charset="0"/>
+              <a:buChar char="•"/>
+            </a:pPr>
+            <a:r>
+              <a:rPr lang="nl-BE" sz="1600" dirty="0">
+                <a:solidFill>
+                  <a:srgbClr val="4A4A4A"/>
+                </a:solidFill>
+                <a:cs typeface="Calibri"/>
+              </a:rPr>
+              <a:t>Meetings transcriberen &amp; samenvatten</a:t>
+            </a:r>
+          </a:p>
+          <a:p>
+            <a:pPr marL="285750" indent="-285750">
+              <a:buFont typeface="Arial" panose="020B0604020202020204" pitchFamily="34" charset="0"/>
+              <a:buChar char="•"/>
+            </a:pPr>
+            <a:r>
+              <a:rPr lang="nl-BE" sz="1600" dirty="0">
+                <a:solidFill>
+                  <a:srgbClr val="4A4A4A"/>
+                </a:solidFill>
+                <a:latin typeface="Calibri"/>
+                <a:cs typeface="Calibri"/>
+              </a:rPr>
+              <a:t>…</a:t>
+            </a:r>
+          </a:p>
+          <a:p>
+            <a:pPr algn="l"/>
+            <a:endParaRPr lang="nl-BE" sz="1600" dirty="0">
+              <a:solidFill>
+                <a:srgbClr val="4A4A4A"/>
+              </a:solidFill>
+              <a:latin typeface="Calibri"/>
+              <a:cs typeface="Calibri"/>
+            </a:endParaRPr>
+          </a:p>
+          <a:p>
+            <a:pPr algn="l"/>
+            <a:r>
+              <a:rPr lang="nl-BE" sz="1600" dirty="0">
+                <a:solidFill>
+                  <a:srgbClr val="4A4A4A"/>
+                </a:solidFill>
+                <a:latin typeface="Calibri"/>
+                <a:cs typeface="Calibri"/>
+              </a:rPr>
+              <a:t>Zelforganisatie</a:t>
+            </a:r>
+          </a:p>
+          <a:p>
+            <a:pPr marL="285750" indent="-285750" algn="l">
+              <a:buFont typeface="Arial" panose="020B0604020202020204" pitchFamily="34" charset="0"/>
+              <a:buChar char="•"/>
+            </a:pPr>
+            <a:r>
+              <a:rPr lang="nl-BE" sz="1600" dirty="0">
+                <a:solidFill>
+                  <a:srgbClr val="4A4A4A"/>
+                </a:solidFill>
+                <a:latin typeface="Calibri"/>
+                <a:cs typeface="Calibri"/>
+              </a:rPr>
+              <a:t>Samen een plan opstellen</a:t>
+            </a:r>
+          </a:p>
+          <a:p>
+            <a:pPr marL="285750" indent="-285750" algn="l">
+              <a:buFont typeface="Arial" panose="020B0604020202020204" pitchFamily="34" charset="0"/>
+              <a:buChar char="•"/>
+            </a:pPr>
+            <a:r>
+              <a:rPr lang="nl-BE" sz="1600" dirty="0">
+                <a:solidFill>
+                  <a:srgbClr val="4A4A4A"/>
+                </a:solidFill>
+                <a:latin typeface="Calibri"/>
+                <a:cs typeface="Calibri"/>
+              </a:rPr>
+              <a:t>Ondersteuning (Outlook) agenda</a:t>
+            </a:r>
+          </a:p>
+          <a:p>
+            <a:pPr marL="285750" indent="-285750" algn="l">
+              <a:buFont typeface="Arial" panose="020B0604020202020204" pitchFamily="34" charset="0"/>
+              <a:buChar char="•"/>
+            </a:pPr>
+            <a:r>
+              <a:rPr lang="nl-BE" sz="1600" dirty="0">
+                <a:solidFill>
+                  <a:srgbClr val="4A4A4A"/>
+                </a:solidFill>
+                <a:latin typeface="Calibri"/>
+                <a:cs typeface="Calibri"/>
+              </a:rPr>
+              <a:t>Op jouw maat tips aangeboden krijgen</a:t>
+            </a:r>
+          </a:p>
+          <a:p>
+            <a:pPr marL="285750" indent="-285750" algn="l">
+              <a:buFont typeface="Arial" panose="020B0604020202020204" pitchFamily="34" charset="0"/>
+              <a:buChar char="•"/>
+            </a:pPr>
+            <a:r>
+              <a:rPr lang="nl-BE" sz="1600" dirty="0">
+                <a:solidFill>
+                  <a:srgbClr val="4A4A4A"/>
+                </a:solidFill>
+                <a:latin typeface="Calibri"/>
+                <a:cs typeface="Calibri"/>
+              </a:rPr>
+              <a:t>…</a:t>
+            </a:r>
+          </a:p>
+          <a:p>
+            <a:pPr marL="285750" indent="-285750" algn="l">
+              <a:buFont typeface="Arial" panose="020B0604020202020204" pitchFamily="34" charset="0"/>
+              <a:buChar char="•"/>
+            </a:pPr>
+            <a:endParaRPr lang="nl-BE" sz="1600" dirty="0">
+              <a:solidFill>
+                <a:srgbClr val="4A4A4A"/>
+              </a:solidFill>
+              <a:latin typeface="Calibri"/>
+              <a:cs typeface="Calibri"/>
+            </a:endParaRPr>
+          </a:p>
+          <a:p>
+            <a:pPr algn="l"/>
+            <a:r>
+              <a:rPr lang="nl-BE" sz="1600" dirty="0">
+                <a:solidFill>
+                  <a:srgbClr val="4A4A4A"/>
+                </a:solidFill>
+                <a:latin typeface="Calibri"/>
+                <a:cs typeface="Calibri"/>
+              </a:rPr>
+              <a:t>Tot zelf volledig op maat gemaakte tools – toegespitst op jouw specifieke noden</a:t>
+            </a:r>
+          </a:p>
+        </p:txBody>
+      </p:sp>
+      <p:sp>
+        <p:nvSpPr>
+          <p:cNvPr id="7" name="Tekstvak 6">
+            <a:extLst>
+              <a:ext uri="{FF2B5EF4-FFF2-40B4-BE49-F238E27FC236}">
+                <a16:creationId xmlns:a16="http://schemas.microsoft.com/office/drawing/2014/main" id="{0EEFE08C-54FF-0C7D-4C35-04C1B8D6AA39}"/>
+              </a:ext>
+            </a:extLst>
+          </p:cNvPr>
+          <p:cNvSpPr txBox="1"/>
+          <p:nvPr/>
+        </p:nvSpPr>
+        <p:spPr>
+          <a:xfrm>
+            <a:off x="8407400" y="4749800"/>
+            <a:ext cx="457200" cy="279400"/>
+          </a:xfrm>
+          <a:prstGeom prst="rect">
+            <a:avLst/>
+          </a:prstGeom>
+          <a:noFill/>
+        </p:spPr>
+        <p:txBody>
+          <a:bodyPr vertOverflow="overflow" vert="horz" wrap="square" rtlCol="0" anchor="t">
+            <a:spAutoFit/>
+          </a:bodyPr>
+          <a:lstStyle/>
+          <a:p>
+            <a:pPr algn="l"/>
+            <a:r>
+              <a:rPr lang="nl-BE" sz="1400">
+                <a:solidFill>
+                  <a:srgbClr val="AAAAAA"/>
+                </a:solidFill>
+                <a:latin typeface="Calibri"/>
+                <a:cs typeface="Calibri"/>
+              </a:rPr>
+              <a:t>2</a:t>
+            </a:r>
+          </a:p>
+        </p:txBody>
+      </p:sp>
+      <p:sp>
+        <p:nvSpPr>
+          <p:cNvPr id="8" name="Tekstvak 7">
+            <a:extLst>
+              <a:ext uri="{FF2B5EF4-FFF2-40B4-BE49-F238E27FC236}">
+                <a16:creationId xmlns:a16="http://schemas.microsoft.com/office/drawing/2014/main" id="{77C15C83-6FA1-2F7F-3346-37A45BDA64AC}"/>
+              </a:ext>
+            </a:extLst>
+          </p:cNvPr>
+          <p:cNvSpPr txBox="1"/>
+          <p:nvPr/>
+        </p:nvSpPr>
+        <p:spPr>
+          <a:xfrm>
+            <a:off x="5389643" y="3391911"/>
+            <a:ext cx="3687855" cy="523220"/>
+          </a:xfrm>
+          <a:prstGeom prst="rect">
+            <a:avLst/>
+          </a:prstGeom>
+          <a:noFill/>
+        </p:spPr>
+        <p:txBody>
+          <a:bodyPr vertOverflow="overflow" vert="horz" wrap="square" rtlCol="0" anchor="t">
+            <a:spAutoFit/>
+          </a:bodyPr>
+          <a:lstStyle/>
+          <a:p>
+            <a:pPr algn="l"/>
+            <a:r>
+              <a:rPr lang="nl-BE" sz="2800" b="1" dirty="0">
+                <a:solidFill>
+                  <a:srgbClr val="1A1A1A"/>
+                </a:solidFill>
+                <a:latin typeface="Trebuchet MS"/>
+              </a:rPr>
+              <a:t>..the sky is the limit</a:t>
+            </a:r>
+          </a:p>
+        </p:txBody>
+      </p:sp>
+    </p:spTree>
+    <p:extLst>
+      <p:ext uri="{BB962C8B-B14F-4D97-AF65-F5344CB8AC3E}">
+        <p14:creationId xmlns:p14="http://schemas.microsoft.com/office/powerpoint/2010/main" val="2572914434"/>
       </p:ext>
     </p:extLst>
   </p:cSld>
